--- a/slides/00-CourseIntroduction.pptx
+++ b/slides/00-CourseIntroduction.pptx
@@ -5,7 +5,7 @@
     <p:sldMasterId id="2147484006" r:id="rId1"/>
   </p:sldMasterIdLst>
   <p:notesMasterIdLst>
-    <p:notesMasterId r:id="rId31"/>
+    <p:notesMasterId r:id="rId36"/>
   </p:notesMasterIdLst>
   <p:sldIdLst>
     <p:sldId id="256" r:id="rId2"/>
@@ -18,25 +18,30 @@
     <p:sldId id="510" r:id="rId9"/>
     <p:sldId id="504" r:id="rId10"/>
     <p:sldId id="426" r:id="rId11"/>
-    <p:sldId id="403" r:id="rId12"/>
-    <p:sldId id="470" r:id="rId13"/>
-    <p:sldId id="495" r:id="rId14"/>
-    <p:sldId id="474" r:id="rId15"/>
-    <p:sldId id="497" r:id="rId16"/>
-    <p:sldId id="487" r:id="rId17"/>
-    <p:sldId id="498" r:id="rId18"/>
-    <p:sldId id="490" r:id="rId19"/>
-    <p:sldId id="488" r:id="rId20"/>
-    <p:sldId id="489" r:id="rId21"/>
-    <p:sldId id="501" r:id="rId22"/>
-    <p:sldId id="506" r:id="rId23"/>
-    <p:sldId id="491" r:id="rId24"/>
-    <p:sldId id="496" r:id="rId25"/>
-    <p:sldId id="463" r:id="rId26"/>
-    <p:sldId id="502" r:id="rId27"/>
-    <p:sldId id="464" r:id="rId28"/>
-    <p:sldId id="515" r:id="rId29"/>
-    <p:sldId id="514" r:id="rId30"/>
+    <p:sldId id="516" r:id="rId12"/>
+    <p:sldId id="519" r:id="rId13"/>
+    <p:sldId id="520" r:id="rId14"/>
+    <p:sldId id="403" r:id="rId15"/>
+    <p:sldId id="470" r:id="rId16"/>
+    <p:sldId id="495" r:id="rId17"/>
+    <p:sldId id="474" r:id="rId18"/>
+    <p:sldId id="497" r:id="rId19"/>
+    <p:sldId id="487" r:id="rId20"/>
+    <p:sldId id="517" r:id="rId21"/>
+    <p:sldId id="498" r:id="rId22"/>
+    <p:sldId id="490" r:id="rId23"/>
+    <p:sldId id="488" r:id="rId24"/>
+    <p:sldId id="489" r:id="rId25"/>
+    <p:sldId id="501" r:id="rId26"/>
+    <p:sldId id="506" r:id="rId27"/>
+    <p:sldId id="518" r:id="rId28"/>
+    <p:sldId id="491" r:id="rId29"/>
+    <p:sldId id="496" r:id="rId30"/>
+    <p:sldId id="463" r:id="rId31"/>
+    <p:sldId id="502" r:id="rId32"/>
+    <p:sldId id="464" r:id="rId33"/>
+    <p:sldId id="521" r:id="rId34"/>
+    <p:sldId id="514" r:id="rId35"/>
   </p:sldIdLst>
   <p:sldSz cx="12192000" cy="6858000"/>
   <p:notesSz cx="6858000" cy="9144000"/>
@@ -225,7 +230,7 @@
           <a:p>
             <a:fld id="{C5B45307-6ED4-B142-BD64-10F739779302}" type="datetimeFigureOut">
               <a:rPr lang="en-US" smtClean="0"/>
-              <a:t>8/26/25</a:t>
+              <a:t>8/18/26</a:t>
             </a:fld>
             <a:endParaRPr lang="en-US"/>
           </a:p>
@@ -652,7 +657,7 @@
               <a:pPr>
                 <a:defRPr/>
               </a:pPr>
-              <a:t>15</a:t>
+              <a:t>18</a:t>
             </a:fld>
             <a:endParaRPr lang="en-US"/>
           </a:p>
@@ -728,7 +733,7 @@
           <a:noFill/>
           <a:extLst>
             <a:ext uri="{909E8E84-426E-40dd-AFC4-6F175D3DCCD1}">
-              <a14:hiddenFill xmlns="" xmlns:a14="http://schemas.microsoft.com/office/drawing/2010/main">
+              <a14:hiddenFill xmlns:a14="http://schemas.microsoft.com/office/drawing/2010/main" xmlns="">
                 <a:solidFill>
                   <a:srgbClr val="FFFFFF"/>
                 </a:solidFill>
@@ -787,7 +792,7 @@
             </a:ln>
             <a:extLst>
               <a:ext uri="{91240B29-F687-4f45-9708-019B960494DF}">
-                <a14:hiddenLine xmlns="" xmlns:a14="http://schemas.microsoft.com/office/drawing/2010/main" w="9525">
+                <a14:hiddenLine xmlns:a14="http://schemas.microsoft.com/office/drawing/2010/main" xmlns="" w="9525">
                   <a:solidFill>
                     <a:srgbClr val="000000"/>
                   </a:solidFill>
@@ -877,7 +882,7 @@
             </a:ln>
             <a:extLst>
               <a:ext uri="{91240B29-F687-4f45-9708-019B960494DF}">
-                <a14:hiddenLine xmlns="" xmlns:a14="http://schemas.microsoft.com/office/drawing/2010/main" w="9525">
+                <a14:hiddenLine xmlns:a14="http://schemas.microsoft.com/office/drawing/2010/main" xmlns="" w="9525">
                   <a:solidFill>
                     <a:srgbClr val="000000"/>
                   </a:solidFill>
@@ -967,7 +972,7 @@
             </a:ln>
             <a:extLst>
               <a:ext uri="{91240B29-F687-4f45-9708-019B960494DF}">
-                <a14:hiddenLine xmlns="" xmlns:a14="http://schemas.microsoft.com/office/drawing/2010/main" w="9525">
+                <a14:hiddenLine xmlns:a14="http://schemas.microsoft.com/office/drawing/2010/main" xmlns="" w="9525">
                   <a:solidFill>
                     <a:srgbClr val="000000"/>
                   </a:solidFill>
@@ -1001,7 +1006,7 @@
             </a:ln>
             <a:extLst>
               <a:ext uri="{91240B29-F687-4f45-9708-019B960494DF}">
-                <a14:hiddenLine xmlns="" xmlns:a14="http://schemas.microsoft.com/office/drawing/2010/main" w="9525">
+                <a14:hiddenLine xmlns:a14="http://schemas.microsoft.com/office/drawing/2010/main" xmlns="" w="9525">
                   <a:solidFill>
                     <a:srgbClr val="000000"/>
                   </a:solidFill>
@@ -1091,7 +1096,7 @@
             </a:ln>
             <a:extLst>
               <a:ext uri="{91240B29-F687-4f45-9708-019B960494DF}">
-                <a14:hiddenLine xmlns="" xmlns:a14="http://schemas.microsoft.com/office/drawing/2010/main" w="9525">
+                <a14:hiddenLine xmlns:a14="http://schemas.microsoft.com/office/drawing/2010/main" xmlns="" w="9525">
                   <a:solidFill>
                     <a:srgbClr val="000000"/>
                   </a:solidFill>
@@ -1153,7 +1158,7 @@
             </a:ln>
             <a:extLst>
               <a:ext uri="{91240B29-F687-4f45-9708-019B960494DF}">
-                <a14:hiddenLine xmlns="" xmlns:a14="http://schemas.microsoft.com/office/drawing/2010/main" w="9525">
+                <a14:hiddenLine xmlns:a14="http://schemas.microsoft.com/office/drawing/2010/main" xmlns="" w="9525">
                   <a:solidFill>
                     <a:srgbClr val="000000"/>
                   </a:solidFill>
@@ -1215,7 +1220,7 @@
             </a:ln>
             <a:extLst>
               <a:ext uri="{91240B29-F687-4f45-9708-019B960494DF}">
-                <a14:hiddenLine xmlns="" xmlns:a14="http://schemas.microsoft.com/office/drawing/2010/main" w="9525">
+                <a14:hiddenLine xmlns:a14="http://schemas.microsoft.com/office/drawing/2010/main" xmlns="" w="9525">
                   <a:solidFill>
                     <a:srgbClr val="000000"/>
                   </a:solidFill>
@@ -1305,7 +1310,7 @@
             </a:ln>
             <a:extLst>
               <a:ext uri="{91240B29-F687-4f45-9708-019B960494DF}">
-                <a14:hiddenLine xmlns="" xmlns:a14="http://schemas.microsoft.com/office/drawing/2010/main" w="9525">
+                <a14:hiddenLine xmlns:a14="http://schemas.microsoft.com/office/drawing/2010/main" xmlns="" w="9525">
                   <a:solidFill>
                     <a:srgbClr val="000000"/>
                   </a:solidFill>
@@ -1367,7 +1372,7 @@
             </a:ln>
             <a:extLst>
               <a:ext uri="{91240B29-F687-4f45-9708-019B960494DF}">
-                <a14:hiddenLine xmlns="" xmlns:a14="http://schemas.microsoft.com/office/drawing/2010/main" w="9525">
+                <a14:hiddenLine xmlns:a14="http://schemas.microsoft.com/office/drawing/2010/main" xmlns="" w="9525">
                   <a:solidFill>
                     <a:srgbClr val="000000"/>
                   </a:solidFill>
@@ -1429,7 +1434,7 @@
             </a:ln>
             <a:extLst>
               <a:ext uri="{91240B29-F687-4f45-9708-019B960494DF}">
-                <a14:hiddenLine xmlns="" xmlns:a14="http://schemas.microsoft.com/office/drawing/2010/main" w="9525">
+                <a14:hiddenLine xmlns:a14="http://schemas.microsoft.com/office/drawing/2010/main" xmlns="" w="9525">
                   <a:solidFill>
                     <a:srgbClr val="000000"/>
                   </a:solidFill>
@@ -1519,7 +1524,7 @@
             </a:ln>
             <a:extLst>
               <a:ext uri="{91240B29-F687-4f45-9708-019B960494DF}">
-                <a14:hiddenLine xmlns="" xmlns:a14="http://schemas.microsoft.com/office/drawing/2010/main" w="9525">
+                <a14:hiddenLine xmlns:a14="http://schemas.microsoft.com/office/drawing/2010/main" xmlns="" w="9525">
                   <a:solidFill>
                     <a:srgbClr val="000000"/>
                   </a:solidFill>
@@ -1609,7 +1614,7 @@
             </a:ln>
             <a:extLst>
               <a:ext uri="{91240B29-F687-4f45-9708-019B960494DF}">
-                <a14:hiddenLine xmlns="" xmlns:a14="http://schemas.microsoft.com/office/drawing/2010/main" w="9525">
+                <a14:hiddenLine xmlns:a14="http://schemas.microsoft.com/office/drawing/2010/main" xmlns="" w="9525">
                   <a:solidFill>
                     <a:srgbClr val="000000"/>
                   </a:solidFill>
@@ -1671,7 +1676,7 @@
             </a:ln>
             <a:extLst>
               <a:ext uri="{91240B29-F687-4f45-9708-019B960494DF}">
-                <a14:hiddenLine xmlns="" xmlns:a14="http://schemas.microsoft.com/office/drawing/2010/main" w="9525">
+                <a14:hiddenLine xmlns:a14="http://schemas.microsoft.com/office/drawing/2010/main" xmlns="" w="9525">
                   <a:solidFill>
                     <a:srgbClr val="000000"/>
                   </a:solidFill>
@@ -1781,7 +1786,7 @@
             </a:ln>
             <a:extLst>
               <a:ext uri="{91240B29-F687-4f45-9708-019B960494DF}">
-                <a14:hiddenLine xmlns="" xmlns:a14="http://schemas.microsoft.com/office/drawing/2010/main" w="9525">
+                <a14:hiddenLine xmlns:a14="http://schemas.microsoft.com/office/drawing/2010/main" xmlns="" w="9525">
                   <a:solidFill>
                     <a:srgbClr val="000000"/>
                   </a:solidFill>
@@ -1843,7 +1848,7 @@
             </a:ln>
             <a:extLst>
               <a:ext uri="{91240B29-F687-4f45-9708-019B960494DF}">
-                <a14:hiddenLine xmlns="" xmlns:a14="http://schemas.microsoft.com/office/drawing/2010/main" w="9525">
+                <a14:hiddenLine xmlns:a14="http://schemas.microsoft.com/office/drawing/2010/main" xmlns="" w="9525">
                   <a:solidFill>
                     <a:srgbClr val="000000"/>
                   </a:solidFill>
@@ -1933,7 +1938,7 @@
             </a:ln>
             <a:extLst>
               <a:ext uri="{91240B29-F687-4f45-9708-019B960494DF}">
-                <a14:hiddenLine xmlns="" xmlns:a14="http://schemas.microsoft.com/office/drawing/2010/main" w="9525">
+                <a14:hiddenLine xmlns:a14="http://schemas.microsoft.com/office/drawing/2010/main" xmlns="" w="9525">
                   <a:solidFill>
                     <a:srgbClr val="000000"/>
                   </a:solidFill>
@@ -2023,7 +2028,7 @@
             </a:ln>
             <a:extLst>
               <a:ext uri="{91240B29-F687-4f45-9708-019B960494DF}">
-                <a14:hiddenLine xmlns="" xmlns:a14="http://schemas.microsoft.com/office/drawing/2010/main" w="9525">
+                <a14:hiddenLine xmlns:a14="http://schemas.microsoft.com/office/drawing/2010/main" xmlns="" w="9525">
                   <a:solidFill>
                     <a:srgbClr val="000000"/>
                   </a:solidFill>
@@ -2085,7 +2090,7 @@
             </a:ln>
             <a:extLst>
               <a:ext uri="{91240B29-F687-4f45-9708-019B960494DF}">
-                <a14:hiddenLine xmlns="" xmlns:a14="http://schemas.microsoft.com/office/drawing/2010/main" w="9525">
+                <a14:hiddenLine xmlns:a14="http://schemas.microsoft.com/office/drawing/2010/main" xmlns="" w="9525">
                   <a:solidFill>
                     <a:srgbClr val="000000"/>
                   </a:solidFill>
@@ -2175,7 +2180,7 @@
             </a:ln>
             <a:extLst>
               <a:ext uri="{91240B29-F687-4f45-9708-019B960494DF}">
-                <a14:hiddenLine xmlns="" xmlns:a14="http://schemas.microsoft.com/office/drawing/2010/main" w="9525">
+                <a14:hiddenLine xmlns:a14="http://schemas.microsoft.com/office/drawing/2010/main" xmlns="" w="9525">
                   <a:solidFill>
                     <a:srgbClr val="000000"/>
                   </a:solidFill>
@@ -2265,7 +2270,7 @@
             </a:ln>
             <a:extLst>
               <a:ext uri="{91240B29-F687-4f45-9708-019B960494DF}">
-                <a14:hiddenLine xmlns="" xmlns:a14="http://schemas.microsoft.com/office/drawing/2010/main" w="9525">
+                <a14:hiddenLine xmlns:a14="http://schemas.microsoft.com/office/drawing/2010/main" xmlns="" w="9525">
                   <a:solidFill>
                     <a:srgbClr val="000000"/>
                   </a:solidFill>
@@ -2321,7 +2326,7 @@
             </a:ln>
             <a:extLst>
               <a:ext uri="{91240B29-F687-4f45-9708-019B960494DF}">
-                <a14:hiddenLine xmlns="" xmlns:a14="http://schemas.microsoft.com/office/drawing/2010/main" w="9525">
+                <a14:hiddenLine xmlns:a14="http://schemas.microsoft.com/office/drawing/2010/main" xmlns="" w="9525">
                   <a:solidFill>
                     <a:srgbClr val="000000"/>
                   </a:solidFill>
@@ -2411,7 +2416,7 @@
             </a:ln>
             <a:extLst>
               <a:ext uri="{91240B29-F687-4f45-9708-019B960494DF}">
-                <a14:hiddenLine xmlns="" xmlns:a14="http://schemas.microsoft.com/office/drawing/2010/main" w="9525">
+                <a14:hiddenLine xmlns:a14="http://schemas.microsoft.com/office/drawing/2010/main" xmlns="" w="9525">
                   <a:solidFill>
                     <a:srgbClr val="000000"/>
                   </a:solidFill>
@@ -2467,7 +2472,7 @@
             </a:ln>
             <a:extLst>
               <a:ext uri="{91240B29-F687-4f45-9708-019B960494DF}">
-                <a14:hiddenLine xmlns="" xmlns:a14="http://schemas.microsoft.com/office/drawing/2010/main" w="9525">
+                <a14:hiddenLine xmlns:a14="http://schemas.microsoft.com/office/drawing/2010/main" xmlns="" w="9525">
                   <a:solidFill>
                     <a:srgbClr val="000000"/>
                   </a:solidFill>
@@ -2557,7 +2562,7 @@
             </a:ln>
             <a:extLst>
               <a:ext uri="{91240B29-F687-4f45-9708-019B960494DF}">
-                <a14:hiddenLine xmlns="" xmlns:a14="http://schemas.microsoft.com/office/drawing/2010/main" w="9525">
+                <a14:hiddenLine xmlns:a14="http://schemas.microsoft.com/office/drawing/2010/main" xmlns="" w="9525">
                   <a:solidFill>
                     <a:srgbClr val="000000"/>
                   </a:solidFill>
@@ -2625,7 +2630,7 @@
             </a:ln>
             <a:extLst>
               <a:ext uri="{91240B29-F687-4f45-9708-019B960494DF}">
-                <a14:hiddenLine xmlns="" xmlns:a14="http://schemas.microsoft.com/office/drawing/2010/main" w="9525">
+                <a14:hiddenLine xmlns:a14="http://schemas.microsoft.com/office/drawing/2010/main" xmlns="" w="9525">
                   <a:solidFill>
                     <a:srgbClr val="000000"/>
                   </a:solidFill>
@@ -2715,7 +2720,7 @@
             </a:ln>
             <a:extLst>
               <a:ext uri="{91240B29-F687-4f45-9708-019B960494DF}">
-                <a14:hiddenLine xmlns="" xmlns:a14="http://schemas.microsoft.com/office/drawing/2010/main" w="9525">
+                <a14:hiddenLine xmlns:a14="http://schemas.microsoft.com/office/drawing/2010/main" xmlns="" w="9525">
                   <a:solidFill>
                     <a:srgbClr val="000000"/>
                   </a:solidFill>
@@ -2783,7 +2788,7 @@
             </a:ln>
             <a:extLst>
               <a:ext uri="{91240B29-F687-4f45-9708-019B960494DF}">
-                <a14:hiddenLine xmlns="" xmlns:a14="http://schemas.microsoft.com/office/drawing/2010/main" w="9525">
+                <a14:hiddenLine xmlns:a14="http://schemas.microsoft.com/office/drawing/2010/main" xmlns="" w="9525">
                   <a:solidFill>
                     <a:srgbClr val="000000"/>
                   </a:solidFill>
@@ -2873,7 +2878,7 @@
             </a:ln>
             <a:extLst>
               <a:ext uri="{91240B29-F687-4f45-9708-019B960494DF}">
-                <a14:hiddenLine xmlns="" xmlns:a14="http://schemas.microsoft.com/office/drawing/2010/main" w="9525">
+                <a14:hiddenLine xmlns:a14="http://schemas.microsoft.com/office/drawing/2010/main" xmlns="" w="9525">
                   <a:solidFill>
                     <a:srgbClr val="000000"/>
                   </a:solidFill>
@@ -2907,7 +2912,7 @@
             </a:ln>
             <a:extLst>
               <a:ext uri="{91240B29-F687-4f45-9708-019B960494DF}">
-                <a14:hiddenLine xmlns="" xmlns:a14="http://schemas.microsoft.com/office/drawing/2010/main" w="9525">
+                <a14:hiddenLine xmlns:a14="http://schemas.microsoft.com/office/drawing/2010/main" xmlns="" w="9525">
                   <a:solidFill>
                     <a:srgbClr val="000000"/>
                   </a:solidFill>
@@ -2997,7 +3002,7 @@
             </a:ln>
             <a:extLst>
               <a:ext uri="{91240B29-F687-4f45-9708-019B960494DF}">
-                <a14:hiddenLine xmlns="" xmlns:a14="http://schemas.microsoft.com/office/drawing/2010/main" w="9525">
+                <a14:hiddenLine xmlns:a14="http://schemas.microsoft.com/office/drawing/2010/main" xmlns="" w="9525">
                   <a:solidFill>
                     <a:srgbClr val="000000"/>
                   </a:solidFill>
@@ -3059,7 +3064,7 @@
             </a:ln>
             <a:extLst>
               <a:ext uri="{91240B29-F687-4f45-9708-019B960494DF}">
-                <a14:hiddenLine xmlns="" xmlns:a14="http://schemas.microsoft.com/office/drawing/2010/main" w="9525">
+                <a14:hiddenLine xmlns:a14="http://schemas.microsoft.com/office/drawing/2010/main" xmlns="" w="9525">
                   <a:solidFill>
                     <a:srgbClr val="000000"/>
                   </a:solidFill>
@@ -3121,7 +3126,7 @@
             </a:ln>
             <a:extLst>
               <a:ext uri="{91240B29-F687-4f45-9708-019B960494DF}">
-                <a14:hiddenLine xmlns="" xmlns:a14="http://schemas.microsoft.com/office/drawing/2010/main" w="9525">
+                <a14:hiddenLine xmlns:a14="http://schemas.microsoft.com/office/drawing/2010/main" xmlns="" w="9525">
                   <a:solidFill>
                     <a:srgbClr val="000000"/>
                   </a:solidFill>
@@ -3211,7 +3216,7 @@
             </a:ln>
             <a:extLst>
               <a:ext uri="{91240B29-F687-4f45-9708-019B960494DF}">
-                <a14:hiddenLine xmlns="" xmlns:a14="http://schemas.microsoft.com/office/drawing/2010/main" w="9525">
+                <a14:hiddenLine xmlns:a14="http://schemas.microsoft.com/office/drawing/2010/main" xmlns="" w="9525">
                   <a:solidFill>
                     <a:srgbClr val="000000"/>
                   </a:solidFill>
@@ -3279,7 +3284,7 @@
             </a:ln>
             <a:extLst>
               <a:ext uri="{91240B29-F687-4f45-9708-019B960494DF}">
-                <a14:hiddenLine xmlns="" xmlns:a14="http://schemas.microsoft.com/office/drawing/2010/main" w="9525">
+                <a14:hiddenLine xmlns:a14="http://schemas.microsoft.com/office/drawing/2010/main" xmlns="" w="9525">
                   <a:solidFill>
                     <a:srgbClr val="000000"/>
                   </a:solidFill>
@@ -3341,7 +3346,7 @@
             </a:ln>
             <a:extLst>
               <a:ext uri="{91240B29-F687-4f45-9708-019B960494DF}">
-                <a14:hiddenLine xmlns="" xmlns:a14="http://schemas.microsoft.com/office/drawing/2010/main" w="9525">
+                <a14:hiddenLine xmlns:a14="http://schemas.microsoft.com/office/drawing/2010/main" xmlns="" w="9525">
                   <a:solidFill>
                     <a:srgbClr val="000000"/>
                   </a:solidFill>
@@ -3431,7 +3436,7 @@
             </a:ln>
             <a:extLst>
               <a:ext uri="{91240B29-F687-4f45-9708-019B960494DF}">
-                <a14:hiddenLine xmlns="" xmlns:a14="http://schemas.microsoft.com/office/drawing/2010/main" w="9525">
+                <a14:hiddenLine xmlns:a14="http://schemas.microsoft.com/office/drawing/2010/main" xmlns="" w="9525">
                   <a:solidFill>
                     <a:srgbClr val="000000"/>
                   </a:solidFill>
@@ -3493,7 +3498,7 @@
             </a:ln>
             <a:extLst>
               <a:ext uri="{91240B29-F687-4f45-9708-019B960494DF}">
-                <a14:hiddenLine xmlns="" xmlns:a14="http://schemas.microsoft.com/office/drawing/2010/main" w="9525">
+                <a14:hiddenLine xmlns:a14="http://schemas.microsoft.com/office/drawing/2010/main" xmlns="" w="9525">
                   <a:solidFill>
                     <a:srgbClr val="000000"/>
                   </a:solidFill>
@@ -3583,7 +3588,7 @@
             </a:ln>
             <a:extLst>
               <a:ext uri="{91240B29-F687-4f45-9708-019B960494DF}">
-                <a14:hiddenLine xmlns="" xmlns:a14="http://schemas.microsoft.com/office/drawing/2010/main" w="9525">
+                <a14:hiddenLine xmlns:a14="http://schemas.microsoft.com/office/drawing/2010/main" xmlns="" w="9525">
                   <a:solidFill>
                     <a:srgbClr val="000000"/>
                   </a:solidFill>
@@ -3645,7 +3650,7 @@
             </a:ln>
             <a:extLst>
               <a:ext uri="{91240B29-F687-4f45-9708-019B960494DF}">
-                <a14:hiddenLine xmlns="" xmlns:a14="http://schemas.microsoft.com/office/drawing/2010/main" w="9525">
+                <a14:hiddenLine xmlns:a14="http://schemas.microsoft.com/office/drawing/2010/main" xmlns="" w="9525">
                   <a:solidFill>
                     <a:srgbClr val="000000"/>
                   </a:solidFill>
@@ -3735,7 +3740,7 @@
             </a:ln>
             <a:extLst>
               <a:ext uri="{91240B29-F687-4f45-9708-019B960494DF}">
-                <a14:hiddenLine xmlns="" xmlns:a14="http://schemas.microsoft.com/office/drawing/2010/main" w="9525">
+                <a14:hiddenLine xmlns:a14="http://schemas.microsoft.com/office/drawing/2010/main" xmlns="" w="9525">
                   <a:solidFill>
                     <a:srgbClr val="000000"/>
                   </a:solidFill>
@@ -3769,7 +3774,7 @@
             </a:ln>
             <a:extLst>
               <a:ext uri="{91240B29-F687-4f45-9708-019B960494DF}">
-                <a14:hiddenLine xmlns="" xmlns:a14="http://schemas.microsoft.com/office/drawing/2010/main" w="9525">
+                <a14:hiddenLine xmlns:a14="http://schemas.microsoft.com/office/drawing/2010/main" xmlns="" w="9525">
                   <a:solidFill>
                     <a:srgbClr val="000000"/>
                   </a:solidFill>
@@ -3834,7 +3839,7 @@
             </a:ln>
             <a:extLst>
               <a:ext uri="{91240B29-F687-4f45-9708-019B960494DF}">
-                <a14:hiddenLine xmlns="" xmlns:a14="http://schemas.microsoft.com/office/drawing/2010/main" w="9525">
+                <a14:hiddenLine xmlns:a14="http://schemas.microsoft.com/office/drawing/2010/main" xmlns="" w="9525">
                   <a:solidFill>
                     <a:srgbClr val="000000"/>
                   </a:solidFill>
@@ -3924,7 +3929,7 @@
             </a:ln>
             <a:extLst>
               <a:ext uri="{91240B29-F687-4f45-9708-019B960494DF}">
-                <a14:hiddenLine xmlns="" xmlns:a14="http://schemas.microsoft.com/office/drawing/2010/main" w="9525">
+                <a14:hiddenLine xmlns:a14="http://schemas.microsoft.com/office/drawing/2010/main" xmlns="" w="9525">
                   <a:solidFill>
                     <a:srgbClr val="000000"/>
                   </a:solidFill>
@@ -3986,7 +3991,7 @@
             </a:ln>
             <a:extLst>
               <a:ext uri="{91240B29-F687-4f45-9708-019B960494DF}">
-                <a14:hiddenLine xmlns="" xmlns:a14="http://schemas.microsoft.com/office/drawing/2010/main" w="9525">
+                <a14:hiddenLine xmlns:a14="http://schemas.microsoft.com/office/drawing/2010/main" xmlns="" w="9525">
                   <a:solidFill>
                     <a:srgbClr val="000000"/>
                   </a:solidFill>
@@ -4076,7 +4081,7 @@
             </a:ln>
             <a:extLst>
               <a:ext uri="{91240B29-F687-4f45-9708-019B960494DF}">
-                <a14:hiddenLine xmlns="" xmlns:a14="http://schemas.microsoft.com/office/drawing/2010/main" w="9525">
+                <a14:hiddenLine xmlns:a14="http://schemas.microsoft.com/office/drawing/2010/main" xmlns="" w="9525">
                   <a:solidFill>
                     <a:srgbClr val="000000"/>
                   </a:solidFill>
@@ -4166,7 +4171,7 @@
             </a:ln>
             <a:extLst>
               <a:ext uri="{91240B29-F687-4f45-9708-019B960494DF}">
-                <a14:hiddenLine xmlns="" xmlns:a14="http://schemas.microsoft.com/office/drawing/2010/main" w="9525">
+                <a14:hiddenLine xmlns:a14="http://schemas.microsoft.com/office/drawing/2010/main" xmlns="" w="9525">
                   <a:solidFill>
                     <a:srgbClr val="000000"/>
                   </a:solidFill>
@@ -4231,7 +4236,7 @@
             </a:ln>
             <a:extLst>
               <a:ext uri="{91240B29-F687-4f45-9708-019B960494DF}">
-                <a14:hiddenLine xmlns="" xmlns:a14="http://schemas.microsoft.com/office/drawing/2010/main" w="9525">
+                <a14:hiddenLine xmlns:a14="http://schemas.microsoft.com/office/drawing/2010/main" xmlns="" w="9525">
                   <a:solidFill>
                     <a:srgbClr val="000000"/>
                   </a:solidFill>
@@ -4293,7 +4298,7 @@
             </a:ln>
             <a:extLst>
               <a:ext uri="{91240B29-F687-4f45-9708-019B960494DF}">
-                <a14:hiddenLine xmlns="" xmlns:a14="http://schemas.microsoft.com/office/drawing/2010/main" w="9525">
+                <a14:hiddenLine xmlns:a14="http://schemas.microsoft.com/office/drawing/2010/main" xmlns="" w="9525">
                   <a:solidFill>
                     <a:srgbClr val="000000"/>
                   </a:solidFill>
@@ -4383,7 +4388,7 @@
             </a:ln>
             <a:extLst>
               <a:ext uri="{91240B29-F687-4f45-9708-019B960494DF}">
-                <a14:hiddenLine xmlns="" xmlns:a14="http://schemas.microsoft.com/office/drawing/2010/main" w="9525">
+                <a14:hiddenLine xmlns:a14="http://schemas.microsoft.com/office/drawing/2010/main" xmlns="" w="9525">
                   <a:solidFill>
                     <a:srgbClr val="000000"/>
                   </a:solidFill>
@@ -4473,7 +4478,7 @@
             </a:ln>
             <a:extLst>
               <a:ext uri="{91240B29-F687-4f45-9708-019B960494DF}">
-                <a14:hiddenLine xmlns="" xmlns:a14="http://schemas.microsoft.com/office/drawing/2010/main" w="9525">
+                <a14:hiddenLine xmlns:a14="http://schemas.microsoft.com/office/drawing/2010/main" xmlns="" w="9525">
                   <a:solidFill>
                     <a:srgbClr val="000000"/>
                   </a:solidFill>
@@ -4535,7 +4540,7 @@
             </a:ln>
             <a:extLst>
               <a:ext uri="{91240B29-F687-4f45-9708-019B960494DF}">
-                <a14:hiddenLine xmlns="" xmlns:a14="http://schemas.microsoft.com/office/drawing/2010/main" w="9525">
+                <a14:hiddenLine xmlns:a14="http://schemas.microsoft.com/office/drawing/2010/main" xmlns="" w="9525">
                   <a:solidFill>
                     <a:srgbClr val="000000"/>
                   </a:solidFill>
@@ -4655,7 +4660,7 @@
             </a:ln>
             <a:extLst>
               <a:ext uri="{91240B29-F687-4f45-9708-019B960494DF}">
-                <a14:hiddenLine xmlns="" xmlns:a14="http://schemas.microsoft.com/office/drawing/2010/main" w="9525">
+                <a14:hiddenLine xmlns:a14="http://schemas.microsoft.com/office/drawing/2010/main" xmlns="" w="9525">
                   <a:solidFill>
                     <a:srgbClr val="000000"/>
                   </a:solidFill>
@@ -4723,7 +4728,7 @@
             </a:ln>
             <a:extLst>
               <a:ext uri="{91240B29-F687-4f45-9708-019B960494DF}">
-                <a14:hiddenLine xmlns="" xmlns:a14="http://schemas.microsoft.com/office/drawing/2010/main" w="9525">
+                <a14:hiddenLine xmlns:a14="http://schemas.microsoft.com/office/drawing/2010/main" xmlns="" w="9525">
                   <a:solidFill>
                     <a:srgbClr val="000000"/>
                   </a:solidFill>
@@ -4813,7 +4818,7 @@
             </a:ln>
             <a:extLst>
               <a:ext uri="{91240B29-F687-4f45-9708-019B960494DF}">
-                <a14:hiddenLine xmlns="" xmlns:a14="http://schemas.microsoft.com/office/drawing/2010/main" w="9525">
+                <a14:hiddenLine xmlns:a14="http://schemas.microsoft.com/office/drawing/2010/main" xmlns="" w="9525">
                   <a:solidFill>
                     <a:srgbClr val="000000"/>
                   </a:solidFill>
@@ -4953,7 +4958,7 @@
           <a:p>
             <a:fld id="{402D7A8C-E8C9-C044-B17F-4F3BDC02CA13}" type="datetime1">
               <a:rPr lang="en-US" smtClean="0"/>
-              <a:t>8/26/25</a:t>
+              <a:t>8/18/26</a:t>
             </a:fld>
             <a:endParaRPr lang="en-US"/>
           </a:p>
@@ -5220,7 +5225,7 @@
           <a:p>
             <a:fld id="{37F8A4E9-907E-024F-942D-1027DBDB6B95}" type="datetime1">
               <a:rPr lang="en-US" smtClean="0"/>
-              <a:t>8/26/25</a:t>
+              <a:t>8/18/26</a:t>
             </a:fld>
             <a:endParaRPr lang="en-US"/>
           </a:p>
@@ -5416,7 +5421,7 @@
           <a:p>
             <a:fld id="{0FE75626-F07C-1141-9EC1-D81C02E85261}" type="datetime1">
               <a:rPr lang="en-US" smtClean="0"/>
-              <a:t>8/26/25</a:t>
+              <a:t>8/18/26</a:t>
             </a:fld>
             <a:endParaRPr lang="en-US"/>
           </a:p>
@@ -5679,7 +5684,7 @@
           <a:p>
             <a:fld id="{A542032B-A565-A745-AD03-A3A1AE898D44}" type="datetime1">
               <a:rPr lang="en-US" smtClean="0"/>
-              <a:t>8/26/25</a:t>
+              <a:t>8/18/26</a:t>
             </a:fld>
             <a:endParaRPr lang="en-US"/>
           </a:p>
@@ -6113,7 +6118,7 @@
           <a:p>
             <a:fld id="{D07DFA05-D8BC-F743-AAC8-830078F9EC2E}" type="datetime1">
               <a:rPr lang="en-US" smtClean="0"/>
-              <a:t>8/26/25</a:t>
+              <a:t>8/18/26</a:t>
             </a:fld>
             <a:endParaRPr lang="en-US"/>
           </a:p>
@@ -6659,7 +6664,7 @@
           <a:p>
             <a:fld id="{A30ACE03-F6AA-B648-AEDA-6D288BF5F57D}" type="datetime1">
               <a:rPr lang="en-US" smtClean="0"/>
-              <a:t>8/26/25</a:t>
+              <a:t>8/18/26</a:t>
             </a:fld>
             <a:endParaRPr lang="en-US"/>
           </a:p>
@@ -7379,7 +7384,7 @@
           <a:p>
             <a:fld id="{00CC296A-FFCD-5143-BB88-7498A31860D8}" type="datetime1">
               <a:rPr lang="en-US" smtClean="0"/>
-              <a:t>8/26/25</a:t>
+              <a:t>8/18/26</a:t>
             </a:fld>
             <a:endParaRPr lang="en-US"/>
           </a:p>
@@ -7549,7 +7554,7 @@
           <a:p>
             <a:fld id="{C6A5FF73-2E33-5542-B000-2DC2E7840EBF}" type="datetime1">
               <a:rPr lang="en-US" smtClean="0"/>
-              <a:t>8/26/25</a:t>
+              <a:t>8/18/26</a:t>
             </a:fld>
             <a:endParaRPr lang="en-US"/>
           </a:p>
@@ -7729,7 +7734,7 @@
           <a:p>
             <a:fld id="{02F42606-263B-9C4F-8747-C46201865648}" type="datetime1">
               <a:rPr lang="en-US" smtClean="0"/>
-              <a:t>8/26/25</a:t>
+              <a:t>8/18/26</a:t>
             </a:fld>
             <a:endParaRPr lang="en-US"/>
           </a:p>
@@ -7899,7 +7904,7 @@
           <a:p>
             <a:fld id="{5F8D537B-242B-6E4B-B3AA-5700AD130DAB}" type="datetime1">
               <a:rPr lang="en-US" smtClean="0"/>
-              <a:t>8/26/25</a:t>
+              <a:t>8/18/26</a:t>
             </a:fld>
             <a:endParaRPr lang="en-US"/>
           </a:p>
@@ -8149,7 +8154,7 @@
           <a:p>
             <a:fld id="{7BE0DB53-1439-2E4C-8FEF-8A4982596F3C}" type="datetime1">
               <a:rPr lang="en-US" smtClean="0"/>
-              <a:t>8/26/25</a:t>
+              <a:t>8/18/26</a:t>
             </a:fld>
             <a:endParaRPr lang="en-US"/>
           </a:p>
@@ -8381,7 +8386,7 @@
           <a:p>
             <a:fld id="{DC68B4C4-E214-B54E-A5C2-DF036DC63B34}" type="datetime1">
               <a:rPr lang="en-US" smtClean="0"/>
-              <a:t>8/26/25</a:t>
+              <a:t>8/18/26</a:t>
             </a:fld>
             <a:endParaRPr lang="en-US"/>
           </a:p>
@@ -8767,7 +8772,7 @@
           <a:p>
             <a:fld id="{7FAC456D-E6B2-0642-9BEB-83D0B9BAC47F}" type="datetime1">
               <a:rPr lang="en-US" smtClean="0"/>
-              <a:t>8/26/25</a:t>
+              <a:t>8/18/26</a:t>
             </a:fld>
             <a:endParaRPr lang="en-US"/>
           </a:p>
@@ -8890,7 +8895,7 @@
           <a:p>
             <a:fld id="{16AA1968-45EA-A240-A17F-44B2A8A0BB1D}" type="datetime1">
               <a:rPr lang="en-US" smtClean="0"/>
-              <a:t>8/26/25</a:t>
+              <a:t>8/18/26</a:t>
             </a:fld>
             <a:endParaRPr lang="en-US"/>
           </a:p>
@@ -8985,7 +8990,7 @@
           <a:p>
             <a:fld id="{26CFB313-9C91-AB4A-9BD3-BE60645D454E}" type="datetime1">
               <a:rPr lang="en-US" smtClean="0"/>
-              <a:t>8/26/25</a:t>
+              <a:t>8/18/26</a:t>
             </a:fld>
             <a:endParaRPr lang="en-US"/>
           </a:p>
@@ -9234,7 +9239,7 @@
           <a:p>
             <a:fld id="{400DE57A-C1B2-FD48-B4C3-5BEA75776498}" type="datetime1">
               <a:rPr lang="en-US" smtClean="0"/>
-              <a:t>8/26/25</a:t>
+              <a:t>8/18/26</a:t>
             </a:fld>
             <a:endParaRPr lang="en-US"/>
           </a:p>
@@ -9519,7 +9524,7 @@
           <a:p>
             <a:fld id="{A982DE63-F783-CF4C-A886-D3D65D6D3AA3}" type="datetime1">
               <a:rPr lang="en-US" smtClean="0"/>
-              <a:t>8/26/25</a:t>
+              <a:t>8/18/26</a:t>
             </a:fld>
             <a:endParaRPr lang="en-US"/>
           </a:p>
@@ -9642,7 +9647,7 @@
           <a:noFill/>
           <a:extLst>
             <a:ext uri="{909E8E84-426E-40dd-AFC4-6F175D3DCCD1}">
-              <a14:hiddenFill xmlns="" xmlns:a14="http://schemas.microsoft.com/office/drawing/2010/main">
+              <a14:hiddenFill xmlns:a14="http://schemas.microsoft.com/office/drawing/2010/main" xmlns="">
                 <a:solidFill>
                   <a:srgbClr val="FFFFFF"/>
                 </a:solidFill>
@@ -9716,7 +9721,7 @@
               </a:ln>
               <a:extLst>
                 <a:ext uri="{91240B29-F687-4f45-9708-019B960494DF}">
-                  <a14:hiddenLine xmlns="" xmlns:a14="http://schemas.microsoft.com/office/drawing/2010/main" w="9525">
+                  <a14:hiddenLine xmlns:a14="http://schemas.microsoft.com/office/drawing/2010/main" xmlns="" w="9525">
                     <a:solidFill>
                       <a:srgbClr val="000000"/>
                     </a:solidFill>
@@ -9806,7 +9811,7 @@
               </a:ln>
               <a:extLst>
                 <a:ext uri="{91240B29-F687-4f45-9708-019B960494DF}">
-                  <a14:hiddenLine xmlns="" xmlns:a14="http://schemas.microsoft.com/office/drawing/2010/main" w="9525">
+                  <a14:hiddenLine xmlns:a14="http://schemas.microsoft.com/office/drawing/2010/main" xmlns="" w="9525">
                     <a:solidFill>
                       <a:srgbClr val="000000"/>
                     </a:solidFill>
@@ -9896,7 +9901,7 @@
               </a:ln>
               <a:extLst>
                 <a:ext uri="{91240B29-F687-4f45-9708-019B960494DF}">
-                  <a14:hiddenLine xmlns="" xmlns:a14="http://schemas.microsoft.com/office/drawing/2010/main" w="9525">
+                  <a14:hiddenLine xmlns:a14="http://schemas.microsoft.com/office/drawing/2010/main" xmlns="" w="9525">
                     <a:solidFill>
                       <a:srgbClr val="000000"/>
                     </a:solidFill>
@@ -9958,7 +9963,7 @@
               </a:ln>
               <a:extLst>
                 <a:ext uri="{91240B29-F687-4f45-9708-019B960494DF}">
-                  <a14:hiddenLine xmlns="" xmlns:a14="http://schemas.microsoft.com/office/drawing/2010/main" w="9525">
+                  <a14:hiddenLine xmlns:a14="http://schemas.microsoft.com/office/drawing/2010/main" xmlns="" w="9525">
                     <a:solidFill>
                       <a:srgbClr val="000000"/>
                     </a:solidFill>
@@ -10048,7 +10053,7 @@
               </a:ln>
               <a:extLst>
                 <a:ext uri="{91240B29-F687-4f45-9708-019B960494DF}">
-                  <a14:hiddenLine xmlns="" xmlns:a14="http://schemas.microsoft.com/office/drawing/2010/main" w="9525">
+                  <a14:hiddenLine xmlns:a14="http://schemas.microsoft.com/office/drawing/2010/main" xmlns="" w="9525">
                     <a:solidFill>
                       <a:srgbClr val="000000"/>
                     </a:solidFill>
@@ -10110,7 +10115,7 @@
               </a:ln>
               <a:extLst>
                 <a:ext uri="{91240B29-F687-4f45-9708-019B960494DF}">
-                  <a14:hiddenLine xmlns="" xmlns:a14="http://schemas.microsoft.com/office/drawing/2010/main" w="9525">
+                  <a14:hiddenLine xmlns:a14="http://schemas.microsoft.com/office/drawing/2010/main" xmlns="" w="9525">
                     <a:solidFill>
                       <a:srgbClr val="000000"/>
                     </a:solidFill>
@@ -10172,7 +10177,7 @@
               </a:ln>
               <a:extLst>
                 <a:ext uri="{91240B29-F687-4f45-9708-019B960494DF}">
-                  <a14:hiddenLine xmlns="" xmlns:a14="http://schemas.microsoft.com/office/drawing/2010/main" w="9525">
+                  <a14:hiddenLine xmlns:a14="http://schemas.microsoft.com/office/drawing/2010/main" xmlns="" w="9525">
                     <a:solidFill>
                       <a:srgbClr val="000000"/>
                     </a:solidFill>
@@ -10262,7 +10267,7 @@
               </a:ln>
               <a:extLst>
                 <a:ext uri="{91240B29-F687-4f45-9708-019B960494DF}">
-                  <a14:hiddenLine xmlns="" xmlns:a14="http://schemas.microsoft.com/office/drawing/2010/main" w="9525">
+                  <a14:hiddenLine xmlns:a14="http://schemas.microsoft.com/office/drawing/2010/main" xmlns="" w="9525">
                     <a:solidFill>
                       <a:srgbClr val="000000"/>
                     </a:solidFill>
@@ -10352,7 +10357,7 @@
               </a:ln>
               <a:extLst>
                 <a:ext uri="{91240B29-F687-4f45-9708-019B960494DF}">
-                  <a14:hiddenLine xmlns="" xmlns:a14="http://schemas.microsoft.com/office/drawing/2010/main" w="9525">
+                  <a14:hiddenLine xmlns:a14="http://schemas.microsoft.com/office/drawing/2010/main" xmlns="" w="9525">
                     <a:solidFill>
                       <a:srgbClr val="000000"/>
                     </a:solidFill>
@@ -10414,7 +10419,7 @@
               </a:ln>
               <a:extLst>
                 <a:ext uri="{91240B29-F687-4f45-9708-019B960494DF}">
-                  <a14:hiddenLine xmlns="" xmlns:a14="http://schemas.microsoft.com/office/drawing/2010/main" w="9525">
+                  <a14:hiddenLine xmlns:a14="http://schemas.microsoft.com/office/drawing/2010/main" xmlns="" w="9525">
                     <a:solidFill>
                       <a:srgbClr val="000000"/>
                     </a:solidFill>
@@ -10524,7 +10529,7 @@
               </a:ln>
               <a:extLst>
                 <a:ext uri="{91240B29-F687-4f45-9708-019B960494DF}">
-                  <a14:hiddenLine xmlns="" xmlns:a14="http://schemas.microsoft.com/office/drawing/2010/main" w="9525">
+                  <a14:hiddenLine xmlns:a14="http://schemas.microsoft.com/office/drawing/2010/main" xmlns="" w="9525">
                     <a:solidFill>
                       <a:srgbClr val="000000"/>
                     </a:solidFill>
@@ -10608,7 +10613,7 @@
               </a:ln>
               <a:extLst>
                 <a:ext uri="{91240B29-F687-4f45-9708-019B960494DF}">
-                  <a14:hiddenLine xmlns="" xmlns:a14="http://schemas.microsoft.com/office/drawing/2010/main" w="9525">
+                  <a14:hiddenLine xmlns:a14="http://schemas.microsoft.com/office/drawing/2010/main" xmlns="" w="9525">
                     <a:solidFill>
                       <a:srgbClr val="000000"/>
                     </a:solidFill>
@@ -10670,7 +10675,7 @@
               </a:ln>
               <a:extLst>
                 <a:ext uri="{91240B29-F687-4f45-9708-019B960494DF}">
-                  <a14:hiddenLine xmlns="" xmlns:a14="http://schemas.microsoft.com/office/drawing/2010/main" w="9525">
+                  <a14:hiddenLine xmlns:a14="http://schemas.microsoft.com/office/drawing/2010/main" xmlns="" w="9525">
                     <a:solidFill>
                       <a:srgbClr val="000000"/>
                     </a:solidFill>
@@ -10732,7 +10737,7 @@
               </a:ln>
               <a:extLst>
                 <a:ext uri="{91240B29-F687-4f45-9708-019B960494DF}">
-                  <a14:hiddenLine xmlns="" xmlns:a14="http://schemas.microsoft.com/office/drawing/2010/main" w="9525">
+                  <a14:hiddenLine xmlns:a14="http://schemas.microsoft.com/office/drawing/2010/main" xmlns="" w="9525">
                     <a:solidFill>
                       <a:srgbClr val="000000"/>
                     </a:solidFill>
@@ -10822,7 +10827,7 @@
               </a:ln>
               <a:extLst>
                 <a:ext uri="{91240B29-F687-4f45-9708-019B960494DF}">
-                  <a14:hiddenLine xmlns="" xmlns:a14="http://schemas.microsoft.com/office/drawing/2010/main" w="9525">
+                  <a14:hiddenLine xmlns:a14="http://schemas.microsoft.com/office/drawing/2010/main" xmlns="" w="9525">
                     <a:solidFill>
                       <a:srgbClr val="000000"/>
                     </a:solidFill>
@@ -10856,7 +10861,7 @@
               </a:ln>
               <a:extLst>
                 <a:ext uri="{91240B29-F687-4f45-9708-019B960494DF}">
-                  <a14:hiddenLine xmlns="" xmlns:a14="http://schemas.microsoft.com/office/drawing/2010/main" w="9525">
+                  <a14:hiddenLine xmlns:a14="http://schemas.microsoft.com/office/drawing/2010/main" xmlns="" w="9525">
                     <a:solidFill>
                       <a:srgbClr val="000000"/>
                     </a:solidFill>
@@ -10921,7 +10926,7 @@
               </a:ln>
               <a:extLst>
                 <a:ext uri="{91240B29-F687-4f45-9708-019B960494DF}">
-                  <a14:hiddenLine xmlns="" xmlns:a14="http://schemas.microsoft.com/office/drawing/2010/main" w="9525">
+                  <a14:hiddenLine xmlns:a14="http://schemas.microsoft.com/office/drawing/2010/main" xmlns="" w="9525">
                     <a:solidFill>
                       <a:srgbClr val="000000"/>
                     </a:solidFill>
@@ -11011,7 +11016,7 @@
               </a:ln>
               <a:extLst>
                 <a:ext uri="{91240B29-F687-4f45-9708-019B960494DF}">
-                  <a14:hiddenLine xmlns="" xmlns:a14="http://schemas.microsoft.com/office/drawing/2010/main" w="9525">
+                  <a14:hiddenLine xmlns:a14="http://schemas.microsoft.com/office/drawing/2010/main" xmlns="" w="9525">
                     <a:solidFill>
                       <a:srgbClr val="000000"/>
                     </a:solidFill>
@@ -11073,7 +11078,7 @@
               </a:ln>
               <a:extLst>
                 <a:ext uri="{91240B29-F687-4f45-9708-019B960494DF}">
-                  <a14:hiddenLine xmlns="" xmlns:a14="http://schemas.microsoft.com/office/drawing/2010/main" w="9525">
+                  <a14:hiddenLine xmlns:a14="http://schemas.microsoft.com/office/drawing/2010/main" xmlns="" w="9525">
                     <a:solidFill>
                       <a:srgbClr val="000000"/>
                     </a:solidFill>
@@ -11163,7 +11168,7 @@
               </a:ln>
               <a:extLst>
                 <a:ext uri="{91240B29-F687-4f45-9708-019B960494DF}">
-                  <a14:hiddenLine xmlns="" xmlns:a14="http://schemas.microsoft.com/office/drawing/2010/main" w="9525">
+                  <a14:hiddenLine xmlns:a14="http://schemas.microsoft.com/office/drawing/2010/main" xmlns="" w="9525">
                     <a:solidFill>
                       <a:srgbClr val="000000"/>
                     </a:solidFill>
@@ -11228,7 +11233,7 @@
               </a:ln>
               <a:extLst>
                 <a:ext uri="{91240B29-F687-4f45-9708-019B960494DF}">
-                  <a14:hiddenLine xmlns="" xmlns:a14="http://schemas.microsoft.com/office/drawing/2010/main" w="9525">
+                  <a14:hiddenLine xmlns:a14="http://schemas.microsoft.com/office/drawing/2010/main" xmlns="" w="9525">
                     <a:solidFill>
                       <a:srgbClr val="000000"/>
                     </a:solidFill>
@@ -11290,7 +11295,7 @@
               </a:ln>
               <a:extLst>
                 <a:ext uri="{91240B29-F687-4f45-9708-019B960494DF}">
-                  <a14:hiddenLine xmlns="" xmlns:a14="http://schemas.microsoft.com/office/drawing/2010/main" w="9525">
+                  <a14:hiddenLine xmlns:a14="http://schemas.microsoft.com/office/drawing/2010/main" xmlns="" w="9525">
                     <a:solidFill>
                       <a:srgbClr val="000000"/>
                     </a:solidFill>
@@ -11380,7 +11385,7 @@
               </a:ln>
               <a:extLst>
                 <a:ext uri="{91240B29-F687-4f45-9708-019B960494DF}">
-                  <a14:hiddenLine xmlns="" xmlns:a14="http://schemas.microsoft.com/office/drawing/2010/main" w="9525">
+                  <a14:hiddenLine xmlns:a14="http://schemas.microsoft.com/office/drawing/2010/main" xmlns="" w="9525">
                     <a:solidFill>
                       <a:srgbClr val="000000"/>
                     </a:solidFill>
@@ -11470,7 +11475,7 @@
               </a:ln>
               <a:extLst>
                 <a:ext uri="{91240B29-F687-4f45-9708-019B960494DF}">
-                  <a14:hiddenLine xmlns="" xmlns:a14="http://schemas.microsoft.com/office/drawing/2010/main" w="9525">
+                  <a14:hiddenLine xmlns:a14="http://schemas.microsoft.com/office/drawing/2010/main" xmlns="" w="9525">
                     <a:solidFill>
                       <a:srgbClr val="000000"/>
                     </a:solidFill>
@@ -11535,7 +11540,7 @@
               </a:ln>
               <a:extLst>
                 <a:ext uri="{91240B29-F687-4f45-9708-019B960494DF}">
-                  <a14:hiddenLine xmlns="" xmlns:a14="http://schemas.microsoft.com/office/drawing/2010/main" w="9525">
+                  <a14:hiddenLine xmlns:a14="http://schemas.microsoft.com/office/drawing/2010/main" xmlns="" w="9525">
                     <a:solidFill>
                       <a:srgbClr val="000000"/>
                     </a:solidFill>
@@ -11655,7 +11660,7 @@
               </a:ln>
               <a:extLst>
                 <a:ext uri="{91240B29-F687-4f45-9708-019B960494DF}">
-                  <a14:hiddenLine xmlns="" xmlns:a14="http://schemas.microsoft.com/office/drawing/2010/main" w="9525">
+                  <a14:hiddenLine xmlns:a14="http://schemas.microsoft.com/office/drawing/2010/main" xmlns="" w="9525">
                     <a:solidFill>
                       <a:srgbClr val="000000"/>
                     </a:solidFill>
@@ -11736,7 +11741,7 @@
               </a:ln>
               <a:extLst>
                 <a:ext uri="{91240B29-F687-4f45-9708-019B960494DF}">
-                  <a14:hiddenLine xmlns="" xmlns:a14="http://schemas.microsoft.com/office/drawing/2010/main" w="9525">
+                  <a14:hiddenLine xmlns:a14="http://schemas.microsoft.com/office/drawing/2010/main" xmlns="" w="9525">
                     <a:solidFill>
                       <a:srgbClr val="000000"/>
                     </a:solidFill>
@@ -11851,7 +11856,7 @@
               </a:ln>
               <a:extLst>
                 <a:ext uri="{91240B29-F687-4f45-9708-019B960494DF}">
-                  <a14:hiddenLine xmlns="" xmlns:a14="http://schemas.microsoft.com/office/drawing/2010/main" w="9525">
+                  <a14:hiddenLine xmlns:a14="http://schemas.microsoft.com/office/drawing/2010/main" xmlns="" w="9525">
                     <a:solidFill>
                       <a:srgbClr val="000000"/>
                     </a:solidFill>
@@ -11941,7 +11946,7 @@
               </a:ln>
               <a:extLst>
                 <a:ext uri="{91240B29-F687-4f45-9708-019B960494DF}">
-                  <a14:hiddenLine xmlns="" xmlns:a14="http://schemas.microsoft.com/office/drawing/2010/main" w="9525">
+                  <a14:hiddenLine xmlns:a14="http://schemas.microsoft.com/office/drawing/2010/main" xmlns="" w="9525">
                     <a:solidFill>
                       <a:srgbClr val="000000"/>
                     </a:solidFill>
@@ -12006,7 +12011,7 @@
               </a:ln>
               <a:extLst>
                 <a:ext uri="{91240B29-F687-4f45-9708-019B960494DF}">
-                  <a14:hiddenLine xmlns="" xmlns:a14="http://schemas.microsoft.com/office/drawing/2010/main" w="9525">
+                  <a14:hiddenLine xmlns:a14="http://schemas.microsoft.com/office/drawing/2010/main" xmlns="" w="9525">
                     <a:solidFill>
                       <a:srgbClr val="000000"/>
                     </a:solidFill>
@@ -12096,7 +12101,7 @@
               </a:ln>
               <a:extLst>
                 <a:ext uri="{91240B29-F687-4f45-9708-019B960494DF}">
-                  <a14:hiddenLine xmlns="" xmlns:a14="http://schemas.microsoft.com/office/drawing/2010/main" w="9525">
+                  <a14:hiddenLine xmlns:a14="http://schemas.microsoft.com/office/drawing/2010/main" xmlns="" w="9525">
                     <a:solidFill>
                       <a:srgbClr val="000000"/>
                     </a:solidFill>
@@ -12164,7 +12169,7 @@
               </a:ln>
               <a:extLst>
                 <a:ext uri="{91240B29-F687-4f45-9708-019B960494DF}">
-                  <a14:hiddenLine xmlns="" xmlns:a14="http://schemas.microsoft.com/office/drawing/2010/main" w="9525">
+                  <a14:hiddenLine xmlns:a14="http://schemas.microsoft.com/office/drawing/2010/main" xmlns="" w="9525">
                     <a:solidFill>
                       <a:srgbClr val="000000"/>
                     </a:solidFill>
@@ -12254,7 +12259,7 @@
               </a:ln>
               <a:extLst>
                 <a:ext uri="{91240B29-F687-4f45-9708-019B960494DF}">
-                  <a14:hiddenLine xmlns="" xmlns:a14="http://schemas.microsoft.com/office/drawing/2010/main" w="9525">
+                  <a14:hiddenLine xmlns:a14="http://schemas.microsoft.com/office/drawing/2010/main" xmlns="" w="9525">
                     <a:solidFill>
                       <a:srgbClr val="000000"/>
                     </a:solidFill>
@@ -12322,7 +12327,7 @@
               </a:ln>
               <a:extLst>
                 <a:ext uri="{91240B29-F687-4f45-9708-019B960494DF}">
-                  <a14:hiddenLine xmlns="" xmlns:a14="http://schemas.microsoft.com/office/drawing/2010/main" w="9525">
+                  <a14:hiddenLine xmlns:a14="http://schemas.microsoft.com/office/drawing/2010/main" xmlns="" w="9525">
                     <a:solidFill>
                       <a:srgbClr val="000000"/>
                     </a:solidFill>
@@ -12412,7 +12417,7 @@
               </a:ln>
               <a:extLst>
                 <a:ext uri="{91240B29-F687-4f45-9708-019B960494DF}">
-                  <a14:hiddenLine xmlns="" xmlns:a14="http://schemas.microsoft.com/office/drawing/2010/main" w="9525">
+                  <a14:hiddenLine xmlns:a14="http://schemas.microsoft.com/office/drawing/2010/main" xmlns="" w="9525">
                     <a:solidFill>
                       <a:srgbClr val="000000"/>
                     </a:solidFill>
@@ -12446,7 +12451,7 @@
               </a:ln>
               <a:extLst>
                 <a:ext uri="{91240B29-F687-4f45-9708-019B960494DF}">
-                  <a14:hiddenLine xmlns="" xmlns:a14="http://schemas.microsoft.com/office/drawing/2010/main" w="9525">
+                  <a14:hiddenLine xmlns:a14="http://schemas.microsoft.com/office/drawing/2010/main" xmlns="" w="9525">
                     <a:solidFill>
                       <a:srgbClr val="000000"/>
                     </a:solidFill>
@@ -12586,7 +12591,7 @@
           <a:p>
             <a:fld id="{59173DD1-A275-4445-AB1E-9DFF752BE39B}" type="datetime1">
               <a:rPr lang="en-US" smtClean="0"/>
-              <a:t>8/26/25</a:t>
+              <a:t>8/18/26</a:t>
             </a:fld>
             <a:endParaRPr lang="en-US"/>
           </a:p>
@@ -13079,11 +13084,8 @@
             </a:br>
             <a:r>
               <a:rPr lang="en-US" dirty="0"/>
-              <a:t>Mark Floryan, Ray Pettit</a:t>
-            </a:r>
-            <a:br>
-              <a:rPr lang="en-US" dirty="0"/>
-            </a:br>
+              <a:t>Mark Floryan</a:t>
+            </a:r>
             <a:br>
               <a:rPr lang="en-US" dirty="0"/>
             </a:br>
@@ -13550,6 +13552,820 @@
   <p:cSld>
     <p:spTree>
       <p:nvGrpSpPr>
+        <p:cNvPr id="1" name="">
+          <a:extLst>
+            <a:ext uri="{FF2B5EF4-FFF2-40B4-BE49-F238E27FC236}">
+              <a16:creationId xmlns:a16="http://schemas.microsoft.com/office/drawing/2014/main" id="{FA32DBD6-6723-6A69-41BF-05CFF0F680EE}"/>
+            </a:ext>
+          </a:extLst>
+        </p:cNvPr>
+        <p:cNvGrpSpPr/>
+        <p:nvPr/>
+      </p:nvGrpSpPr>
+      <p:grpSpPr>
+        <a:xfrm>
+          <a:off x="0" y="0"/>
+          <a:ext cx="0" cy="0"/>
+          <a:chOff x="0" y="0"/>
+          <a:chExt cx="0" cy="0"/>
+        </a:xfrm>
+      </p:grpSpPr>
+      <p:sp>
+        <p:nvSpPr>
+          <p:cNvPr id="9218" name="Rectangle 2">
+            <a:extLst>
+              <a:ext uri="{FF2B5EF4-FFF2-40B4-BE49-F238E27FC236}">
+                <a16:creationId xmlns:a16="http://schemas.microsoft.com/office/drawing/2014/main" id="{2B94CF66-3237-7D53-3C0F-1D4FC801942F}"/>
+              </a:ext>
+            </a:extLst>
+          </p:cNvPr>
+          <p:cNvSpPr>
+            <a:spLocks noGrp="1" noChangeArrowheads="1"/>
+          </p:cNvSpPr>
+          <p:nvPr>
+            <p:ph type="title"/>
+            <p:custDataLst>
+              <p:tags r:id="rId1"/>
+            </p:custDataLst>
+          </p:nvPr>
+        </p:nvSpPr>
+        <p:spPr>
+          <a:xfrm>
+            <a:off x="1141413" y="381849"/>
+            <a:ext cx="9905998" cy="812249"/>
+          </a:xfrm>
+        </p:spPr>
+        <p:txBody>
+          <a:bodyPr/>
+          <a:lstStyle/>
+          <a:p>
+            <a:pPr algn="ctr"/>
+            <a:r>
+              <a:rPr lang="en-US" dirty="0"/>
+              <a:t>On the Subject of Laptops / Phones</a:t>
+            </a:r>
+          </a:p>
+        </p:txBody>
+      </p:sp>
+      <p:sp>
+        <p:nvSpPr>
+          <p:cNvPr id="307203" name="Rectangle 3">
+            <a:extLst>
+              <a:ext uri="{FF2B5EF4-FFF2-40B4-BE49-F238E27FC236}">
+                <a16:creationId xmlns:a16="http://schemas.microsoft.com/office/drawing/2014/main" id="{735FD3FE-3DE4-F5C8-B5D1-A35B4FE4792E}"/>
+              </a:ext>
+            </a:extLst>
+          </p:cNvPr>
+          <p:cNvSpPr>
+            <a:spLocks noGrp="1" noChangeArrowheads="1"/>
+          </p:cNvSpPr>
+          <p:nvPr>
+            <p:ph idx="1"/>
+            <p:custDataLst>
+              <p:tags r:id="rId2"/>
+            </p:custDataLst>
+          </p:nvPr>
+        </p:nvSpPr>
+        <p:spPr>
+          <a:xfrm>
+            <a:off x="1752600" y="1473798"/>
+            <a:ext cx="8817539" cy="4800167"/>
+          </a:xfrm>
+        </p:spPr>
+        <p:txBody>
+          <a:bodyPr>
+            <a:normAutofit/>
+          </a:bodyPr>
+          <a:lstStyle/>
+          <a:p>
+            <a:pPr>
+              <a:lnSpc>
+                <a:spcPct val="90000"/>
+              </a:lnSpc>
+            </a:pPr>
+            <a:r>
+              <a:rPr lang="en-US" dirty="0"/>
+              <a:t>When you are in lecture, you are NOT allowed to use laptops or phones.</a:t>
+            </a:r>
+          </a:p>
+          <a:p>
+            <a:pPr>
+              <a:lnSpc>
+                <a:spcPct val="90000"/>
+              </a:lnSpc>
+            </a:pPr>
+            <a:endParaRPr lang="en-US" dirty="0"/>
+          </a:p>
+          <a:p>
+            <a:pPr>
+              <a:lnSpc>
+                <a:spcPct val="90000"/>
+              </a:lnSpc>
+            </a:pPr>
+            <a:r>
+              <a:rPr lang="en-US" dirty="0"/>
+              <a:t>One exception:</a:t>
+            </a:r>
+          </a:p>
+          <a:p>
+            <a:pPr lvl="1">
+              <a:lnSpc>
+                <a:spcPct val="90000"/>
+              </a:lnSpc>
+            </a:pPr>
+            <a:r>
+              <a:rPr lang="en-US" dirty="0"/>
+              <a:t>Tablets if you are very obviously taking notes on them and paying attention.</a:t>
+            </a:r>
+          </a:p>
+          <a:p>
+            <a:pPr lvl="1">
+              <a:lnSpc>
+                <a:spcPct val="90000"/>
+              </a:lnSpc>
+            </a:pPr>
+            <a:endParaRPr lang="en-US" dirty="0"/>
+          </a:p>
+          <a:p>
+            <a:pPr>
+              <a:lnSpc>
+                <a:spcPct val="90000"/>
+              </a:lnSpc>
+            </a:pPr>
+            <a:r>
+              <a:rPr lang="en-US" dirty="0"/>
+              <a:t>Why:</a:t>
+            </a:r>
+          </a:p>
+          <a:p>
+            <a:pPr lvl="1">
+              <a:lnSpc>
+                <a:spcPct val="90000"/>
+              </a:lnSpc>
+            </a:pPr>
+            <a:r>
+              <a:rPr lang="en-US" dirty="0"/>
+              <a:t>Studies show that laptops and phones cause significant drops in grades even if they are being used to take notes.</a:t>
+            </a:r>
+          </a:p>
+          <a:p>
+            <a:pPr lvl="1">
+              <a:lnSpc>
+                <a:spcPct val="90000"/>
+              </a:lnSpc>
+            </a:pPr>
+            <a:r>
+              <a:rPr lang="en-US" dirty="0"/>
+              <a:t>Studies also show that handwritten notes are more effective for memorization and learning.</a:t>
+            </a:r>
+          </a:p>
+          <a:p>
+            <a:pPr lvl="1">
+              <a:lnSpc>
+                <a:spcPct val="90000"/>
+              </a:lnSpc>
+            </a:pPr>
+            <a:r>
+              <a:rPr lang="en-US" dirty="0"/>
+              <a:t>It is also quite obvious to me that students with laptops are not paying attention. It distracts me and hurts the classroom environment for everyone.</a:t>
+            </a:r>
+          </a:p>
+        </p:txBody>
+      </p:sp>
+    </p:spTree>
+    <p:extLst>
+      <p:ext uri="{BB962C8B-B14F-4D97-AF65-F5344CB8AC3E}">
+        <p14:creationId xmlns:p14="http://schemas.microsoft.com/office/powerpoint/2010/main" val="288576758"/>
+      </p:ext>
+    </p:extLst>
+  </p:cSld>
+  <p:clrMapOvr>
+    <a:masterClrMapping/>
+  </p:clrMapOvr>
+</p:sld>
+</file>
+
+<file path=ppt/slides/slide12.xml><?xml version="1.0" encoding="utf-8"?>
+<p:sld xmlns:a="http://schemas.openxmlformats.org/drawingml/2006/main" xmlns:r="http://schemas.openxmlformats.org/officeDocument/2006/relationships" xmlns:p="http://schemas.openxmlformats.org/presentationml/2006/main">
+  <p:cSld>
+    <p:spTree>
+      <p:nvGrpSpPr>
+        <p:cNvPr id="1" name="">
+          <a:extLst>
+            <a:ext uri="{FF2B5EF4-FFF2-40B4-BE49-F238E27FC236}">
+              <a16:creationId xmlns:a16="http://schemas.microsoft.com/office/drawing/2014/main" id="{49B38431-7499-E908-C16F-9E4D2AA880BD}"/>
+            </a:ext>
+          </a:extLst>
+        </p:cNvPr>
+        <p:cNvGrpSpPr/>
+        <p:nvPr/>
+      </p:nvGrpSpPr>
+      <p:grpSpPr>
+        <a:xfrm>
+          <a:off x="0" y="0"/>
+          <a:ext cx="0" cy="0"/>
+          <a:chOff x="0" y="0"/>
+          <a:chExt cx="0" cy="0"/>
+        </a:xfrm>
+      </p:grpSpPr>
+      <p:sp>
+        <p:nvSpPr>
+          <p:cNvPr id="9218" name="Rectangle 2">
+            <a:extLst>
+              <a:ext uri="{FF2B5EF4-FFF2-40B4-BE49-F238E27FC236}">
+                <a16:creationId xmlns:a16="http://schemas.microsoft.com/office/drawing/2014/main" id="{3DDA6D38-BA12-31AF-ED45-3A1A417920B2}"/>
+              </a:ext>
+            </a:extLst>
+          </p:cNvPr>
+          <p:cNvSpPr>
+            <a:spLocks noGrp="1" noChangeArrowheads="1"/>
+          </p:cNvSpPr>
+          <p:nvPr>
+            <p:ph type="title"/>
+            <p:custDataLst>
+              <p:tags r:id="rId1"/>
+            </p:custDataLst>
+          </p:nvPr>
+        </p:nvSpPr>
+        <p:spPr>
+          <a:xfrm>
+            <a:off x="1141413" y="173622"/>
+            <a:ext cx="9905998" cy="812249"/>
+          </a:xfrm>
+        </p:spPr>
+        <p:txBody>
+          <a:bodyPr/>
+          <a:lstStyle/>
+          <a:p>
+            <a:pPr algn="ctr"/>
+            <a:r>
+              <a:rPr lang="en-US" dirty="0"/>
+              <a:t>On the Subject of Attendance</a:t>
+            </a:r>
+          </a:p>
+        </p:txBody>
+      </p:sp>
+      <p:sp>
+        <p:nvSpPr>
+          <p:cNvPr id="307203" name="Rectangle 3">
+            <a:extLst>
+              <a:ext uri="{FF2B5EF4-FFF2-40B4-BE49-F238E27FC236}">
+                <a16:creationId xmlns:a16="http://schemas.microsoft.com/office/drawing/2014/main" id="{342FFA0A-D9E5-70F3-B31F-0BE0D38EFA7D}"/>
+              </a:ext>
+            </a:extLst>
+          </p:cNvPr>
+          <p:cNvSpPr>
+            <a:spLocks noGrp="1" noChangeArrowheads="1"/>
+          </p:cNvSpPr>
+          <p:nvPr>
+            <p:ph idx="1"/>
+            <p:custDataLst>
+              <p:tags r:id="rId2"/>
+            </p:custDataLst>
+          </p:nvPr>
+        </p:nvSpPr>
+        <p:spPr>
+          <a:xfrm>
+            <a:off x="1252962" y="1204112"/>
+            <a:ext cx="9905998" cy="5499979"/>
+          </a:xfrm>
+        </p:spPr>
+        <p:txBody>
+          <a:bodyPr>
+            <a:normAutofit fontScale="92500" lnSpcReduction="20000"/>
+          </a:bodyPr>
+          <a:lstStyle/>
+          <a:p>
+            <a:pPr>
+              <a:lnSpc>
+                <a:spcPct val="90000"/>
+              </a:lnSpc>
+            </a:pPr>
+            <a:r>
+              <a:rPr lang="en-US" b="1" i="1" u="sng" dirty="0"/>
+              <a:t>Attendance is REQUIRED</a:t>
+            </a:r>
+            <a:r>
+              <a:rPr lang="en-US" dirty="0"/>
+              <a:t>. This is an </a:t>
+            </a:r>
+            <a:r>
+              <a:rPr lang="en-US" b="1" i="1" u="sng" dirty="0"/>
+              <a:t>IN-PERSON class </a:t>
+            </a:r>
+            <a:r>
+              <a:rPr lang="en-US" dirty="0"/>
+              <a:t>and there is no guarantee / expectation / officially supported option to take this class remotely. </a:t>
+            </a:r>
+          </a:p>
+          <a:p>
+            <a:pPr>
+              <a:lnSpc>
+                <a:spcPct val="90000"/>
+              </a:lnSpc>
+            </a:pPr>
+            <a:endParaRPr lang="en-US" dirty="0"/>
+          </a:p>
+          <a:p>
+            <a:pPr>
+              <a:lnSpc>
+                <a:spcPct val="90000"/>
+              </a:lnSpc>
+            </a:pPr>
+            <a:r>
+              <a:rPr lang="en-US" i="1" u="sng" dirty="0"/>
+              <a:t>If you don’t attend class you may (all of these have happened)</a:t>
+            </a:r>
+          </a:p>
+          <a:p>
+            <a:pPr lvl="1">
+              <a:lnSpc>
+                <a:spcPct val="90000"/>
+              </a:lnSpc>
+            </a:pPr>
+            <a:r>
+              <a:rPr lang="en-US" dirty="0"/>
+              <a:t>Miss important announcements (I don’t record daily announcements)</a:t>
+            </a:r>
+          </a:p>
+          <a:p>
+            <a:pPr lvl="1">
+              <a:lnSpc>
+                <a:spcPct val="90000"/>
+              </a:lnSpc>
+            </a:pPr>
+            <a:r>
+              <a:rPr lang="en-US" dirty="0"/>
+              <a:t>Miss exams because dates were changed</a:t>
+            </a:r>
+          </a:p>
+          <a:p>
+            <a:pPr lvl="1">
+              <a:lnSpc>
+                <a:spcPct val="90000"/>
+              </a:lnSpc>
+            </a:pPr>
+            <a:r>
+              <a:rPr lang="en-US" dirty="0"/>
+              <a:t>Miss solutions or hints for test questions that are given off the recording</a:t>
+            </a:r>
+          </a:p>
+          <a:p>
+            <a:pPr lvl="1">
+              <a:lnSpc>
+                <a:spcPct val="90000"/>
+              </a:lnSpc>
+            </a:pPr>
+            <a:r>
+              <a:rPr lang="en-US" dirty="0"/>
+              <a:t>Not be granted a favor when you ask me for something and I’ve never seen you before</a:t>
+            </a:r>
+          </a:p>
+          <a:p>
+            <a:pPr lvl="1">
+              <a:lnSpc>
+                <a:spcPct val="90000"/>
+              </a:lnSpc>
+            </a:pPr>
+            <a:r>
+              <a:rPr lang="en-US" dirty="0"/>
+              <a:t>Miss the chance to play fun games like Wordle with your peers (most important one)</a:t>
+            </a:r>
+          </a:p>
+          <a:p>
+            <a:pPr lvl="1">
+              <a:lnSpc>
+                <a:spcPct val="90000"/>
+              </a:lnSpc>
+            </a:pPr>
+            <a:endParaRPr lang="en-US" dirty="0"/>
+          </a:p>
+          <a:p>
+            <a:pPr>
+              <a:lnSpc>
+                <a:spcPct val="90000"/>
+              </a:lnSpc>
+            </a:pPr>
+            <a:r>
+              <a:rPr lang="en-US" i="1" u="sng" dirty="0"/>
+              <a:t>Benefits of coming to class</a:t>
+            </a:r>
+            <a:r>
+              <a:rPr lang="en-US" dirty="0"/>
+              <a:t>:</a:t>
+            </a:r>
+          </a:p>
+          <a:p>
+            <a:pPr lvl="1">
+              <a:lnSpc>
+                <a:spcPct val="90000"/>
+              </a:lnSpc>
+            </a:pPr>
+            <a:r>
+              <a:rPr lang="en-US" dirty="0"/>
+              <a:t>Practice WORKING YOUR BRAIN muscles. Makes you smarter. Improves your patience.</a:t>
+            </a:r>
+          </a:p>
+          <a:p>
+            <a:pPr lvl="1">
+              <a:lnSpc>
+                <a:spcPct val="90000"/>
+              </a:lnSpc>
+            </a:pPr>
+            <a:r>
+              <a:rPr lang="en-US" dirty="0"/>
+              <a:t>Hear all the important announcements so you won’t miss anything.</a:t>
+            </a:r>
+          </a:p>
+          <a:p>
+            <a:pPr lvl="1">
+              <a:lnSpc>
+                <a:spcPct val="90000"/>
+              </a:lnSpc>
+            </a:pPr>
+            <a:r>
+              <a:rPr lang="en-US" dirty="0"/>
+              <a:t>Get some of your study time out of the way</a:t>
+            </a:r>
+          </a:p>
+          <a:p>
+            <a:pPr lvl="1">
+              <a:lnSpc>
+                <a:spcPct val="90000"/>
+              </a:lnSpc>
+            </a:pPr>
+            <a:r>
+              <a:rPr lang="en-US" dirty="0"/>
+              <a:t>Gives the material more time to digest before you study for quizzes</a:t>
+            </a:r>
+          </a:p>
+          <a:p>
+            <a:pPr lvl="1">
+              <a:lnSpc>
+                <a:spcPct val="90000"/>
+              </a:lnSpc>
+            </a:pPr>
+            <a:r>
+              <a:rPr lang="en-US" dirty="0"/>
+              <a:t>If you ask for a favor and you are an engaged member of our community who I recognize, I am MUCH more likely to grant you that favor</a:t>
+            </a:r>
+          </a:p>
+          <a:p>
+            <a:pPr lvl="1">
+              <a:lnSpc>
+                <a:spcPct val="90000"/>
+              </a:lnSpc>
+            </a:pPr>
+            <a:r>
+              <a:rPr lang="en-US" dirty="0"/>
+              <a:t>You get to play Wordle with the group and see how well we do!</a:t>
+            </a:r>
+          </a:p>
+          <a:p>
+            <a:pPr lvl="1">
+              <a:lnSpc>
+                <a:spcPct val="90000"/>
+              </a:lnSpc>
+            </a:pPr>
+            <a:r>
+              <a:rPr lang="en-US" dirty="0"/>
+              <a:t>Contributes to your attendance score!</a:t>
+            </a:r>
+          </a:p>
+        </p:txBody>
+      </p:sp>
+    </p:spTree>
+    <p:extLst>
+      <p:ext uri="{BB962C8B-B14F-4D97-AF65-F5344CB8AC3E}">
+        <p14:creationId xmlns:p14="http://schemas.microsoft.com/office/powerpoint/2010/main" val="2665990896"/>
+      </p:ext>
+    </p:extLst>
+  </p:cSld>
+  <p:clrMapOvr>
+    <a:masterClrMapping/>
+  </p:clrMapOvr>
+</p:sld>
+</file>
+
+<file path=ppt/slides/slide13.xml><?xml version="1.0" encoding="utf-8"?>
+<p:sld xmlns:a="http://schemas.openxmlformats.org/drawingml/2006/main" xmlns:r="http://schemas.openxmlformats.org/officeDocument/2006/relationships" xmlns:p="http://schemas.openxmlformats.org/presentationml/2006/main">
+  <p:cSld>
+    <p:spTree>
+      <p:nvGrpSpPr>
+        <p:cNvPr id="1" name="">
+          <a:extLst>
+            <a:ext uri="{FF2B5EF4-FFF2-40B4-BE49-F238E27FC236}">
+              <a16:creationId xmlns:a16="http://schemas.microsoft.com/office/drawing/2014/main" id="{5CC9FC99-366D-A803-6C52-76CFA2EB8289}"/>
+            </a:ext>
+          </a:extLst>
+        </p:cNvPr>
+        <p:cNvGrpSpPr/>
+        <p:nvPr/>
+      </p:nvGrpSpPr>
+      <p:grpSpPr>
+        <a:xfrm>
+          <a:off x="0" y="0"/>
+          <a:ext cx="0" cy="0"/>
+          <a:chOff x="0" y="0"/>
+          <a:chExt cx="0" cy="0"/>
+        </a:xfrm>
+      </p:grpSpPr>
+      <p:sp>
+        <p:nvSpPr>
+          <p:cNvPr id="9218" name="Rectangle 2">
+            <a:extLst>
+              <a:ext uri="{FF2B5EF4-FFF2-40B4-BE49-F238E27FC236}">
+                <a16:creationId xmlns:a16="http://schemas.microsoft.com/office/drawing/2014/main" id="{3AF46158-204F-C7F8-1E47-18C2B746CEB7}"/>
+              </a:ext>
+            </a:extLst>
+          </p:cNvPr>
+          <p:cNvSpPr>
+            <a:spLocks noGrp="1" noChangeArrowheads="1"/>
+          </p:cNvSpPr>
+          <p:nvPr>
+            <p:ph type="title"/>
+            <p:custDataLst>
+              <p:tags r:id="rId1"/>
+            </p:custDataLst>
+          </p:nvPr>
+        </p:nvSpPr>
+        <p:spPr>
+          <a:xfrm>
+            <a:off x="1141413" y="173622"/>
+            <a:ext cx="9905998" cy="812249"/>
+          </a:xfrm>
+        </p:spPr>
+        <p:txBody>
+          <a:bodyPr/>
+          <a:lstStyle/>
+          <a:p>
+            <a:pPr algn="ctr"/>
+            <a:r>
+              <a:rPr lang="en-US" dirty="0"/>
+              <a:t>Attendance Score</a:t>
+            </a:r>
+          </a:p>
+        </p:txBody>
+      </p:sp>
+      <mc:AlternateContent xmlns:mc="http://schemas.openxmlformats.org/markup-compatibility/2006">
+        <mc:Choice xmlns:a14="http://schemas.microsoft.com/office/drawing/2010/main" Requires="a14">
+          <p:sp>
+            <p:nvSpPr>
+              <p:cNvPr id="307203" name="Rectangle 3">
+                <a:extLst>
+                  <a:ext uri="{FF2B5EF4-FFF2-40B4-BE49-F238E27FC236}">
+                    <a16:creationId xmlns:a16="http://schemas.microsoft.com/office/drawing/2014/main" id="{51F2CB0C-3790-16B7-E0F3-9FBDD71A54B7}"/>
+                  </a:ext>
+                </a:extLst>
+              </p:cNvPr>
+              <p:cNvSpPr>
+                <a:spLocks noGrp="1" noChangeArrowheads="1"/>
+              </p:cNvSpPr>
+              <p:nvPr>
+                <p:ph idx="1"/>
+                <p:custDataLst>
+                  <p:tags r:id="rId2"/>
+                </p:custDataLst>
+              </p:nvPr>
+            </p:nvSpPr>
+            <p:spPr>
+              <a:xfrm>
+                <a:off x="1252962" y="1204112"/>
+                <a:ext cx="9905998" cy="5499979"/>
+              </a:xfrm>
+            </p:spPr>
+            <p:txBody>
+              <a:bodyPr>
+                <a:normAutofit/>
+              </a:bodyPr>
+              <a:lstStyle/>
+              <a:p>
+                <a:pPr>
+                  <a:lnSpc>
+                    <a:spcPct val="90000"/>
+                  </a:lnSpc>
+                </a:pPr>
+                <a:r>
+                  <a:rPr lang="en-US" dirty="0"/>
+                  <a:t>In this class, each </a:t>
+                </a:r>
+                <a:r>
+                  <a:rPr lang="en-US" b="1" i="1" u="sng" dirty="0"/>
+                  <a:t>section will receive a communal, shared attendance score</a:t>
+                </a:r>
+                <a:r>
+                  <a:rPr lang="en-US" dirty="0"/>
+                  <a:t> </a:t>
+                </a:r>
+              </a:p>
+              <a:p>
+                <a:pPr lvl="1">
+                  <a:lnSpc>
+                    <a:spcPct val="90000"/>
+                  </a:lnSpc>
+                </a:pPr>
+                <a:r>
+                  <a:rPr lang="en-US" dirty="0"/>
+                  <a:t>Meaning everyone in the section receives the same attendance grade at end of semester.</a:t>
+                </a:r>
+              </a:p>
+              <a:p>
+                <a:pPr lvl="1">
+                  <a:lnSpc>
+                    <a:spcPct val="90000"/>
+                  </a:lnSpc>
+                </a:pPr>
+                <a:endParaRPr lang="en-US" dirty="0"/>
+              </a:p>
+              <a:p>
+                <a:pPr>
+                  <a:lnSpc>
+                    <a:spcPct val="90000"/>
+                  </a:lnSpc>
+                </a:pPr>
+                <a:r>
+                  <a:rPr lang="en-US" i="1" u="sng" dirty="0"/>
+                  <a:t>How does it work?</a:t>
+                </a:r>
+              </a:p>
+              <a:p>
+                <a:pPr lvl="1">
+                  <a:lnSpc>
+                    <a:spcPct val="90000"/>
+                  </a:lnSpc>
+                </a:pPr>
+                <a:r>
+                  <a:rPr lang="en-US" dirty="0"/>
+                  <a:t>Each lecture I will count the number of students present</a:t>
+                </a:r>
+              </a:p>
+              <a:p>
+                <a:pPr lvl="1">
+                  <a:lnSpc>
+                    <a:spcPct val="90000"/>
+                  </a:lnSpc>
+                </a:pPr>
+                <a:r>
+                  <a:rPr lang="en-US" dirty="0"/>
+                  <a:t>If attendance &gt; 50 percent then ALL of you get attendance point for that day</a:t>
+                </a:r>
+              </a:p>
+              <a:p>
+                <a:pPr lvl="1">
+                  <a:lnSpc>
+                    <a:spcPct val="90000"/>
+                  </a:lnSpc>
+                </a:pPr>
+                <a:r>
+                  <a:rPr lang="en-US" dirty="0"/>
+                  <a:t>If attendance </a:t>
+                </a:r>
+                <a14:m>
+                  <m:oMath xmlns:m="http://schemas.openxmlformats.org/officeDocument/2006/math">
+                    <m:r>
+                      <a:rPr lang="en-US" b="0" i="1" smtClean="0">
+                        <a:latin typeface="Cambria Math" panose="02040503050406030204" pitchFamily="18" charset="0"/>
+                      </a:rPr>
+                      <m:t>≤</m:t>
+                    </m:r>
+                  </m:oMath>
+                </a14:m>
+                <a:r>
+                  <a:rPr lang="en-US" dirty="0"/>
+                  <a:t> 50 percent then ALL of you LOSE attendance point for that day.</a:t>
+                </a:r>
+              </a:p>
+              <a:p>
+                <a:pPr lvl="1">
+                  <a:lnSpc>
+                    <a:spcPct val="90000"/>
+                  </a:lnSpc>
+                </a:pPr>
+                <a:r>
+                  <a:rPr lang="en-US" dirty="0"/>
+                  <a:t>Attendance grade is simply the percentage of lectures that you earn your attendance point.</a:t>
+                </a:r>
+              </a:p>
+              <a:p>
+                <a:pPr lvl="1">
+                  <a:lnSpc>
+                    <a:spcPct val="90000"/>
+                  </a:lnSpc>
+                </a:pPr>
+                <a:endParaRPr lang="en-US" dirty="0"/>
+              </a:p>
+              <a:p>
+                <a:pPr>
+                  <a:lnSpc>
+                    <a:spcPct val="90000"/>
+                  </a:lnSpc>
+                </a:pPr>
+                <a:r>
+                  <a:rPr lang="en-US" dirty="0"/>
+                  <a:t>A couple notes:</a:t>
+                </a:r>
+              </a:p>
+              <a:p>
+                <a:pPr lvl="1">
+                  <a:lnSpc>
+                    <a:spcPct val="90000"/>
+                  </a:lnSpc>
+                </a:pPr>
+                <a:r>
+                  <a:rPr lang="en-US" dirty="0"/>
+                  <a:t>I will count sometimes at beginning, sometimes mid, and sometimes at end of lecture</a:t>
+                </a:r>
+              </a:p>
+              <a:p>
+                <a:pPr lvl="1">
+                  <a:lnSpc>
+                    <a:spcPct val="90000"/>
+                  </a:lnSpc>
+                </a:pPr>
+                <a:r>
+                  <a:rPr lang="en-US" dirty="0"/>
+                  <a:t>I will update you every day on your current attendance score during announcements</a:t>
+                </a:r>
+              </a:p>
+              <a:p>
+                <a:pPr lvl="1">
+                  <a:lnSpc>
+                    <a:spcPct val="90000"/>
+                  </a:lnSpc>
+                </a:pPr>
+                <a:r>
+                  <a:rPr lang="en-US" dirty="0"/>
+                  <a:t>Let’s work together to ensure we ALL get a 100% attendance score!!</a:t>
+                </a:r>
+              </a:p>
+            </p:txBody>
+          </p:sp>
+        </mc:Choice>
+        <mc:Fallback>
+          <p:sp>
+            <p:nvSpPr>
+              <p:cNvPr id="307203" name="Rectangle 3">
+                <a:extLst>
+                  <a:ext uri="{FF2B5EF4-FFF2-40B4-BE49-F238E27FC236}">
+                    <a16:creationId xmlns:a16="http://schemas.microsoft.com/office/drawing/2014/main" id="{51F2CB0C-3790-16B7-E0F3-9FBDD71A54B7}"/>
+                  </a:ext>
+                </a:extLst>
+              </p:cNvPr>
+              <p:cNvSpPr>
+                <a:spLocks noGrp="1" noRot="1" noChangeAspect="1" noMove="1" noResize="1" noEditPoints="1" noAdjustHandles="1" noChangeArrowheads="1" noChangeShapeType="1" noTextEdit="1"/>
+              </p:cNvSpPr>
+              <p:nvPr>
+                <p:ph idx="1"/>
+                <p:custDataLst>
+                  <p:tags r:id="rId2"/>
+                </p:custDataLst>
+              </p:nvPr>
+            </p:nvSpPr>
+            <p:spPr>
+              <a:xfrm>
+                <a:off x="1252962" y="1204112"/>
+                <a:ext cx="9905998" cy="5499979"/>
+              </a:xfrm>
+              <a:blipFill>
+                <a:blip r:embed="rId4"/>
+                <a:stretch>
+                  <a:fillRect l="-1280" t="-3002"/>
+                </a:stretch>
+              </a:blipFill>
+            </p:spPr>
+            <p:txBody>
+              <a:bodyPr/>
+              <a:lstStyle/>
+              <a:p>
+                <a:r>
+                  <a:rPr lang="en-US">
+                    <a:noFill/>
+                  </a:rPr>
+                  <a:t> </a:t>
+                </a:r>
+              </a:p>
+            </p:txBody>
+          </p:sp>
+        </mc:Fallback>
+      </mc:AlternateContent>
+    </p:spTree>
+    <p:extLst>
+      <p:ext uri="{BB962C8B-B14F-4D97-AF65-F5344CB8AC3E}">
+        <p14:creationId xmlns:p14="http://schemas.microsoft.com/office/powerpoint/2010/main" val="717769953"/>
+      </p:ext>
+    </p:extLst>
+  </p:cSld>
+  <p:clrMapOvr>
+    <a:masterClrMapping/>
+  </p:clrMapOvr>
+</p:sld>
+</file>
+
+<file path=ppt/slides/slide14.xml><?xml version="1.0" encoding="utf-8"?>
+<p:sld xmlns:a="http://schemas.openxmlformats.org/drawingml/2006/main" xmlns:r="http://schemas.openxmlformats.org/officeDocument/2006/relationships" xmlns:p="http://schemas.openxmlformats.org/presentationml/2006/main">
+  <p:cSld>
+    <p:spTree>
+      <p:nvGrpSpPr>
         <p:cNvPr id="1" name=""/>
         <p:cNvGrpSpPr/>
         <p:nvPr/>
@@ -13682,7 +14498,7 @@
 </p:sld>
 </file>
 
-<file path=ppt/slides/slide12.xml><?xml version="1.0" encoding="utf-8"?>
+<file path=ppt/slides/slide15.xml><?xml version="1.0" encoding="utf-8"?>
 <p:sld xmlns:a="http://schemas.openxmlformats.org/drawingml/2006/main" xmlns:r="http://schemas.openxmlformats.org/officeDocument/2006/relationships" xmlns:p="http://schemas.openxmlformats.org/presentationml/2006/main">
   <p:cSld>
     <p:spTree>
@@ -14062,7 +14878,7 @@
 </p:sld>
 </file>
 
-<file path=ppt/slides/slide13.xml><?xml version="1.0" encoding="utf-8"?>
+<file path=ppt/slides/slide16.xml><?xml version="1.0" encoding="utf-8"?>
 <p:sld xmlns:a="http://schemas.openxmlformats.org/drawingml/2006/main" xmlns:r="http://schemas.openxmlformats.org/officeDocument/2006/relationships" xmlns:p="http://schemas.openxmlformats.org/presentationml/2006/main">
   <p:cSld>
     <p:spTree>
@@ -14131,13 +14947,13 @@
         </p:nvSpPr>
         <p:spPr>
           <a:xfrm>
-            <a:off x="1141413" y="1045030"/>
+            <a:off x="1141413" y="1244204"/>
             <a:ext cx="9905997" cy="5111930"/>
           </a:xfrm>
         </p:spPr>
         <p:txBody>
           <a:bodyPr>
-            <a:normAutofit/>
+            <a:normAutofit lnSpcReduction="10000"/>
           </a:bodyPr>
           <a:lstStyle/>
           <a:p>
@@ -14150,14 +14966,14 @@
             <a:pPr lvl="1"/>
             <a:r>
               <a:rPr lang="en-US" dirty="0"/>
-              <a:t>Tu / Th 9:30 – 10:45 am @ Olsson Hall 120 (Floryan)</a:t>
+              <a:t>Tu / Th 9:30 – 10:45 am @ Rice Hall 130(Floryan)</a:t>
             </a:r>
           </a:p>
           <a:p>
             <a:pPr lvl="1"/>
             <a:r>
               <a:rPr lang="en-US" dirty="0"/>
-              <a:t>Tu / Th 3:30 – 4:45 pm @ Olsson Hall 120 (Pettit)</a:t>
+              <a:t>Tu / Th 11:00 – 12:15 pm @ Mec 205 (Floryan)</a:t>
             </a:r>
           </a:p>
           <a:p>
@@ -14181,14 +14997,14 @@
             <a:pPr lvl="1"/>
             <a:r>
               <a:rPr lang="en-US" dirty="0"/>
-              <a:t>A note about recordings…they are a privilege, not a right. If less than half of you are present in class, then I will not record the lecture.</a:t>
+              <a:t>A note about recordings…they are a privilege, not a right. If less than half of you are present in class, then I may choose not to record the lecture.</a:t>
             </a:r>
           </a:p>
           <a:p>
             <a:pPr lvl="1"/>
             <a:r>
               <a:rPr lang="en-US" b="1" i="1" u="sng" dirty="0"/>
-              <a:t>Some material (like extra examples or homework help) will NOT be in the recording</a:t>
+              <a:t>Some material (like announcements, extra examples, or homework help) will NOT be in the recording</a:t>
             </a:r>
           </a:p>
           <a:p>
@@ -14222,7 +15038,7 @@
 </p:sld>
 </file>
 
-<file path=ppt/slides/slide14.xml><?xml version="1.0" encoding="utf-8"?>
+<file path=ppt/slides/slide17.xml><?xml version="1.0" encoding="utf-8"?>
 <p:sld xmlns:a="http://schemas.openxmlformats.org/drawingml/2006/main" xmlns:r="http://schemas.openxmlformats.org/officeDocument/2006/relationships" xmlns:p="http://schemas.openxmlformats.org/presentationml/2006/main">
   <p:cSld>
     <p:spTree>
@@ -14281,54 +15097,54 @@
         </p:nvSpPr>
         <p:spPr>
           <a:xfrm>
-            <a:off x="3316208" y="1969476"/>
-            <a:ext cx="5395711" cy="2813539"/>
+            <a:off x="3287122" y="2168652"/>
+            <a:ext cx="5614579" cy="2813539"/>
           </a:xfrm>
         </p:spPr>
         <p:txBody>
           <a:bodyPr>
-            <a:normAutofit/>
+            <a:normAutofit fontScale="92500" lnSpcReduction="10000"/>
           </a:bodyPr>
           <a:lstStyle/>
           <a:p>
             <a:r>
               <a:rPr lang="en-US" i="1" dirty="0"/>
-              <a:t>The course is divided into 5 modules</a:t>
+              <a:t>The course is divided into 4 modules (5 if you count the review module)</a:t>
             </a:r>
           </a:p>
           <a:p>
             <a:pPr lvl="1"/>
             <a:r>
               <a:rPr lang="en-US" i="1" dirty="0"/>
-              <a:t>1: Introduction and Cardinality</a:t>
+              <a:t>0: Introduction, Cardinality (Warmup and review)</a:t>
             </a:r>
           </a:p>
           <a:p>
             <a:pPr lvl="1"/>
             <a:r>
               <a:rPr lang="en-US" i="1" dirty="0"/>
-              <a:t>2: Regular Languages</a:t>
+              <a:t>1: Regular Languages</a:t>
             </a:r>
           </a:p>
           <a:p>
             <a:pPr lvl="1"/>
             <a:r>
               <a:rPr lang="en-US" i="1" dirty="0"/>
-              <a:t>3: Context-Free Grammars</a:t>
+              <a:t>2: Context-Free Grammars</a:t>
             </a:r>
           </a:p>
           <a:p>
             <a:pPr lvl="1"/>
             <a:r>
               <a:rPr lang="en-US" i="1" dirty="0"/>
-              <a:t>4: Turing Machines and Decidability</a:t>
+              <a:t>3: Turing Machines and Decidability</a:t>
             </a:r>
           </a:p>
           <a:p>
             <a:pPr lvl="1"/>
             <a:r>
               <a:rPr lang="en-US" i="1" dirty="0"/>
-              <a:t>5: Complexity Theory</a:t>
+              <a:t>4: Complexity Theory</a:t>
             </a:r>
           </a:p>
           <a:p>
@@ -14353,7 +15169,7 @@
 </p:sld>
 </file>
 
-<file path=ppt/slides/slide15.xml><?xml version="1.0" encoding="utf-8"?>
+<file path=ppt/slides/slide18.xml><?xml version="1.0" encoding="utf-8"?>
 <p:sld xmlns:a="http://schemas.openxmlformats.org/drawingml/2006/main" xmlns:r="http://schemas.openxmlformats.org/officeDocument/2006/relationships" xmlns:p="http://schemas.openxmlformats.org/presentationml/2006/main">
   <p:cSld>
     <p:spTree>
@@ -14458,7 +15274,7 @@
             <a:pPr lvl="1"/>
             <a:r>
               <a:rPr lang="en-US" i="1" dirty="0"/>
-              <a:t>1 quiz (assessment)</a:t>
+              <a:t>1 quiz (assessment), but module 0 does NOT have a quiz</a:t>
             </a:r>
           </a:p>
           <a:p>
@@ -14484,448 +15300,6 @@
     <p:extLst>
       <p:ext uri="{BB962C8B-B14F-4D97-AF65-F5344CB8AC3E}">
         <p14:creationId xmlns:p14="http://schemas.microsoft.com/office/powerpoint/2010/main" val="3198794026"/>
-      </p:ext>
-    </p:extLst>
-  </p:cSld>
-  <p:clrMapOvr>
-    <a:masterClrMapping/>
-  </p:clrMapOvr>
-</p:sld>
-</file>
-
-<file path=ppt/slides/slide16.xml><?xml version="1.0" encoding="utf-8"?>
-<p:sld xmlns:a="http://schemas.openxmlformats.org/drawingml/2006/main" xmlns:r="http://schemas.openxmlformats.org/officeDocument/2006/relationships" xmlns:p="http://schemas.openxmlformats.org/presentationml/2006/main">
-  <p:cSld>
-    <p:spTree>
-      <p:nvGrpSpPr>
-        <p:cNvPr id="1" name=""/>
-        <p:cNvGrpSpPr/>
-        <p:nvPr/>
-      </p:nvGrpSpPr>
-      <p:grpSpPr>
-        <a:xfrm>
-          <a:off x="0" y="0"/>
-          <a:ext cx="0" cy="0"/>
-          <a:chOff x="0" y="0"/>
-          <a:chExt cx="0" cy="0"/>
-        </a:xfrm>
-      </p:grpSpPr>
-      <p:sp>
-        <p:nvSpPr>
-          <p:cNvPr id="12290" name="Rectangle 2"/>
-          <p:cNvSpPr>
-            <a:spLocks noGrp="1" noChangeArrowheads="1"/>
-          </p:cNvSpPr>
-          <p:nvPr>
-            <p:ph type="title"/>
-          </p:nvPr>
-        </p:nvSpPr>
-        <p:spPr>
-          <a:xfrm>
-            <a:off x="1981200" y="312337"/>
-            <a:ext cx="8229600" cy="715945"/>
-          </a:xfrm>
-        </p:spPr>
-        <p:txBody>
-          <a:bodyPr/>
-          <a:lstStyle/>
-          <a:p>
-            <a:pPr algn="ctr"/>
-            <a:r>
-              <a:rPr lang="en-US" dirty="0"/>
-              <a:t>Quizzes</a:t>
-            </a:r>
-          </a:p>
-        </p:txBody>
-      </p:sp>
-      <p:sp>
-        <p:nvSpPr>
-          <p:cNvPr id="12291" name="Rectangle 3"/>
-          <p:cNvSpPr>
-            <a:spLocks noGrp="1" noChangeArrowheads="1"/>
-          </p:cNvSpPr>
-          <p:nvPr>
-            <p:ph idx="1"/>
-          </p:nvPr>
-        </p:nvSpPr>
-        <p:spPr>
-          <a:xfrm>
-            <a:off x="1012263" y="1245995"/>
-            <a:ext cx="10221795" cy="5245239"/>
-          </a:xfrm>
-        </p:spPr>
-        <p:txBody>
-          <a:bodyPr>
-            <a:normAutofit/>
-          </a:bodyPr>
-          <a:lstStyle/>
-          <a:p>
-            <a:r>
-              <a:rPr lang="en-US" dirty="0"/>
-              <a:t>Medium size assessments of your knowledge in each module</a:t>
-            </a:r>
-          </a:p>
-          <a:p>
-            <a:pPr lvl="1"/>
-            <a:r>
-              <a:rPr lang="en-US" dirty="0"/>
-              <a:t>Meant to ensure you have knowledge of the individual topics from lecture to a sufficient degree.</a:t>
-            </a:r>
-          </a:p>
-          <a:p>
-            <a:pPr lvl="1"/>
-            <a:r>
-              <a:rPr lang="en-US" dirty="0"/>
-              <a:t>Usually about two pages worth of traditional exam material.</a:t>
-            </a:r>
-          </a:p>
-          <a:p>
-            <a:endParaRPr lang="en-US" dirty="0"/>
-          </a:p>
-          <a:p>
-            <a:r>
-              <a:rPr lang="en-US" dirty="0"/>
-              <a:t>Quiz Schedule (I wanted this to be similar / modeled after a midterm schedule)</a:t>
-            </a:r>
-          </a:p>
-          <a:p>
-            <a:pPr lvl="1"/>
-            <a:r>
-              <a:rPr lang="en-US" sz="2000" dirty="0"/>
-              <a:t>Thu., Sep. </a:t>
-            </a:r>
-            <a:r>
-              <a:rPr lang="en-US" dirty="0"/>
-              <a:t>18</a:t>
-            </a:r>
-            <a:r>
-              <a:rPr lang="en-US" sz="2000" dirty="0"/>
-              <a:t>			Mod 1</a:t>
-            </a:r>
-          </a:p>
-          <a:p>
-            <a:pPr lvl="1"/>
-            <a:r>
-              <a:rPr lang="en-US" sz="2000" dirty="0"/>
-              <a:t>Thu., Oct. </a:t>
-            </a:r>
-            <a:r>
-              <a:rPr lang="en-US" dirty="0"/>
-              <a:t>9	</a:t>
-            </a:r>
-            <a:r>
-              <a:rPr lang="en-US" sz="2000" dirty="0"/>
-              <a:t>			Mod </a:t>
-            </a:r>
-            <a:r>
-              <a:rPr lang="en-US" dirty="0"/>
-              <a:t>2</a:t>
-            </a:r>
-          </a:p>
-          <a:p>
-            <a:pPr lvl="1"/>
-            <a:r>
-              <a:rPr lang="en-US" sz="2000" dirty="0"/>
-              <a:t>Thu., Oct. </a:t>
-            </a:r>
-            <a:r>
-              <a:rPr lang="en-US" dirty="0"/>
-              <a:t>30</a:t>
-            </a:r>
-            <a:r>
-              <a:rPr lang="en-US" sz="2000" dirty="0"/>
-              <a:t>			Mod 3</a:t>
-            </a:r>
-          </a:p>
-          <a:p>
-            <a:pPr lvl="1"/>
-            <a:r>
-              <a:rPr lang="en-US" dirty="0"/>
-              <a:t>Thu., Nov. 20			Mod 4</a:t>
-            </a:r>
-            <a:endParaRPr lang="en-US" sz="2000" dirty="0"/>
-          </a:p>
-          <a:p>
-            <a:pPr lvl="1"/>
-            <a:r>
-              <a:rPr lang="en-US" dirty="0"/>
-              <a:t>TBD	</a:t>
-            </a:r>
-            <a:r>
-              <a:rPr lang="en-US" sz="2000" dirty="0"/>
-              <a:t>	</a:t>
-            </a:r>
-            <a:r>
-              <a:rPr lang="en-US" dirty="0"/>
-              <a:t>		</a:t>
-            </a:r>
-            <a:r>
-              <a:rPr lang="en-US" sz="2000" dirty="0"/>
-              <a:t>Mod 5, Final Exam Quiz, and optional 1-4 retakes</a:t>
-            </a:r>
-          </a:p>
-          <a:p>
-            <a:pPr lvl="1"/>
-            <a:endParaRPr lang="en-US" sz="2000" dirty="0"/>
-          </a:p>
-          <a:p>
-            <a:pPr lvl="1"/>
-            <a:endParaRPr lang="en-US" dirty="0"/>
-          </a:p>
-        </p:txBody>
-      </p:sp>
-    </p:spTree>
-    <p:extLst>
-      <p:ext uri="{BB962C8B-B14F-4D97-AF65-F5344CB8AC3E}">
-        <p14:creationId xmlns:p14="http://schemas.microsoft.com/office/powerpoint/2010/main" val="1895514943"/>
-      </p:ext>
-    </p:extLst>
-  </p:cSld>
-  <p:clrMapOvr>
-    <a:masterClrMapping/>
-  </p:clrMapOvr>
-</p:sld>
-</file>
-
-<file path=ppt/slides/slide17.xml><?xml version="1.0" encoding="utf-8"?>
-<p:sld xmlns:a="http://schemas.openxmlformats.org/drawingml/2006/main" xmlns:r="http://schemas.openxmlformats.org/officeDocument/2006/relationships" xmlns:p="http://schemas.openxmlformats.org/presentationml/2006/main">
-  <p:cSld>
-    <p:spTree>
-      <p:nvGrpSpPr>
-        <p:cNvPr id="1" name=""/>
-        <p:cNvGrpSpPr/>
-        <p:nvPr/>
-      </p:nvGrpSpPr>
-      <p:grpSpPr>
-        <a:xfrm>
-          <a:off x="0" y="0"/>
-          <a:ext cx="0" cy="0"/>
-          <a:chOff x="0" y="0"/>
-          <a:chExt cx="0" cy="0"/>
-        </a:xfrm>
-      </p:grpSpPr>
-      <p:sp>
-        <p:nvSpPr>
-          <p:cNvPr id="12290" name="Rectangle 2"/>
-          <p:cNvSpPr>
-            <a:spLocks noGrp="1" noChangeArrowheads="1"/>
-          </p:cNvSpPr>
-          <p:nvPr>
-            <p:ph type="title"/>
-          </p:nvPr>
-        </p:nvSpPr>
-        <p:spPr>
-          <a:xfrm>
-            <a:off x="1981200" y="381000"/>
-            <a:ext cx="8229600" cy="944545"/>
-          </a:xfrm>
-        </p:spPr>
-        <p:txBody>
-          <a:bodyPr/>
-          <a:lstStyle/>
-          <a:p>
-            <a:pPr algn="ctr"/>
-            <a:r>
-              <a:rPr lang="en-US" dirty="0"/>
-              <a:t>Quizzes</a:t>
-            </a:r>
-          </a:p>
-        </p:txBody>
-      </p:sp>
-      <p:sp>
-        <p:nvSpPr>
-          <p:cNvPr id="12291" name="Rectangle 3"/>
-          <p:cNvSpPr>
-            <a:spLocks noGrp="1" noChangeArrowheads="1"/>
-          </p:cNvSpPr>
-          <p:nvPr>
-            <p:ph idx="1"/>
-          </p:nvPr>
-        </p:nvSpPr>
-        <p:spPr>
-          <a:xfrm>
-            <a:off x="1391978" y="1539892"/>
-            <a:ext cx="9470290" cy="4525944"/>
-          </a:xfrm>
-        </p:spPr>
-        <p:txBody>
-          <a:bodyPr>
-            <a:normAutofit/>
-          </a:bodyPr>
-          <a:lstStyle/>
-          <a:p>
-            <a:r>
-              <a:rPr lang="en-US" dirty="0"/>
-              <a:t>You always receive the highest grade over all attempts (e.g., final exam retakes</a:t>
-            </a:r>
-          </a:p>
-          <a:p>
-            <a:pPr lvl="1"/>
-            <a:r>
-              <a:rPr lang="en-US" dirty="0"/>
-              <a:t>E.g., if you receive a 16/20 during midterm, and 13/20 during retake you still earn the 16/20 on that quiz.</a:t>
-            </a:r>
-          </a:p>
-          <a:p>
-            <a:pPr lvl="1"/>
-            <a:endParaRPr lang="en-US" dirty="0"/>
-          </a:p>
-          <a:p>
-            <a:r>
-              <a:rPr lang="en-US" dirty="0"/>
-              <a:t>You should always prioritize retaking quizzes with the lowest grades (somewhat obvious).</a:t>
-            </a:r>
-          </a:p>
-        </p:txBody>
-      </p:sp>
-    </p:spTree>
-    <p:extLst>
-      <p:ext uri="{BB962C8B-B14F-4D97-AF65-F5344CB8AC3E}">
-        <p14:creationId xmlns:p14="http://schemas.microsoft.com/office/powerpoint/2010/main" val="2940204379"/>
-      </p:ext>
-    </p:extLst>
-  </p:cSld>
-  <p:clrMapOvr>
-    <a:masterClrMapping/>
-  </p:clrMapOvr>
-</p:sld>
-</file>
-
-<file path=ppt/slides/slide18.xml><?xml version="1.0" encoding="utf-8"?>
-<p:sld xmlns:a="http://schemas.openxmlformats.org/drawingml/2006/main" xmlns:r="http://schemas.openxmlformats.org/officeDocument/2006/relationships" xmlns:p="http://schemas.openxmlformats.org/presentationml/2006/main">
-  <p:cSld>
-    <p:spTree>
-      <p:nvGrpSpPr>
-        <p:cNvPr id="1" name=""/>
-        <p:cNvGrpSpPr/>
-        <p:nvPr/>
-      </p:nvGrpSpPr>
-      <p:grpSpPr>
-        <a:xfrm>
-          <a:off x="0" y="0"/>
-          <a:ext cx="0" cy="0"/>
-          <a:chOff x="0" y="0"/>
-          <a:chExt cx="0" cy="0"/>
-        </a:xfrm>
-      </p:grpSpPr>
-      <p:sp>
-        <p:nvSpPr>
-          <p:cNvPr id="18434" name="Title 1"/>
-          <p:cNvSpPr>
-            <a:spLocks noGrp="1"/>
-          </p:cNvSpPr>
-          <p:nvPr>
-            <p:ph type="title"/>
-          </p:nvPr>
-        </p:nvSpPr>
-        <p:spPr>
-          <a:xfrm>
-            <a:off x="1141413" y="357262"/>
-            <a:ext cx="9905998" cy="707027"/>
-          </a:xfrm>
-        </p:spPr>
-        <p:txBody>
-          <a:bodyPr/>
-          <a:lstStyle/>
-          <a:p>
-            <a:pPr algn="ctr"/>
-            <a:r>
-              <a:rPr lang="en-US" dirty="0"/>
-              <a:t>Final Exam</a:t>
-            </a:r>
-          </a:p>
-        </p:txBody>
-      </p:sp>
-      <p:sp>
-        <p:nvSpPr>
-          <p:cNvPr id="18435" name="Content Placeholder 2"/>
-          <p:cNvSpPr>
-            <a:spLocks noGrp="1"/>
-          </p:cNvSpPr>
-          <p:nvPr>
-            <p:ph idx="1"/>
-          </p:nvPr>
-        </p:nvSpPr>
-        <p:spPr>
-          <a:xfrm>
-            <a:off x="1743670" y="1524000"/>
-            <a:ext cx="8826469" cy="4525944"/>
-          </a:xfrm>
-        </p:spPr>
-        <p:txBody>
-          <a:bodyPr>
-            <a:normAutofit/>
-          </a:bodyPr>
-          <a:lstStyle/>
-          <a:p>
-            <a:pPr algn="l"/>
-            <a:r>
-              <a:rPr lang="en-US" dirty="0"/>
-              <a:t>Our final exam time will be used to:</a:t>
-            </a:r>
-          </a:p>
-          <a:p>
-            <a:pPr lvl="1" algn="l"/>
-            <a:r>
-              <a:rPr lang="en-US" dirty="0"/>
-              <a:t>Take Quiz for </a:t>
-            </a:r>
-            <a:r>
-              <a:rPr lang="en-US" b="1" i="1" u="sng" dirty="0"/>
-              <a:t>Module 5</a:t>
-            </a:r>
-            <a:r>
-              <a:rPr lang="en-US" dirty="0"/>
-              <a:t> (first and only attempt…sorry)</a:t>
-            </a:r>
-          </a:p>
-          <a:p>
-            <a:pPr lvl="1" algn="l"/>
-            <a:r>
-              <a:rPr lang="en-US" dirty="0"/>
-              <a:t>Take the </a:t>
-            </a:r>
-            <a:r>
-              <a:rPr lang="en-US" b="1" i="1" u="sng" dirty="0"/>
-              <a:t>Final Exam Quiz</a:t>
-            </a:r>
-            <a:r>
-              <a:rPr lang="en-US" dirty="0"/>
-              <a:t> (Only attempt by design)</a:t>
-            </a:r>
-          </a:p>
-          <a:p>
-            <a:pPr lvl="1" algn="l"/>
-            <a:r>
-              <a:rPr lang="en-US" b="1" dirty="0"/>
-              <a:t>OPTIONAL</a:t>
-            </a:r>
-            <a:r>
-              <a:rPr lang="en-US" dirty="0"/>
-              <a:t>: Retake </a:t>
-            </a:r>
-            <a:r>
-              <a:rPr lang="en-US" b="1" i="1" u="sng" dirty="0"/>
-              <a:t>up to three of quizzes 1-4</a:t>
-            </a:r>
-            <a:endParaRPr lang="en-US" dirty="0"/>
-          </a:p>
-          <a:p>
-            <a:pPr lvl="1" algn="l"/>
-            <a:endParaRPr lang="en-US" b="1" i="1" u="sng" dirty="0"/>
-          </a:p>
-          <a:p>
-            <a:r>
-              <a:rPr lang="en-US" dirty="0"/>
-              <a:t>You can attempt all four retakes if you want, but the exams are designed for there to be enough time to do two (maybe three) retakes.</a:t>
-            </a:r>
-          </a:p>
-        </p:txBody>
-      </p:sp>
-    </p:spTree>
-    <p:extLst>
-      <p:ext uri="{BB962C8B-B14F-4D97-AF65-F5344CB8AC3E}">
-        <p14:creationId xmlns:p14="http://schemas.microsoft.com/office/powerpoint/2010/main" val="1095264303"/>
       </p:ext>
     </p:extLst>
   </p:cSld>
@@ -14964,8 +15338,8 @@
         </p:nvSpPr>
         <p:spPr>
           <a:xfrm>
-            <a:off x="1981200" y="382674"/>
-            <a:ext cx="8229600" cy="792145"/>
+            <a:off x="1981200" y="312337"/>
+            <a:ext cx="8229600" cy="715945"/>
           </a:xfrm>
         </p:spPr>
         <p:txBody>
@@ -14974,10 +15348,9 @@
           <a:p>
             <a:pPr algn="ctr"/>
             <a:r>
-              <a:rPr lang="en-US" dirty="0" err="1"/>
-              <a:t>Homeworks</a:t>
-            </a:r>
-            <a:endParaRPr lang="en-US" dirty="0"/>
+              <a:rPr lang="en-US" dirty="0"/>
+              <a:t>Quizzes</a:t>
+            </a:r>
           </a:p>
         </p:txBody>
       </p:sp>
@@ -14993,94 +15366,125 @@
         </p:nvSpPr>
         <p:spPr>
           <a:xfrm>
-            <a:off x="1502511" y="1523999"/>
-            <a:ext cx="9198985" cy="4724399"/>
+            <a:off x="1012263" y="1245995"/>
+            <a:ext cx="10221795" cy="5245239"/>
           </a:xfrm>
         </p:spPr>
         <p:txBody>
           <a:bodyPr>
-            <a:normAutofit/>
+            <a:normAutofit lnSpcReduction="10000"/>
           </a:bodyPr>
           <a:lstStyle/>
           <a:p>
-            <a:pPr algn="l"/>
-            <a:r>
-              <a:rPr lang="en-US" dirty="0"/>
-              <a:t>Each of the 5 modules has 1 or 2 </a:t>
-            </a:r>
-            <a:r>
-              <a:rPr lang="en-US" dirty="0" err="1"/>
-              <a:t>homeworks</a:t>
-            </a:r>
-            <a:r>
-              <a:rPr lang="en-US" dirty="0"/>
-              <a:t> associated (usually 1)</a:t>
-            </a:r>
-          </a:p>
-          <a:p>
-            <a:r>
-              <a:rPr lang="en-US" b="1" i="1" u="sng" dirty="0"/>
-              <a:t>Written HW</a:t>
+            <a:r>
+              <a:rPr lang="en-US" dirty="0"/>
+              <a:t>Medium size assessments of your knowledge in each module</a:t>
             </a:r>
           </a:p>
           <a:p>
             <a:pPr lvl="1"/>
             <a:r>
               <a:rPr lang="en-US" dirty="0"/>
-              <a:t>Solving small problems, analyzing runtimes, etc.</a:t>
+              <a:t>Meant to ensure you have knowledge of the individual topics from lecture to a sufficient degree.</a:t>
             </a:r>
           </a:p>
           <a:p>
             <a:pPr lvl="1"/>
             <a:r>
               <a:rPr lang="en-US" dirty="0"/>
-              <a:t>Writing proofs, etc.</a:t>
+              <a:t>Usually about two pages worth of traditional exam material.</a:t>
             </a:r>
           </a:p>
           <a:p>
             <a:pPr lvl="1"/>
             <a:r>
               <a:rPr lang="en-US" dirty="0"/>
-              <a:t>Written in Latex (tutorial on course webpage)</a:t>
+              <a:t>Are given over a three day period (more on next slide)</a:t>
+            </a:r>
+          </a:p>
+          <a:p>
+            <a:endParaRPr lang="en-US" dirty="0"/>
+          </a:p>
+          <a:p>
+            <a:r>
+              <a:rPr lang="en-US" dirty="0"/>
+              <a:t>Quiz Schedule (I wanted this to be similar / modeled after a midterm schedule)</a:t>
             </a:r>
           </a:p>
           <a:p>
             <a:pPr lvl="1"/>
             <a:r>
-              <a:rPr lang="en-US" i="1" dirty="0"/>
-              <a:t>These are meant to be challenging!</a:t>
-            </a:r>
-          </a:p>
-          <a:p>
-            <a:r>
-              <a:rPr lang="en-US" b="1" i="1" u="sng" dirty="0"/>
-              <a:t>Programming HW</a:t>
-            </a:r>
-            <a:r>
-              <a:rPr lang="en-US" dirty="0"/>
-              <a:t>:</a:t>
+              <a:rPr lang="en-US" sz="2000" dirty="0"/>
+              <a:t>Week 5 (9/21)	Mon-Tue-Wed			Mod 1</a:t>
             </a:r>
           </a:p>
           <a:p>
             <a:pPr lvl="1"/>
             <a:r>
               <a:rPr lang="en-US" dirty="0"/>
-              <a:t>Is written in Java</a:t>
-            </a:r>
-          </a:p>
-          <a:p>
-            <a:pPr lvl="1" algn="l"/>
-            <a:r>
-              <a:rPr lang="en-US" dirty="0"/>
-              <a:t>We won’t have many of these (probably just 1)</a:t>
-            </a:r>
+              <a:t>Week 8 (10/12)	Mon-Tue-Wed</a:t>
+            </a:r>
+            <a:r>
+              <a:rPr lang="en-US" sz="2000" dirty="0"/>
+              <a:t>			Mod </a:t>
+            </a:r>
+            <a:r>
+              <a:rPr lang="en-US" dirty="0"/>
+              <a:t>2</a:t>
+            </a:r>
+          </a:p>
+          <a:p>
+            <a:pPr lvl="1"/>
+            <a:r>
+              <a:rPr lang="en-US" dirty="0"/>
+              <a:t>Week 12 (11/9)	Mon-Tue-Wed</a:t>
+            </a:r>
+            <a:r>
+              <a:rPr lang="en-US" sz="2000" dirty="0"/>
+              <a:t>			Mod 3</a:t>
+            </a:r>
+          </a:p>
+          <a:p>
+            <a:pPr lvl="1"/>
+            <a:r>
+              <a:rPr lang="en-US" dirty="0"/>
+              <a:t>Week 15 (11/30)	Mon-Tue-Wed			Mod 4</a:t>
+            </a:r>
+            <a:endParaRPr lang="en-US" sz="2000" dirty="0"/>
+          </a:p>
+          <a:p>
+            <a:pPr lvl="1"/>
+            <a:r>
+              <a:rPr lang="en-US" dirty="0"/>
+              <a:t>TBD	</a:t>
+            </a:r>
+            <a:r>
+              <a:rPr lang="en-US" sz="2000" dirty="0"/>
+              <a:t>	</a:t>
+            </a:r>
+            <a:r>
+              <a:rPr lang="en-US" dirty="0"/>
+              <a:t>			</a:t>
+            </a:r>
+            <a:r>
+              <a:rPr lang="en-US" sz="2000" dirty="0"/>
+              <a:t>Final Exam Quiz, and optional 1-4 retakes</a:t>
+            </a:r>
+          </a:p>
+          <a:p>
+            <a:pPr lvl="1"/>
+            <a:endParaRPr lang="en-US" sz="2000" dirty="0"/>
+          </a:p>
+          <a:p>
+            <a:pPr lvl="1"/>
+            <a:endParaRPr lang="en-US" dirty="0"/>
           </a:p>
         </p:txBody>
       </p:sp>
     </p:spTree>
     <p:extLst>
       <p:ext uri="{BB962C8B-B14F-4D97-AF65-F5344CB8AC3E}">
-        <p14:creationId xmlns:p14="http://schemas.microsoft.com/office/powerpoint/2010/main" val="2802976195"/>
+        <p14:creationId xmlns:p14="http://schemas.microsoft.com/office/powerpoint/2010/main" val="1895514943"/>
       </p:ext>
     </p:extLst>
   </p:cSld>
@@ -15233,7 +15637,13 @@
   <p:cSld>
     <p:spTree>
       <p:nvGrpSpPr>
-        <p:cNvPr id="1" name=""/>
+        <p:cNvPr id="1" name="">
+          <a:extLst>
+            <a:ext uri="{FF2B5EF4-FFF2-40B4-BE49-F238E27FC236}">
+              <a16:creationId xmlns:a16="http://schemas.microsoft.com/office/drawing/2014/main" id="{0F9BA34F-733C-427E-8C20-4B9DDAB4EC46}"/>
+            </a:ext>
+          </a:extLst>
+        </p:cNvPr>
         <p:cNvGrpSpPr/>
         <p:nvPr/>
       </p:nvGrpSpPr>
@@ -15247,7 +15657,13 @@
       </p:grpSpPr>
       <p:sp>
         <p:nvSpPr>
-          <p:cNvPr id="12290" name="Rectangle 2"/>
+          <p:cNvPr id="12290" name="Rectangle 2">
+            <a:extLst>
+              <a:ext uri="{FF2B5EF4-FFF2-40B4-BE49-F238E27FC236}">
+                <a16:creationId xmlns:a16="http://schemas.microsoft.com/office/drawing/2014/main" id="{94BC5B71-1107-CFED-9845-9D0750FE7014}"/>
+              </a:ext>
+            </a:extLst>
+          </p:cNvPr>
           <p:cNvSpPr>
             <a:spLocks noGrp="1" noChangeArrowheads="1"/>
           </p:cNvSpPr>
@@ -15257,8 +15673,8 @@
         </p:nvSpPr>
         <p:spPr>
           <a:xfrm>
-            <a:off x="1981200" y="386862"/>
-            <a:ext cx="8229600" cy="768699"/>
+            <a:off x="1981200" y="312337"/>
+            <a:ext cx="8229600" cy="715945"/>
           </a:xfrm>
         </p:spPr>
         <p:txBody>
@@ -15268,14 +15684,20 @@
             <a:pPr algn="ctr"/>
             <a:r>
               <a:rPr lang="en-US" dirty="0"/>
-              <a:t>Homework Grades</a:t>
+              <a:t>Quizzes</a:t>
             </a:r>
           </a:p>
         </p:txBody>
       </p:sp>
       <p:sp>
         <p:nvSpPr>
-          <p:cNvPr id="12291" name="Rectangle 3"/>
+          <p:cNvPr id="12291" name="Rectangle 3">
+            <a:extLst>
+              <a:ext uri="{FF2B5EF4-FFF2-40B4-BE49-F238E27FC236}">
+                <a16:creationId xmlns:a16="http://schemas.microsoft.com/office/drawing/2014/main" id="{6BD24BF3-A13E-C38A-8FFC-0A4909976379}"/>
+              </a:ext>
+            </a:extLst>
+          </p:cNvPr>
           <p:cNvSpPr>
             <a:spLocks noGrp="1" noChangeArrowheads="1"/>
           </p:cNvSpPr>
@@ -15285,8 +15707,8 @@
         </p:nvSpPr>
         <p:spPr>
           <a:xfrm>
-            <a:off x="1524000" y="1406769"/>
-            <a:ext cx="9046139" cy="5070231"/>
+            <a:off x="1012263" y="1245995"/>
+            <a:ext cx="10221795" cy="5245239"/>
           </a:xfrm>
         </p:spPr>
         <p:txBody>
@@ -15296,72 +15718,80 @@
           <a:lstStyle/>
           <a:p>
             <a:r>
-              <a:rPr lang="en-US" dirty="0" err="1"/>
-              <a:t>Homeworks</a:t>
-            </a:r>
-            <a:r>
-              <a:rPr lang="en-US" dirty="0"/>
-              <a:t> will be graded on a traditional percentage scale:</a:t>
+              <a:rPr lang="en-US" dirty="0"/>
+              <a:t>Quizzes are administered at the </a:t>
+            </a:r>
+            <a:r>
+              <a:rPr lang="en-US" b="1" i="1" u="sng" dirty="0"/>
+              <a:t>Computer-Based Testing Facility</a:t>
+            </a:r>
+            <a:r>
+              <a:rPr lang="en-US" dirty="0"/>
+              <a:t> in Gilmer Hall.</a:t>
+            </a:r>
+          </a:p>
+          <a:p>
+            <a:endParaRPr lang="en-US" sz="2000" dirty="0"/>
+          </a:p>
+          <a:p>
+            <a:r>
+              <a:rPr lang="en-US" sz="2000" dirty="0"/>
+              <a:t>Pre-requisite:</a:t>
             </a:r>
           </a:p>
           <a:p>
             <a:pPr lvl="1"/>
             <a:r>
-              <a:rPr lang="en-US" b="1" i="1" u="sng" dirty="0"/>
-              <a:t>Out of 10 points (or similar)</a:t>
-            </a:r>
-            <a:endParaRPr lang="en-US" dirty="0"/>
+              <a:rPr lang="en-US" sz="1600" dirty="0"/>
+              <a:t>Everyone will need to create an account of Prairie Learn / Prairie Test, the online system we will be using</a:t>
+            </a:r>
           </a:p>
           <a:p>
             <a:pPr lvl="1"/>
-            <a:r>
-              <a:rPr lang="en-US" dirty="0"/>
-              <a:t>Regrades will be available (probably)</a:t>
-            </a:r>
-          </a:p>
-          <a:p>
-            <a:endParaRPr lang="en-US" dirty="0"/>
-          </a:p>
-          <a:p>
-            <a:r>
-              <a:rPr lang="en-US" b="1" i="1" u="sng" dirty="0"/>
-              <a:t>Deadlines</a:t>
-            </a:r>
-            <a:r>
-              <a:rPr lang="en-US" dirty="0"/>
-              <a:t>:</a:t>
+            <a:endParaRPr lang="en-US" sz="1600" dirty="0"/>
+          </a:p>
+          <a:p>
+            <a:r>
+              <a:rPr lang="en-US" sz="2000" dirty="0"/>
+              <a:t>During a Testing Week:</a:t>
             </a:r>
           </a:p>
           <a:p>
             <a:pPr lvl="1"/>
             <a:r>
-              <a:rPr lang="en-US" dirty="0"/>
-              <a:t>We will have </a:t>
-            </a:r>
-            <a:r>
-              <a:rPr lang="en-US" b="1" i="1" dirty="0"/>
-              <a:t>traditional homework deadlines</a:t>
-            </a:r>
-            <a:r>
-              <a:rPr lang="en-US" dirty="0"/>
-              <a:t>, however…</a:t>
+              <a:rPr lang="en-US" sz="1600" dirty="0"/>
+              <a:t>Before the testing period, you will login to Prairie Test to make a reservation for a specific time in the testing period</a:t>
             </a:r>
           </a:p>
           <a:p>
             <a:pPr lvl="1"/>
             <a:r>
-              <a:rPr lang="en-US" dirty="0"/>
-              <a:t>Anyone can fill out an online form to request a 5 day extension. Extensions will be granted for any reason as long as you articulate why you need extra time and when you plan to finish the homework by.</a:t>
+              <a:rPr lang="en-US" sz="1600" dirty="0"/>
+              <a:t>When your time arrives, you will arrive at the testing center to take your exam and take the quiz on the computer</a:t>
             </a:r>
           </a:p>
           <a:p>
             <a:pPr lvl="1"/>
             <a:r>
-              <a:rPr lang="en-US" dirty="0"/>
-              <a:t>NO submissions beyond this already generous 5 day window for any reason. That window IS your flexibility should anything arise.</a:t>
-            </a:r>
-          </a:p>
-          <a:p>
+              <a:rPr lang="en-US" sz="1600" dirty="0"/>
+              <a:t>Once everyone has taken a quiz, the scores will be released to everybody</a:t>
+            </a:r>
+          </a:p>
+          <a:p>
+            <a:endParaRPr lang="en-US" sz="2000" dirty="0"/>
+          </a:p>
+          <a:p>
+            <a:r>
+              <a:rPr lang="en-US" sz="2000" dirty="0"/>
+              <a:t>There will be a Practice Test within the first couple of weeks of the semester to ensure everybody knows the process, etc.</a:t>
+            </a:r>
+          </a:p>
+          <a:p>
+            <a:pPr lvl="1"/>
+            <a:endParaRPr lang="en-US" sz="2000" dirty="0"/>
+          </a:p>
+          <a:p>
+            <a:pPr lvl="1"/>
             <a:endParaRPr lang="en-US" dirty="0"/>
           </a:p>
         </p:txBody>
@@ -15369,7 +15799,7 @@
     </p:spTree>
     <p:extLst>
       <p:ext uri="{BB962C8B-B14F-4D97-AF65-F5344CB8AC3E}">
-        <p14:creationId xmlns:p14="http://schemas.microsoft.com/office/powerpoint/2010/main" val="3112164517"/>
+        <p14:creationId xmlns:p14="http://schemas.microsoft.com/office/powerpoint/2010/main" val="375293740"/>
       </p:ext>
     </p:extLst>
   </p:cSld>
@@ -15408,8 +15838,8 @@
         </p:nvSpPr>
         <p:spPr>
           <a:xfrm>
-            <a:off x="1778558" y="398586"/>
-            <a:ext cx="8432242" cy="886890"/>
+            <a:off x="1981200" y="381000"/>
+            <a:ext cx="8229600" cy="944545"/>
           </a:xfrm>
         </p:spPr>
         <p:txBody>
@@ -15419,7 +15849,7 @@
             <a:pPr algn="ctr"/>
             <a:r>
               <a:rPr lang="en-US" dirty="0"/>
-              <a:t>Homework Collaboration</a:t>
+              <a:t>Quizzes</a:t>
             </a:r>
           </a:p>
         </p:txBody>
@@ -15436,8 +15866,8 @@
         </p:nvSpPr>
         <p:spPr>
           <a:xfrm>
-            <a:off x="1600200" y="1643027"/>
-            <a:ext cx="8969939" cy="4599511"/>
+            <a:off x="1391978" y="1539892"/>
+            <a:ext cx="9470290" cy="4525944"/>
           </a:xfrm>
         </p:spPr>
         <p:txBody>
@@ -15448,29 +15878,14 @@
           <a:p>
             <a:r>
               <a:rPr lang="en-US" dirty="0"/>
-              <a:t>You may work in groups of up to 3 on written assignments</a:t>
+              <a:t>You always receive the highest grade over your attempts (e.g., final exam retakes</a:t>
             </a:r>
           </a:p>
           <a:p>
             <a:pPr lvl="1"/>
             <a:r>
               <a:rPr lang="en-US" dirty="0"/>
-              <a:t>This is most of the assignments</a:t>
-            </a:r>
-          </a:p>
-          <a:p>
-            <a:pPr lvl="1"/>
-            <a:r>
-              <a:rPr lang="en-US" dirty="0"/>
-              <a:t>Once submission per group is fine. </a:t>
-            </a:r>
-            <a:r>
-              <a:rPr lang="en-US" dirty="0" err="1"/>
-              <a:t>Gradescope</a:t>
-            </a:r>
-            <a:r>
-              <a:rPr lang="en-US" dirty="0"/>
-              <a:t> supports this quite easily.</a:t>
+              <a:t>E.g., if you receive a 16/20 during midterm, and 13/20 during retake you still earn the 16/20 on that quiz.</a:t>
             </a:r>
           </a:p>
           <a:p>
@@ -15480,18 +15895,15 @@
           <a:p>
             <a:r>
               <a:rPr lang="en-US" dirty="0"/>
-              <a:t>On programming assignments (currently, just 1) you are expected to work independently.</a:t>
-            </a:r>
-          </a:p>
-          <a:p>
-            <a:endParaRPr lang="en-US" dirty="0"/>
+              <a:t>You should always prioritize retaking quizzes with the lowest grades (somewhat obvious).</a:t>
+            </a:r>
           </a:p>
         </p:txBody>
       </p:sp>
     </p:spTree>
     <p:extLst>
       <p:ext uri="{BB962C8B-B14F-4D97-AF65-F5344CB8AC3E}">
-        <p14:creationId xmlns:p14="http://schemas.microsoft.com/office/powerpoint/2010/main" val="3237934718"/>
+        <p14:creationId xmlns:p14="http://schemas.microsoft.com/office/powerpoint/2010/main" val="2940204379"/>
       </p:ext>
     </p:extLst>
   </p:cSld>
@@ -15502,6 +15914,450 @@
 </file>
 
 <file path=ppt/slides/slide22.xml><?xml version="1.0" encoding="utf-8"?>
+<p:sld xmlns:a="http://schemas.openxmlformats.org/drawingml/2006/main" xmlns:r="http://schemas.openxmlformats.org/officeDocument/2006/relationships" xmlns:p="http://schemas.openxmlformats.org/presentationml/2006/main">
+  <p:cSld>
+    <p:spTree>
+      <p:nvGrpSpPr>
+        <p:cNvPr id="1" name=""/>
+        <p:cNvGrpSpPr/>
+        <p:nvPr/>
+      </p:nvGrpSpPr>
+      <p:grpSpPr>
+        <a:xfrm>
+          <a:off x="0" y="0"/>
+          <a:ext cx="0" cy="0"/>
+          <a:chOff x="0" y="0"/>
+          <a:chExt cx="0" cy="0"/>
+        </a:xfrm>
+      </p:grpSpPr>
+      <p:sp>
+        <p:nvSpPr>
+          <p:cNvPr id="18434" name="Title 1"/>
+          <p:cNvSpPr>
+            <a:spLocks noGrp="1"/>
+          </p:cNvSpPr>
+          <p:nvPr>
+            <p:ph type="title"/>
+          </p:nvPr>
+        </p:nvSpPr>
+        <p:spPr>
+          <a:xfrm>
+            <a:off x="1141413" y="357262"/>
+            <a:ext cx="9905998" cy="707027"/>
+          </a:xfrm>
+        </p:spPr>
+        <p:txBody>
+          <a:bodyPr/>
+          <a:lstStyle/>
+          <a:p>
+            <a:pPr algn="ctr"/>
+            <a:r>
+              <a:rPr lang="en-US" dirty="0"/>
+              <a:t>Final Exam</a:t>
+            </a:r>
+          </a:p>
+        </p:txBody>
+      </p:sp>
+      <p:sp>
+        <p:nvSpPr>
+          <p:cNvPr id="18435" name="Content Placeholder 2"/>
+          <p:cNvSpPr>
+            <a:spLocks noGrp="1"/>
+          </p:cNvSpPr>
+          <p:nvPr>
+            <p:ph idx="1"/>
+          </p:nvPr>
+        </p:nvSpPr>
+        <p:spPr>
+          <a:xfrm>
+            <a:off x="1743670" y="1524000"/>
+            <a:ext cx="8826469" cy="4525944"/>
+          </a:xfrm>
+        </p:spPr>
+        <p:txBody>
+          <a:bodyPr>
+            <a:normAutofit lnSpcReduction="10000"/>
+          </a:bodyPr>
+          <a:lstStyle/>
+          <a:p>
+            <a:pPr algn="l"/>
+            <a:r>
+              <a:rPr lang="en-US" dirty="0"/>
+              <a:t>Our final exam time will be used to:</a:t>
+            </a:r>
+          </a:p>
+          <a:p>
+            <a:pPr lvl="1" algn="l"/>
+            <a:r>
+              <a:rPr lang="en-US" dirty="0"/>
+              <a:t>Take the </a:t>
+            </a:r>
+            <a:r>
+              <a:rPr lang="en-US" b="1" i="1" u="sng" dirty="0"/>
+              <a:t>Final Exam Quiz</a:t>
+            </a:r>
+            <a:r>
+              <a:rPr lang="en-US" dirty="0"/>
+              <a:t> (Only attempt by design)</a:t>
+            </a:r>
+          </a:p>
+          <a:p>
+            <a:pPr lvl="1" algn="l"/>
+            <a:r>
+              <a:rPr lang="en-US" b="1" dirty="0"/>
+              <a:t>OPTIONAL</a:t>
+            </a:r>
+            <a:r>
+              <a:rPr lang="en-US" dirty="0"/>
+              <a:t>: Retake </a:t>
+            </a:r>
+            <a:r>
+              <a:rPr lang="en-US" b="1" i="1" u="sng" dirty="0"/>
+              <a:t>up to three of quizzes 1-4</a:t>
+            </a:r>
+            <a:endParaRPr lang="en-US" dirty="0"/>
+          </a:p>
+          <a:p>
+            <a:pPr lvl="1" algn="l"/>
+            <a:endParaRPr lang="en-US" b="1" i="1" u="sng" dirty="0"/>
+          </a:p>
+          <a:p>
+            <a:r>
+              <a:rPr lang="en-US" dirty="0"/>
+              <a:t>You can attempt all four retakes if you want, but the exams are designed for there to be enough time to do two (maybe three) retakes.</a:t>
+            </a:r>
+          </a:p>
+          <a:p>
+            <a:endParaRPr lang="en-US" dirty="0"/>
+          </a:p>
+          <a:p>
+            <a:r>
+              <a:rPr lang="en-US" dirty="0"/>
+              <a:t>I still need to figure out how to administer this properly at the CBTF, but I’m confident that I have a plan/way to do so.</a:t>
+            </a:r>
+          </a:p>
+        </p:txBody>
+      </p:sp>
+    </p:spTree>
+    <p:extLst>
+      <p:ext uri="{BB962C8B-B14F-4D97-AF65-F5344CB8AC3E}">
+        <p14:creationId xmlns:p14="http://schemas.microsoft.com/office/powerpoint/2010/main" val="1095264303"/>
+      </p:ext>
+    </p:extLst>
+  </p:cSld>
+  <p:clrMapOvr>
+    <a:masterClrMapping/>
+  </p:clrMapOvr>
+</p:sld>
+</file>
+
+<file path=ppt/slides/slide23.xml><?xml version="1.0" encoding="utf-8"?>
+<p:sld xmlns:a="http://schemas.openxmlformats.org/drawingml/2006/main" xmlns:r="http://schemas.openxmlformats.org/officeDocument/2006/relationships" xmlns:p="http://schemas.openxmlformats.org/presentationml/2006/main">
+  <p:cSld>
+    <p:spTree>
+      <p:nvGrpSpPr>
+        <p:cNvPr id="1" name=""/>
+        <p:cNvGrpSpPr/>
+        <p:nvPr/>
+      </p:nvGrpSpPr>
+      <p:grpSpPr>
+        <a:xfrm>
+          <a:off x="0" y="0"/>
+          <a:ext cx="0" cy="0"/>
+          <a:chOff x="0" y="0"/>
+          <a:chExt cx="0" cy="0"/>
+        </a:xfrm>
+      </p:grpSpPr>
+      <p:sp>
+        <p:nvSpPr>
+          <p:cNvPr id="12290" name="Rectangle 2"/>
+          <p:cNvSpPr>
+            <a:spLocks noGrp="1" noChangeArrowheads="1"/>
+          </p:cNvSpPr>
+          <p:nvPr>
+            <p:ph type="title"/>
+          </p:nvPr>
+        </p:nvSpPr>
+        <p:spPr>
+          <a:xfrm>
+            <a:off x="1981200" y="382674"/>
+            <a:ext cx="8229600" cy="792145"/>
+          </a:xfrm>
+        </p:spPr>
+        <p:txBody>
+          <a:bodyPr/>
+          <a:lstStyle/>
+          <a:p>
+            <a:pPr algn="ctr"/>
+            <a:r>
+              <a:rPr lang="en-US" dirty="0" err="1"/>
+              <a:t>Homeworks</a:t>
+            </a:r>
+            <a:endParaRPr lang="en-US" dirty="0"/>
+          </a:p>
+        </p:txBody>
+      </p:sp>
+      <p:sp>
+        <p:nvSpPr>
+          <p:cNvPr id="12291" name="Rectangle 3"/>
+          <p:cNvSpPr>
+            <a:spLocks noGrp="1" noChangeArrowheads="1"/>
+          </p:cNvSpPr>
+          <p:nvPr>
+            <p:ph idx="1"/>
+          </p:nvPr>
+        </p:nvSpPr>
+        <p:spPr>
+          <a:xfrm>
+            <a:off x="1502511" y="1523999"/>
+            <a:ext cx="9198985" cy="4724399"/>
+          </a:xfrm>
+        </p:spPr>
+        <p:txBody>
+          <a:bodyPr>
+            <a:normAutofit/>
+          </a:bodyPr>
+          <a:lstStyle/>
+          <a:p>
+            <a:pPr algn="l"/>
+            <a:r>
+              <a:rPr lang="en-US" dirty="0"/>
+              <a:t>Each of the modules has 1 or 2 </a:t>
+            </a:r>
+            <a:r>
+              <a:rPr lang="en-US" dirty="0" err="1"/>
+              <a:t>homeworks</a:t>
+            </a:r>
+            <a:r>
+              <a:rPr lang="en-US" dirty="0"/>
+              <a:t> associated (usually 1)</a:t>
+            </a:r>
+          </a:p>
+          <a:p>
+            <a:r>
+              <a:rPr lang="en-US" b="1" i="1" u="sng" dirty="0"/>
+              <a:t>Written HW</a:t>
+            </a:r>
+          </a:p>
+          <a:p>
+            <a:pPr lvl="1"/>
+            <a:r>
+              <a:rPr lang="en-US" dirty="0"/>
+              <a:t>Solving small problems, analyzing runtimes, etc.</a:t>
+            </a:r>
+          </a:p>
+          <a:p>
+            <a:pPr lvl="1"/>
+            <a:r>
+              <a:rPr lang="en-US" dirty="0"/>
+              <a:t>Writing proofs, etc.</a:t>
+            </a:r>
+          </a:p>
+          <a:p>
+            <a:pPr lvl="1"/>
+            <a:r>
+              <a:rPr lang="en-US" dirty="0"/>
+              <a:t>Written in Latex (tutorial on course webpage)</a:t>
+            </a:r>
+          </a:p>
+          <a:p>
+            <a:pPr lvl="1"/>
+            <a:r>
+              <a:rPr lang="en-US" i="1" dirty="0"/>
+              <a:t>These are meant to be challenging!</a:t>
+            </a:r>
+          </a:p>
+          <a:p>
+            <a:r>
+              <a:rPr lang="en-US" b="1" i="1" u="sng" dirty="0"/>
+              <a:t>Programming HW</a:t>
+            </a:r>
+            <a:r>
+              <a:rPr lang="en-US" dirty="0"/>
+              <a:t>:</a:t>
+            </a:r>
+          </a:p>
+          <a:p>
+            <a:pPr lvl="1"/>
+            <a:r>
+              <a:rPr lang="en-US" dirty="0"/>
+              <a:t>Is written in Java</a:t>
+            </a:r>
+          </a:p>
+          <a:p>
+            <a:pPr lvl="1" algn="l"/>
+            <a:r>
+              <a:rPr lang="en-US" dirty="0"/>
+              <a:t>We won’t have many of these (probably just 1)</a:t>
+            </a:r>
+          </a:p>
+        </p:txBody>
+      </p:sp>
+    </p:spTree>
+    <p:extLst>
+      <p:ext uri="{BB962C8B-B14F-4D97-AF65-F5344CB8AC3E}">
+        <p14:creationId xmlns:p14="http://schemas.microsoft.com/office/powerpoint/2010/main" val="2802976195"/>
+      </p:ext>
+    </p:extLst>
+  </p:cSld>
+  <p:clrMapOvr>
+    <a:masterClrMapping/>
+  </p:clrMapOvr>
+</p:sld>
+</file>
+
+<file path=ppt/slides/slide24.xml><?xml version="1.0" encoding="utf-8"?>
+<p:sld xmlns:a="http://schemas.openxmlformats.org/drawingml/2006/main" xmlns:r="http://schemas.openxmlformats.org/officeDocument/2006/relationships" xmlns:p="http://schemas.openxmlformats.org/presentationml/2006/main">
+  <p:cSld>
+    <p:spTree>
+      <p:nvGrpSpPr>
+        <p:cNvPr id="1" name=""/>
+        <p:cNvGrpSpPr/>
+        <p:nvPr/>
+      </p:nvGrpSpPr>
+      <p:grpSpPr>
+        <a:xfrm>
+          <a:off x="0" y="0"/>
+          <a:ext cx="0" cy="0"/>
+          <a:chOff x="0" y="0"/>
+          <a:chExt cx="0" cy="0"/>
+        </a:xfrm>
+      </p:grpSpPr>
+      <p:sp>
+        <p:nvSpPr>
+          <p:cNvPr id="12290" name="Rectangle 2"/>
+          <p:cNvSpPr>
+            <a:spLocks noGrp="1" noChangeArrowheads="1"/>
+          </p:cNvSpPr>
+          <p:nvPr>
+            <p:ph type="title"/>
+          </p:nvPr>
+        </p:nvSpPr>
+        <p:spPr>
+          <a:xfrm>
+            <a:off x="1981200" y="386862"/>
+            <a:ext cx="8229600" cy="768699"/>
+          </a:xfrm>
+        </p:spPr>
+        <p:txBody>
+          <a:bodyPr/>
+          <a:lstStyle/>
+          <a:p>
+            <a:pPr algn="ctr"/>
+            <a:r>
+              <a:rPr lang="en-US" dirty="0"/>
+              <a:t>Homework Grades</a:t>
+            </a:r>
+          </a:p>
+        </p:txBody>
+      </p:sp>
+      <p:sp>
+        <p:nvSpPr>
+          <p:cNvPr id="12291" name="Rectangle 3"/>
+          <p:cNvSpPr>
+            <a:spLocks noGrp="1" noChangeArrowheads="1"/>
+          </p:cNvSpPr>
+          <p:nvPr>
+            <p:ph idx="1"/>
+          </p:nvPr>
+        </p:nvSpPr>
+        <p:spPr>
+          <a:xfrm>
+            <a:off x="1524000" y="1406769"/>
+            <a:ext cx="9046139" cy="5070231"/>
+          </a:xfrm>
+        </p:spPr>
+        <p:txBody>
+          <a:bodyPr>
+            <a:normAutofit/>
+          </a:bodyPr>
+          <a:lstStyle/>
+          <a:p>
+            <a:r>
+              <a:rPr lang="en-US" dirty="0" err="1"/>
+              <a:t>Homeworks</a:t>
+            </a:r>
+            <a:r>
+              <a:rPr lang="en-US" dirty="0"/>
+              <a:t> will be graded on a traditional percentage scale:</a:t>
+            </a:r>
+          </a:p>
+          <a:p>
+            <a:pPr lvl="1"/>
+            <a:r>
+              <a:rPr lang="en-US" b="1" i="1" u="sng" dirty="0"/>
+              <a:t>Out of 10 points (or similar)</a:t>
+            </a:r>
+            <a:endParaRPr lang="en-US" dirty="0"/>
+          </a:p>
+          <a:p>
+            <a:pPr lvl="1"/>
+            <a:r>
+              <a:rPr lang="en-US" dirty="0"/>
+              <a:t>Regrades will be available (probably)</a:t>
+            </a:r>
+          </a:p>
+          <a:p>
+            <a:endParaRPr lang="en-US" dirty="0"/>
+          </a:p>
+          <a:p>
+            <a:r>
+              <a:rPr lang="en-US" b="1" i="1" u="sng" dirty="0"/>
+              <a:t>Deadlines</a:t>
+            </a:r>
+            <a:r>
+              <a:rPr lang="en-US" dirty="0"/>
+              <a:t>:</a:t>
+            </a:r>
+          </a:p>
+          <a:p>
+            <a:pPr lvl="1"/>
+            <a:r>
+              <a:rPr lang="en-US" dirty="0"/>
+              <a:t>We will have </a:t>
+            </a:r>
+            <a:r>
+              <a:rPr lang="en-US" b="1" i="1" dirty="0"/>
+              <a:t>traditional homework deadlines</a:t>
+            </a:r>
+            <a:r>
+              <a:rPr lang="en-US" dirty="0"/>
+              <a:t>, however…</a:t>
+            </a:r>
+          </a:p>
+          <a:p>
+            <a:pPr lvl="1"/>
+            <a:r>
+              <a:rPr lang="en-US" dirty="0"/>
+              <a:t>Anyone can fill out an online form to request a 5 day extension. Extensions will be granted for any reason as long as you articulate why you need extra time and when you plan to finish the homework by.</a:t>
+            </a:r>
+          </a:p>
+          <a:p>
+            <a:pPr lvl="1"/>
+            <a:r>
+              <a:rPr lang="en-US" dirty="0"/>
+              <a:t>NO submissions beyond this already generous 5 day window for any reason. That window IS your flexibility should anything arise.</a:t>
+            </a:r>
+          </a:p>
+          <a:p>
+            <a:endParaRPr lang="en-US" dirty="0"/>
+          </a:p>
+        </p:txBody>
+      </p:sp>
+    </p:spTree>
+    <p:extLst>
+      <p:ext uri="{BB962C8B-B14F-4D97-AF65-F5344CB8AC3E}">
+        <p14:creationId xmlns:p14="http://schemas.microsoft.com/office/powerpoint/2010/main" val="3112164517"/>
+      </p:ext>
+    </p:extLst>
+  </p:cSld>
+  <p:clrMapOvr>
+    <a:masterClrMapping/>
+  </p:clrMapOvr>
+</p:sld>
+</file>
+
+<file path=ppt/slides/slide25.xml><?xml version="1.0" encoding="utf-8"?>
 <p:sld xmlns:a="http://schemas.openxmlformats.org/drawingml/2006/main" xmlns:r="http://schemas.openxmlformats.org/officeDocument/2006/relationships" xmlns:p="http://schemas.openxmlformats.org/presentationml/2006/main">
   <p:cSld>
     <p:spTree>
@@ -15541,7 +16397,7 @@
             <a:pPr algn="ctr"/>
             <a:r>
               <a:rPr lang="en-US" dirty="0"/>
-              <a:t>Homework Grade Philosophy</a:t>
+              <a:t>Homework Collaboration</a:t>
             </a:r>
           </a:p>
         </p:txBody>
@@ -15558,7 +16414,7 @@
         </p:nvSpPr>
         <p:spPr>
           <a:xfrm>
-            <a:off x="1600200" y="1572689"/>
+            <a:off x="1600200" y="1643027"/>
             <a:ext cx="8969939" cy="4599511"/>
           </a:xfrm>
         </p:spPr>
@@ -15570,45 +16426,39 @@
           <a:p>
             <a:r>
               <a:rPr lang="en-US" dirty="0"/>
-              <a:t>The purpose of homework is to PRACTICE!</a:t>
-            </a:r>
-          </a:p>
-          <a:p>
+              <a:t>You may work in groups of up to 3 on written assignments</a:t>
+            </a:r>
+          </a:p>
+          <a:p>
+            <a:pPr lvl="1"/>
+            <a:r>
+              <a:rPr lang="en-US" dirty="0"/>
+              <a:t>This is most of the assignments</a:t>
+            </a:r>
+          </a:p>
+          <a:p>
+            <a:pPr lvl="1"/>
+            <a:r>
+              <a:rPr lang="en-US" dirty="0"/>
+              <a:t>Once submission per group is fine. </a:t>
+            </a:r>
+            <a:r>
+              <a:rPr lang="en-US" dirty="0" err="1"/>
+              <a:t>Gradescope</a:t>
+            </a:r>
+            <a:r>
+              <a:rPr lang="en-US" dirty="0"/>
+              <a:t> supports this quite easily.</a:t>
+            </a:r>
+          </a:p>
+          <a:p>
+            <a:pPr lvl="1"/>
             <a:endParaRPr lang="en-US" dirty="0"/>
           </a:p>
           <a:p>
             <a:r>
               <a:rPr lang="en-US" dirty="0"/>
-              <a:t>I want you to:</a:t>
-            </a:r>
-          </a:p>
-          <a:p>
-            <a:pPr lvl="1"/>
-            <a:r>
-              <a:rPr lang="en-US" dirty="0"/>
-              <a:t>Attempt every problem on your own</a:t>
-            </a:r>
-          </a:p>
-          <a:p>
-            <a:pPr lvl="1"/>
-            <a:r>
-              <a:rPr lang="en-US" dirty="0"/>
-              <a:t>Then work with your group to get the solutions figured out</a:t>
-            </a:r>
-          </a:p>
-          <a:p>
-            <a:pPr lvl="1"/>
-            <a:r>
-              <a:rPr lang="en-US" dirty="0"/>
-              <a:t>Study the solutions for </a:t>
-            </a:r>
-            <a:r>
-              <a:rPr lang="en-US" dirty="0" err="1"/>
-              <a:t>homeworks</a:t>
-            </a:r>
-            <a:r>
-              <a:rPr lang="en-US" dirty="0"/>
-              <a:t> (these homework problems WILL appear on quizzes).</a:t>
+              <a:t>On programming assignments (currently, just 1) you are expected to work independently.</a:t>
             </a:r>
           </a:p>
           <a:p>
@@ -15619,339 +16469,7 @@
     </p:spTree>
     <p:extLst>
       <p:ext uri="{BB962C8B-B14F-4D97-AF65-F5344CB8AC3E}">
-        <p14:creationId xmlns:p14="http://schemas.microsoft.com/office/powerpoint/2010/main" val="3014866706"/>
-      </p:ext>
-    </p:extLst>
-  </p:cSld>
-  <p:clrMapOvr>
-    <a:masterClrMapping/>
-  </p:clrMapOvr>
-</p:sld>
-</file>
-
-<file path=ppt/slides/slide23.xml><?xml version="1.0" encoding="utf-8"?>
-<p:sld xmlns:a="http://schemas.openxmlformats.org/drawingml/2006/main" xmlns:r="http://schemas.openxmlformats.org/officeDocument/2006/relationships" xmlns:p="http://schemas.openxmlformats.org/presentationml/2006/main">
-  <p:cSld>
-    <p:spTree>
-      <p:nvGrpSpPr>
-        <p:cNvPr id="1" name=""/>
-        <p:cNvGrpSpPr/>
-        <p:nvPr/>
-      </p:nvGrpSpPr>
-      <p:grpSpPr>
-        <a:xfrm>
-          <a:off x="0" y="0"/>
-          <a:ext cx="0" cy="0"/>
-          <a:chOff x="0" y="0"/>
-          <a:chExt cx="0" cy="0"/>
-        </a:xfrm>
-      </p:grpSpPr>
-      <p:sp>
-        <p:nvSpPr>
-          <p:cNvPr id="18434" name="Title 1"/>
-          <p:cNvSpPr>
-            <a:spLocks noGrp="1"/>
-          </p:cNvSpPr>
-          <p:nvPr>
-            <p:ph type="title"/>
-          </p:nvPr>
-        </p:nvSpPr>
-        <p:spPr>
-          <a:xfrm>
-            <a:off x="1998858" y="327866"/>
-            <a:ext cx="7958331" cy="887986"/>
-          </a:xfrm>
-        </p:spPr>
-        <p:txBody>
-          <a:bodyPr/>
-          <a:lstStyle/>
-          <a:p>
-            <a:pPr algn="ctr"/>
-            <a:r>
-              <a:rPr lang="en-US" dirty="0"/>
-              <a:t>Grading Overview</a:t>
-            </a:r>
-          </a:p>
-        </p:txBody>
-      </p:sp>
-      <p:sp>
-        <p:nvSpPr>
-          <p:cNvPr id="3" name="Content Placeholder 2">
-            <a:extLst>
-              <a:ext uri="{FF2B5EF4-FFF2-40B4-BE49-F238E27FC236}">
-                <a16:creationId xmlns:a16="http://schemas.microsoft.com/office/drawing/2014/main" id="{267DFEF5-BEAA-974F-B91B-2D8B6E94C721}"/>
-              </a:ext>
-            </a:extLst>
-          </p:cNvPr>
-          <p:cNvSpPr>
-            <a:spLocks noGrp="1"/>
-          </p:cNvSpPr>
-          <p:nvPr>
-            <p:ph idx="1"/>
-          </p:nvPr>
-        </p:nvSpPr>
-        <p:spPr>
-          <a:xfrm>
-            <a:off x="1577591" y="1526633"/>
-            <a:ext cx="8601389" cy="4950367"/>
-          </a:xfrm>
-        </p:spPr>
-        <p:txBody>
-          <a:bodyPr>
-            <a:normAutofit/>
-          </a:bodyPr>
-          <a:lstStyle/>
-          <a:p>
-            <a:r>
-              <a:rPr lang="en-US" dirty="0"/>
-              <a:t>Final letter grade will be a weighted average:</a:t>
-            </a:r>
-          </a:p>
-          <a:p>
-            <a:endParaRPr lang="en-US" dirty="0"/>
-          </a:p>
-          <a:p>
-            <a:r>
-              <a:rPr lang="en-US" b="1" i="1" u="sng" dirty="0"/>
-              <a:t>Homework</a:t>
-            </a:r>
-            <a:r>
-              <a:rPr lang="en-US" dirty="0"/>
-              <a:t>: 25 percent (split over about 6 or 7 </a:t>
-            </a:r>
-            <a:r>
-              <a:rPr lang="en-US" dirty="0" err="1"/>
-              <a:t>homeworks</a:t>
-            </a:r>
-            <a:r>
-              <a:rPr lang="en-US" dirty="0"/>
-              <a:t>)</a:t>
-            </a:r>
-          </a:p>
-          <a:p>
-            <a:r>
-              <a:rPr lang="en-US" b="1" i="1" u="sng" dirty="0"/>
-              <a:t>Quizzes (Mods 1-5)</a:t>
-            </a:r>
-            <a:r>
-              <a:rPr lang="en-US" dirty="0"/>
-              <a:t>: 60 percent (12 percent each)</a:t>
-            </a:r>
-          </a:p>
-          <a:p>
-            <a:r>
-              <a:rPr lang="en-US" b="1" i="1" u="sng" dirty="0"/>
-              <a:t>Final Exam Quiz</a:t>
-            </a:r>
-            <a:r>
-              <a:rPr lang="en-US" dirty="0"/>
-              <a:t>: 15 percent</a:t>
-            </a:r>
-          </a:p>
-        </p:txBody>
-      </p:sp>
-    </p:spTree>
-    <p:extLst>
-      <p:ext uri="{BB962C8B-B14F-4D97-AF65-F5344CB8AC3E}">
-        <p14:creationId xmlns:p14="http://schemas.microsoft.com/office/powerpoint/2010/main" val="160555418"/>
-      </p:ext>
-    </p:extLst>
-  </p:cSld>
-  <p:clrMapOvr>
-    <a:masterClrMapping/>
-  </p:clrMapOvr>
-</p:sld>
-</file>
-
-<file path=ppt/slides/slide24.xml><?xml version="1.0" encoding="utf-8"?>
-<p:sld xmlns:a="http://schemas.openxmlformats.org/drawingml/2006/main" xmlns:r="http://schemas.openxmlformats.org/officeDocument/2006/relationships" xmlns:p="http://schemas.openxmlformats.org/presentationml/2006/main">
-  <p:cSld>
-    <p:spTree>
-      <p:nvGrpSpPr>
-        <p:cNvPr id="1" name=""/>
-        <p:cNvGrpSpPr/>
-        <p:nvPr/>
-      </p:nvGrpSpPr>
-      <p:grpSpPr>
-        <a:xfrm>
-          <a:off x="0" y="0"/>
-          <a:ext cx="0" cy="0"/>
-          <a:chOff x="0" y="0"/>
-          <a:chExt cx="0" cy="0"/>
-        </a:xfrm>
-      </p:grpSpPr>
-      <p:sp>
-        <p:nvSpPr>
-          <p:cNvPr id="18434" name="Title 1"/>
-          <p:cNvSpPr>
-            <a:spLocks noGrp="1"/>
-          </p:cNvSpPr>
-          <p:nvPr>
-            <p:ph type="title"/>
-          </p:nvPr>
-        </p:nvSpPr>
-        <p:spPr>
-          <a:xfrm>
-            <a:off x="1141413" y="497938"/>
-            <a:ext cx="9905998" cy="969122"/>
-          </a:xfrm>
-        </p:spPr>
-        <p:txBody>
-          <a:bodyPr/>
-          <a:lstStyle/>
-          <a:p>
-            <a:pPr algn="ctr"/>
-            <a:r>
-              <a:rPr lang="en-US" dirty="0"/>
-              <a:t>Office Hours</a:t>
-            </a:r>
-          </a:p>
-        </p:txBody>
-      </p:sp>
-      <p:sp>
-        <p:nvSpPr>
-          <p:cNvPr id="18435" name="Content Placeholder 2"/>
-          <p:cNvSpPr>
-            <a:spLocks noGrp="1"/>
-          </p:cNvSpPr>
-          <p:nvPr>
-            <p:ph idx="1"/>
-          </p:nvPr>
-        </p:nvSpPr>
-        <p:spPr/>
-        <p:txBody>
-          <a:bodyPr>
-            <a:normAutofit/>
-          </a:bodyPr>
-          <a:lstStyle/>
-          <a:p>
-            <a:pPr algn="l"/>
-            <a:r>
-              <a:rPr lang="en-US" dirty="0"/>
-              <a:t>Let’s discuss office hours by looking at the course website.</a:t>
-            </a:r>
-          </a:p>
-        </p:txBody>
-      </p:sp>
-    </p:spTree>
-    <p:extLst>
-      <p:ext uri="{BB962C8B-B14F-4D97-AF65-F5344CB8AC3E}">
-        <p14:creationId xmlns:p14="http://schemas.microsoft.com/office/powerpoint/2010/main" val="3481522597"/>
-      </p:ext>
-    </p:extLst>
-  </p:cSld>
-  <p:clrMapOvr>
-    <a:masterClrMapping/>
-  </p:clrMapOvr>
-</p:sld>
-</file>
-
-<file path=ppt/slides/slide25.xml><?xml version="1.0" encoding="utf-8"?>
-<p:sld xmlns:a="http://schemas.openxmlformats.org/drawingml/2006/main" xmlns:r="http://schemas.openxmlformats.org/officeDocument/2006/relationships" xmlns:p="http://schemas.openxmlformats.org/presentationml/2006/main">
-  <p:cSld>
-    <p:spTree>
-      <p:nvGrpSpPr>
-        <p:cNvPr id="1" name=""/>
-        <p:cNvGrpSpPr/>
-        <p:nvPr/>
-      </p:nvGrpSpPr>
-      <p:grpSpPr>
-        <a:xfrm>
-          <a:off x="0" y="0"/>
-          <a:ext cx="0" cy="0"/>
-          <a:chOff x="0" y="0"/>
-          <a:chExt cx="0" cy="0"/>
-        </a:xfrm>
-      </p:grpSpPr>
-      <p:sp>
-        <p:nvSpPr>
-          <p:cNvPr id="17410" name="Title 1"/>
-          <p:cNvSpPr>
-            <a:spLocks noGrp="1"/>
-          </p:cNvSpPr>
-          <p:nvPr>
-            <p:ph type="title"/>
-          </p:nvPr>
-        </p:nvSpPr>
-        <p:spPr>
-          <a:xfrm>
-            <a:off x="1141413" y="457745"/>
-            <a:ext cx="9905998" cy="874078"/>
-          </a:xfrm>
-        </p:spPr>
-        <p:txBody>
-          <a:bodyPr/>
-          <a:lstStyle/>
-          <a:p>
-            <a:pPr algn="ctr"/>
-            <a:r>
-              <a:rPr lang="en-US" dirty="0"/>
-              <a:t>Homework: Written</a:t>
-            </a:r>
-          </a:p>
-        </p:txBody>
-      </p:sp>
-      <p:sp>
-        <p:nvSpPr>
-          <p:cNvPr id="17411" name="Content Placeholder 2"/>
-          <p:cNvSpPr>
-            <a:spLocks noGrp="1"/>
-          </p:cNvSpPr>
-          <p:nvPr>
-            <p:ph idx="1"/>
-          </p:nvPr>
-        </p:nvSpPr>
-        <p:spPr>
-          <a:xfrm>
-            <a:off x="1621861" y="1644997"/>
-            <a:ext cx="9274739" cy="4755803"/>
-          </a:xfrm>
-        </p:spPr>
-        <p:txBody>
-          <a:bodyPr/>
-          <a:lstStyle/>
-          <a:p>
-            <a:r>
-              <a:rPr lang="en-US" dirty="0"/>
-              <a:t>These assignments must be typeset in </a:t>
-            </a:r>
-            <a:r>
-              <a:rPr lang="en-US" dirty="0" err="1"/>
-              <a:t>LaTeX</a:t>
-            </a:r>
-            <a:endParaRPr lang="en-US" dirty="0"/>
-          </a:p>
-          <a:p>
-            <a:endParaRPr lang="en-US" dirty="0"/>
-          </a:p>
-          <a:p>
-            <a:r>
-              <a:rPr lang="en-US" dirty="0"/>
-              <a:t>I will provide a couple tutorials, guides, and templates when the first assignment is given out</a:t>
-            </a:r>
-          </a:p>
-          <a:p>
-            <a:endParaRPr lang="en-US" dirty="0"/>
-          </a:p>
-          <a:p>
-            <a:r>
-              <a:rPr lang="en-US" b="1" i="1" u="sng" dirty="0"/>
-              <a:t>You may not embed images of text or formulas</a:t>
-            </a:r>
-            <a:r>
-              <a:rPr lang="en-US" dirty="0"/>
-              <a:t>!</a:t>
-            </a:r>
-          </a:p>
-          <a:p>
-            <a:endParaRPr lang="en-US" dirty="0"/>
-          </a:p>
-        </p:txBody>
-      </p:sp>
-    </p:spTree>
-    <p:extLst>
-      <p:ext uri="{BB962C8B-B14F-4D97-AF65-F5344CB8AC3E}">
-        <p14:creationId xmlns:p14="http://schemas.microsoft.com/office/powerpoint/2010/main" val="4248825475"/>
+        <p14:creationId xmlns:p14="http://schemas.microsoft.com/office/powerpoint/2010/main" val="3237934718"/>
       </p:ext>
     </p:extLst>
   </p:cSld>
@@ -15980,15 +16498,9 @@
       </p:grpSpPr>
       <p:sp>
         <p:nvSpPr>
-          <p:cNvPr id="2" name="Title 1">
-            <a:extLst>
-              <a:ext uri="{FF2B5EF4-FFF2-40B4-BE49-F238E27FC236}">
-                <a16:creationId xmlns:a16="http://schemas.microsoft.com/office/drawing/2014/main" id="{8E5DC06E-652D-CD40-8782-E878E11BC092}"/>
-              </a:ext>
-            </a:extLst>
-          </p:cNvPr>
+          <p:cNvPr id="12290" name="Rectangle 2"/>
           <p:cNvSpPr>
-            <a:spLocks noGrp="1"/>
+            <a:spLocks noGrp="1" noChangeArrowheads="1"/>
           </p:cNvSpPr>
           <p:nvPr>
             <p:ph type="title"/>
@@ -15996,8 +16508,8 @@
         </p:nvSpPr>
         <p:spPr>
           <a:xfrm>
-            <a:off x="1141413" y="538132"/>
-            <a:ext cx="9905998" cy="799137"/>
+            <a:off x="1778558" y="398586"/>
+            <a:ext cx="8432242" cy="886890"/>
           </a:xfrm>
         </p:spPr>
         <p:txBody>
@@ -16007,22 +16519,16 @@
             <a:pPr algn="ctr"/>
             <a:r>
               <a:rPr lang="en-US" dirty="0"/>
-              <a:t>Use of Online Code Etc.</a:t>
+              <a:t>Homework Grade Philosophy</a:t>
             </a:r>
           </a:p>
         </p:txBody>
       </p:sp>
       <p:sp>
         <p:nvSpPr>
-          <p:cNvPr id="4" name="Content Placeholder 3">
-            <a:extLst>
-              <a:ext uri="{FF2B5EF4-FFF2-40B4-BE49-F238E27FC236}">
-                <a16:creationId xmlns:a16="http://schemas.microsoft.com/office/drawing/2014/main" id="{8C2A69A9-9079-244C-BEAE-11CF7ACAB26E}"/>
-              </a:ext>
-            </a:extLst>
-          </p:cNvPr>
+          <p:cNvPr id="12291" name="Rectangle 3"/>
           <p:cNvSpPr>
-            <a:spLocks noGrp="1"/>
+            <a:spLocks noGrp="1" noChangeArrowheads="1"/>
           </p:cNvSpPr>
           <p:nvPr>
             <p:ph idx="1"/>
@@ -16030,121 +16536,66 @@
         </p:nvSpPr>
         <p:spPr>
           <a:xfrm>
-            <a:off x="1447800" y="1722456"/>
-            <a:ext cx="9420888" cy="4830744"/>
+            <a:off x="1600200" y="1572689"/>
+            <a:ext cx="8969939" cy="5036341"/>
           </a:xfrm>
         </p:spPr>
         <p:txBody>
           <a:bodyPr>
-            <a:normAutofit fontScale="92500"/>
+            <a:normAutofit/>
           </a:bodyPr>
           <a:lstStyle/>
           <a:p>
             <a:r>
-              <a:rPr lang="en-US" u="sng" dirty="0"/>
-              <a:t>Studying</a:t>
-            </a:r>
-            <a:r>
-              <a:rPr lang="en-US" dirty="0"/>
-              <a:t> code or proofs online is permitted </a:t>
-            </a:r>
-            <a:r>
-              <a:rPr lang="en-US" u="sng" dirty="0"/>
-              <a:t>but only</a:t>
-            </a:r>
-            <a:r>
-              <a:rPr lang="en-US" dirty="0"/>
-              <a:t> for getting ideas</a:t>
-            </a:r>
-          </a:p>
-          <a:p>
-            <a:r>
-              <a:rPr lang="en-US" dirty="0"/>
-              <a:t>Copying or reusing code or proofs from an online source violates the pledge</a:t>
+              <a:rPr lang="en-US" dirty="0"/>
+              <a:t>The purpose of homework is to PRACTICE!</a:t>
+            </a:r>
+          </a:p>
+          <a:p>
+            <a:endParaRPr lang="en-US" dirty="0"/>
+          </a:p>
+          <a:p>
+            <a:r>
+              <a:rPr lang="en-US" dirty="0"/>
+              <a:t>I want you to:</a:t>
             </a:r>
           </a:p>
           <a:p>
             <a:pPr lvl="1"/>
             <a:r>
               <a:rPr lang="en-US" dirty="0"/>
-              <a:t>You must cite sources of any online code you use in this way in a comment in your source file(s)</a:t>
+              <a:t>Attempt every problem on your own</a:t>
             </a:r>
           </a:p>
           <a:p>
             <a:pPr lvl="1"/>
+            <a:r>
+              <a:rPr lang="en-US" dirty="0"/>
+              <a:t>Then work with your group to get the solutions figured out</a:t>
+            </a:r>
+          </a:p>
+          <a:p>
+            <a:pPr lvl="1"/>
+            <a:r>
+              <a:rPr lang="en-US" dirty="0"/>
+              <a:t>Study the solutions for </a:t>
+            </a:r>
+            <a:r>
+              <a:rPr lang="en-US" dirty="0" err="1"/>
+              <a:t>homeworks</a:t>
+            </a:r>
+            <a:r>
+              <a:rPr lang="en-US" dirty="0"/>
+              <a:t> (these homework problems WILL appear on quizzes).</a:t>
+            </a:r>
+          </a:p>
+          <a:p>
             <a:endParaRPr lang="en-US" dirty="0"/>
           </a:p>
           <a:p>
             <a:r>
               <a:rPr lang="en-US" dirty="0"/>
-              <a:t>Remember:  the purpose of the homework is</a:t>
-            </a:r>
-          </a:p>
-          <a:p>
-            <a:pPr lvl="1"/>
-            <a:r>
-              <a:rPr lang="en-US" dirty="0"/>
-              <a:t>To </a:t>
-            </a:r>
-            <a:r>
-              <a:rPr lang="en-US" b="1" i="1" u="sng" dirty="0"/>
-              <a:t>practice</a:t>
-            </a:r>
-            <a:r>
-              <a:rPr lang="en-US" dirty="0"/>
-              <a:t> in an environment that is lower-stress</a:t>
-            </a:r>
-          </a:p>
-          <a:p>
-            <a:pPr lvl="1"/>
-            <a:r>
-              <a:rPr lang="en-US" dirty="0"/>
-              <a:t>To </a:t>
-            </a:r>
-            <a:r>
-              <a:rPr lang="en-US" b="1" i="1" u="sng" dirty="0"/>
-              <a:t>push yourself </a:t>
-            </a:r>
-            <a:r>
-              <a:rPr lang="en-US" dirty="0"/>
-              <a:t>to solve think about the theory of computation and to prepare you for the quizzes, NOT just to get a grade.</a:t>
-            </a:r>
-          </a:p>
-          <a:p>
-            <a:pPr lvl="1"/>
-            <a:r>
-              <a:rPr lang="en-US" dirty="0"/>
-              <a:t>To </a:t>
-            </a:r>
-            <a:r>
-              <a:rPr lang="en-US" b="1" i="1" u="sng" dirty="0"/>
-              <a:t>work out the logical part </a:t>
-            </a:r>
-            <a:r>
-              <a:rPr lang="en-US" dirty="0"/>
-              <a:t>of your brain </a:t>
-            </a:r>
-            <a:r>
-              <a:rPr lang="en-US" dirty="0">
-                <a:sym typeface="Wingdings" pitchFamily="2" charset="2"/>
-              </a:rPr>
-              <a:t></a:t>
-            </a:r>
-            <a:endParaRPr lang="en-US" dirty="0"/>
-          </a:p>
-          <a:p>
-            <a:pPr lvl="1"/>
-            <a:r>
-              <a:rPr lang="en-US" dirty="0"/>
-              <a:t>To focus on </a:t>
-            </a:r>
-            <a:r>
-              <a:rPr lang="en-US" b="1" i="1" u="sng" dirty="0"/>
-              <a:t>attempting to solve problems yourself </a:t>
-            </a:r>
-            <a:r>
-              <a:rPr lang="en-US" dirty="0"/>
-              <a:t>before asking others for assistance.</a:t>
+              <a:t>Grading will be lenient. Our plan is to check your HW for completion, effort, and skim to see if it is mostly correct. However…</a:t>
             </a:r>
           </a:p>
           <a:p>
@@ -16155,7 +16606,7 @@
     </p:spTree>
     <p:extLst>
       <p:ext uri="{BB962C8B-B14F-4D97-AF65-F5344CB8AC3E}">
-        <p14:creationId xmlns:p14="http://schemas.microsoft.com/office/powerpoint/2010/main" val="3316639139"/>
+        <p14:creationId xmlns:p14="http://schemas.microsoft.com/office/powerpoint/2010/main" val="3014866706"/>
       </p:ext>
     </p:extLst>
   </p:cSld>
@@ -16170,7 +16621,13 @@
   <p:cSld>
     <p:spTree>
       <p:nvGrpSpPr>
-        <p:cNvPr id="1" name=""/>
+        <p:cNvPr id="1" name="">
+          <a:extLst>
+            <a:ext uri="{FF2B5EF4-FFF2-40B4-BE49-F238E27FC236}">
+              <a16:creationId xmlns:a16="http://schemas.microsoft.com/office/drawing/2014/main" id="{EAC0667B-EEC6-2E7F-4D1B-F3D0FE4CA7FC}"/>
+            </a:ext>
+          </a:extLst>
+        </p:cNvPr>
         <p:cNvGrpSpPr/>
         <p:nvPr/>
       </p:nvGrpSpPr>
@@ -16184,9 +16641,15 @@
       </p:grpSpPr>
       <p:sp>
         <p:nvSpPr>
-          <p:cNvPr id="18434" name="Title 1"/>
+          <p:cNvPr id="12290" name="Rectangle 2">
+            <a:extLst>
+              <a:ext uri="{FF2B5EF4-FFF2-40B4-BE49-F238E27FC236}">
+                <a16:creationId xmlns:a16="http://schemas.microsoft.com/office/drawing/2014/main" id="{5B5D8CC4-DC42-89A7-E6B2-481525C8CE12}"/>
+              </a:ext>
+            </a:extLst>
+          </p:cNvPr>
           <p:cNvSpPr>
-            <a:spLocks noGrp="1"/>
+            <a:spLocks noGrp="1" noChangeArrowheads="1"/>
           </p:cNvSpPr>
           <p:nvPr>
             <p:ph type="title"/>
@@ -16194,8 +16657,8 @@
         </p:nvSpPr>
         <p:spPr>
           <a:xfrm>
-            <a:off x="1141413" y="427600"/>
-            <a:ext cx="9905998" cy="823212"/>
+            <a:off x="1778558" y="398586"/>
+            <a:ext cx="8432242" cy="886890"/>
           </a:xfrm>
         </p:spPr>
         <p:txBody>
@@ -16205,16 +16668,22 @@
             <a:pPr algn="ctr"/>
             <a:r>
               <a:rPr lang="en-US" dirty="0"/>
-              <a:t>Working in groups</a:t>
+              <a:t>Homework Check-Ins</a:t>
             </a:r>
           </a:p>
         </p:txBody>
       </p:sp>
       <p:sp>
         <p:nvSpPr>
-          <p:cNvPr id="18435" name="Content Placeholder 2"/>
+          <p:cNvPr id="12291" name="Rectangle 3">
+            <a:extLst>
+              <a:ext uri="{FF2B5EF4-FFF2-40B4-BE49-F238E27FC236}">
+                <a16:creationId xmlns:a16="http://schemas.microsoft.com/office/drawing/2014/main" id="{2AADC454-16AF-F1FB-4E70-1F3326ED9858}"/>
+              </a:ext>
+            </a:extLst>
+          </p:cNvPr>
           <p:cNvSpPr>
-            <a:spLocks noGrp="1"/>
+            <a:spLocks noGrp="1" noChangeArrowheads="1"/>
           </p:cNvSpPr>
           <p:nvPr>
             <p:ph idx="1"/>
@@ -16222,8 +16691,8 @@
         </p:nvSpPr>
         <p:spPr>
           <a:xfrm>
-            <a:off x="1305446" y="1441730"/>
-            <a:ext cx="9819754" cy="5035270"/>
+            <a:off x="1600200" y="1572689"/>
+            <a:ext cx="8969939" cy="5036341"/>
           </a:xfrm>
         </p:spPr>
         <p:txBody>
@@ -16234,45 +16703,66 @@
           <a:p>
             <a:r>
               <a:rPr lang="en-US" dirty="0"/>
-              <a:t>For the homework, you may work together in groups of 3 or less (written assignments)</a:t>
+              <a:t>Everyone is required to do </a:t>
+            </a:r>
+            <a:r>
+              <a:rPr lang="en-US" b="1" i="1" u="sng" dirty="0"/>
+              <a:t>ONE homework check-in </a:t>
+            </a:r>
+            <a:r>
+              <a:rPr lang="en-US" dirty="0"/>
+              <a:t>at some point throughout the semester.</a:t>
+            </a:r>
+          </a:p>
+          <a:p>
+            <a:endParaRPr lang="en-US" dirty="0"/>
+          </a:p>
+          <a:p>
+            <a:r>
+              <a:rPr lang="en-US" dirty="0"/>
+              <a:t>How it works:</a:t>
             </a:r>
           </a:p>
           <a:p>
             <a:pPr lvl="1"/>
             <a:r>
               <a:rPr lang="en-US" dirty="0"/>
-              <a:t>Submit one homework per group (I believe </a:t>
-            </a:r>
-            <a:r>
-              <a:rPr lang="en-US" dirty="0" err="1"/>
-              <a:t>Gradescope</a:t>
-            </a:r>
-            <a:r>
-              <a:rPr lang="en-US" dirty="0"/>
-              <a:t> supports this)</a:t>
-            </a:r>
-          </a:p>
-          <a:p>
-            <a:endParaRPr lang="en-US" dirty="0"/>
-          </a:p>
-          <a:p>
-            <a:r>
-              <a:rPr lang="en-US" dirty="0"/>
-              <a:t>For the programming homework, you may discuss the problems with your group of 3 or less, but you must:</a:t>
+              <a:t>You will be given a week assigned to do this check-in</a:t>
             </a:r>
           </a:p>
           <a:p>
             <a:pPr lvl="1"/>
             <a:r>
               <a:rPr lang="en-US" dirty="0"/>
-              <a:t>State who you worked with</a:t>
+              <a:t>You will sign up for an OH slot</a:t>
             </a:r>
           </a:p>
           <a:p>
             <a:pPr lvl="1"/>
             <a:r>
               <a:rPr lang="en-US" dirty="0"/>
-              <a:t>Type up your own implementation!</a:t>
+              <a:t>Come to Office Hours</a:t>
+            </a:r>
+          </a:p>
+          <a:p>
+            <a:pPr lvl="1"/>
+            <a:r>
+              <a:rPr lang="en-US" dirty="0"/>
+              <a:t>TA will pull up a random homework problem and ask you to explain</a:t>
+            </a:r>
+          </a:p>
+          <a:p>
+            <a:pPr lvl="1"/>
+            <a:r>
+              <a:rPr lang="en-US" dirty="0"/>
+              <a:t>You explain the solution to the HW problem</a:t>
+            </a:r>
+          </a:p>
+          <a:p>
+            <a:pPr lvl="1"/>
+            <a:r>
+              <a:rPr lang="en-US" dirty="0"/>
+              <a:t>TA grades you on a scale of 1-4 (not proficient to mastered)</a:t>
             </a:r>
           </a:p>
         </p:txBody>
@@ -16280,7 +16770,7 @@
     </p:spTree>
     <p:extLst>
       <p:ext uri="{BB962C8B-B14F-4D97-AF65-F5344CB8AC3E}">
-        <p14:creationId xmlns:p14="http://schemas.microsoft.com/office/powerpoint/2010/main" val="1292368053"/>
+        <p14:creationId xmlns:p14="http://schemas.microsoft.com/office/powerpoint/2010/main" val="1845908865"/>
       </p:ext>
     </p:extLst>
   </p:cSld>
@@ -16319,27 +16809,31 @@
         </p:nvSpPr>
         <p:spPr>
           <a:xfrm>
-            <a:off x="1141413" y="427600"/>
-            <a:ext cx="9905998" cy="823212"/>
+            <a:off x="1998858" y="327866"/>
+            <a:ext cx="7958331" cy="887986"/>
           </a:xfrm>
         </p:spPr>
         <p:txBody>
-          <a:bodyPr>
-            <a:normAutofit fontScale="90000"/>
-          </a:bodyPr>
+          <a:bodyPr/>
           <a:lstStyle/>
           <a:p>
             <a:pPr algn="ctr"/>
             <a:r>
               <a:rPr lang="en-US" dirty="0"/>
-              <a:t>On the subject of extensions and Attendance</a:t>
+              <a:t>Grading Overview</a:t>
             </a:r>
           </a:p>
         </p:txBody>
       </p:sp>
       <p:sp>
         <p:nvSpPr>
-          <p:cNvPr id="18435" name="Content Placeholder 2"/>
+          <p:cNvPr id="3" name="Content Placeholder 2">
+            <a:extLst>
+              <a:ext uri="{FF2B5EF4-FFF2-40B4-BE49-F238E27FC236}">
+                <a16:creationId xmlns:a16="http://schemas.microsoft.com/office/drawing/2014/main" id="{267DFEF5-BEAA-974F-B91B-2D8B6E94C721}"/>
+              </a:ext>
+            </a:extLst>
+          </p:cNvPr>
           <p:cNvSpPr>
             <a:spLocks noGrp="1"/>
           </p:cNvSpPr>
@@ -16349,86 +16843,80 @@
         </p:nvSpPr>
         <p:spPr>
           <a:xfrm>
-            <a:off x="1227656" y="1350290"/>
-            <a:ext cx="9819754" cy="5035270"/>
+            <a:off x="1847572" y="1481365"/>
+            <a:ext cx="8109617" cy="4950367"/>
           </a:xfrm>
         </p:spPr>
         <p:txBody>
           <a:bodyPr>
-            <a:normAutofit fontScale="92500"/>
+            <a:normAutofit/>
           </a:bodyPr>
           <a:lstStyle/>
           <a:p>
             <a:r>
+              <a:rPr lang="en-US" dirty="0"/>
+              <a:t>Final letter grade will be a weighted average:</a:t>
+            </a:r>
+          </a:p>
+          <a:p>
+            <a:endParaRPr lang="en-US" dirty="0"/>
+          </a:p>
+          <a:p>
+            <a:r>
+              <a:rPr lang="en-US" b="1" i="1" u="sng" dirty="0"/>
+              <a:t>Homework (6-7)</a:t>
+            </a:r>
+            <a:r>
+              <a:rPr lang="en-US" dirty="0"/>
+              <a:t>: 		15 percent</a:t>
+            </a:r>
+          </a:p>
+          <a:p>
+            <a:r>
+              <a:rPr lang="en-US" b="1" i="1" u="sng" dirty="0"/>
+              <a:t>OH Check-In (1)</a:t>
+            </a:r>
+            <a:r>
+              <a:rPr lang="en-US" dirty="0"/>
+              <a:t>:		5 percent</a:t>
+            </a:r>
+          </a:p>
+          <a:p>
+            <a:r>
               <a:rPr lang="en-US" b="1" i="1" u="sng" dirty="0"/>
               <a:t>Attendance</a:t>
             </a:r>
             <a:r>
               <a:rPr lang="en-US" dirty="0"/>
-              <a:t>: I want you to attend lecture, obviously. Don’t want to be strict about it…but do want to provide incentive for you to be here, which is good for your learning.</a:t>
-            </a:r>
-          </a:p>
-          <a:p>
-            <a:pPr lvl="1"/>
-            <a:r>
-              <a:rPr lang="en-US" dirty="0"/>
-              <a:t>I will keep track of the </a:t>
-            </a:r>
+              <a:t>:			8 percent</a:t>
+            </a:r>
+          </a:p>
+          <a:p>
             <a:r>
               <a:rPr lang="en-US" b="1" i="1" u="sng" dirty="0"/>
-              <a:t>number of lectures in which less than 50 percent</a:t>
-            </a:r>
-            <a:r>
-              <a:rPr lang="en-US" dirty="0"/>
-              <a:t> of the class is present.</a:t>
-            </a:r>
-          </a:p>
-          <a:p>
-            <a:pPr lvl="1"/>
-            <a:endParaRPr lang="en-US" dirty="0"/>
-          </a:p>
-          <a:p>
-            <a:r>
-              <a:rPr lang="en-US" dirty="0"/>
-              <a:t>Extensions: You should not use these unless you ABSOLUTELY need to.</a:t>
-            </a:r>
-          </a:p>
-          <a:p>
-            <a:pPr lvl="1"/>
-            <a:r>
-              <a:rPr lang="en-US" dirty="0"/>
-              <a:t>I will keep track of the </a:t>
-            </a:r>
+              <a:t>Quizzes (Mods 1-4)</a:t>
+            </a:r>
+            <a:r>
+              <a:rPr lang="en-US" dirty="0"/>
+              <a:t>: 		60 percent (15 percent each)</a:t>
+            </a:r>
+          </a:p>
+          <a:p>
             <a:r>
               <a:rPr lang="en-US" b="1" i="1" u="sng" dirty="0"/>
-              <a:t>percentage of assignments that are late</a:t>
-            </a:r>
-            <a:r>
-              <a:rPr lang="en-US" dirty="0"/>
-              <a:t>.</a:t>
-            </a:r>
-          </a:p>
-          <a:p>
-            <a:endParaRPr lang="en-US" dirty="0"/>
-          </a:p>
-          <a:p>
-            <a:r>
-              <a:rPr lang="en-US" dirty="0"/>
-              <a:t>Both of these numbers will be used in calculating your course curve at the end of the semester. Please do your best to not use the extension unless you absolutely need to!</a:t>
-            </a:r>
-          </a:p>
-          <a:p>
-            <a:endParaRPr lang="en-US" dirty="0"/>
-          </a:p>
-          <a:p>
-            <a:endParaRPr lang="en-US" dirty="0"/>
+              <a:t>Final Exam Quiz</a:t>
+            </a:r>
+            <a:r>
+              <a:rPr lang="en-US" dirty="0"/>
+              <a:t>: 		12 percent</a:t>
+            </a:r>
           </a:p>
         </p:txBody>
       </p:sp>
     </p:spTree>
     <p:extLst>
       <p:ext uri="{BB962C8B-B14F-4D97-AF65-F5344CB8AC3E}">
-        <p14:creationId xmlns:p14="http://schemas.microsoft.com/office/powerpoint/2010/main" val="474709066"/>
+        <p14:creationId xmlns:p14="http://schemas.microsoft.com/office/powerpoint/2010/main" val="160555418"/>
       </p:ext>
     </p:extLst>
   </p:cSld>
@@ -16467,8 +16955,8 @@
         </p:nvSpPr>
         <p:spPr>
           <a:xfrm>
-            <a:off x="1141413" y="427600"/>
-            <a:ext cx="9905998" cy="823212"/>
+            <a:off x="1141413" y="497938"/>
+            <a:ext cx="9905998" cy="969122"/>
           </a:xfrm>
         </p:spPr>
         <p:txBody>
@@ -16478,7 +16966,7 @@
             <a:pPr algn="ctr"/>
             <a:r>
               <a:rPr lang="en-US" dirty="0"/>
-              <a:t>I think that is all…</a:t>
+              <a:t>Office Hours</a:t>
             </a:r>
           </a:p>
         </p:txBody>
@@ -16493,21 +16981,17 @@
             <p:ph idx="1"/>
           </p:nvPr>
         </p:nvSpPr>
-        <p:spPr>
-          <a:xfrm>
-            <a:off x="1305446" y="1441730"/>
-            <a:ext cx="9819754" cy="5035270"/>
-          </a:xfrm>
-        </p:spPr>
+        <p:spPr/>
         <p:txBody>
           <a:bodyPr>
             <a:normAutofit/>
           </a:bodyPr>
           <a:lstStyle/>
           <a:p>
-            <a:r>
-              <a:rPr lang="en-US" dirty="0"/>
-              <a:t>Any questions…</a:t>
+            <a:pPr algn="l"/>
+            <a:r>
+              <a:rPr lang="en-US" dirty="0"/>
+              <a:t>Let’s discuss office hours by looking at the course website.</a:t>
             </a:r>
           </a:p>
         </p:txBody>
@@ -16515,7 +16999,7 @@
     </p:spTree>
     <p:extLst>
       <p:ext uri="{BB962C8B-B14F-4D97-AF65-F5344CB8AC3E}">
-        <p14:creationId xmlns:p14="http://schemas.microsoft.com/office/powerpoint/2010/main" val="755208883"/>
+        <p14:creationId xmlns:p14="http://schemas.microsoft.com/office/powerpoint/2010/main" val="3481522597"/>
       </p:ext>
     </p:extLst>
   </p:cSld>
@@ -16694,6 +17178,820 @@
     <p:extLst>
       <p:ext uri="{BB962C8B-B14F-4D97-AF65-F5344CB8AC3E}">
         <p14:creationId xmlns:p14="http://schemas.microsoft.com/office/powerpoint/2010/main" val="3749058203"/>
+      </p:ext>
+    </p:extLst>
+  </p:cSld>
+  <p:clrMapOvr>
+    <a:masterClrMapping/>
+  </p:clrMapOvr>
+</p:sld>
+</file>
+
+<file path=ppt/slides/slide30.xml><?xml version="1.0" encoding="utf-8"?>
+<p:sld xmlns:a="http://schemas.openxmlformats.org/drawingml/2006/main" xmlns:r="http://schemas.openxmlformats.org/officeDocument/2006/relationships" xmlns:p="http://schemas.openxmlformats.org/presentationml/2006/main">
+  <p:cSld>
+    <p:spTree>
+      <p:nvGrpSpPr>
+        <p:cNvPr id="1" name=""/>
+        <p:cNvGrpSpPr/>
+        <p:nvPr/>
+      </p:nvGrpSpPr>
+      <p:grpSpPr>
+        <a:xfrm>
+          <a:off x="0" y="0"/>
+          <a:ext cx="0" cy="0"/>
+          <a:chOff x="0" y="0"/>
+          <a:chExt cx="0" cy="0"/>
+        </a:xfrm>
+      </p:grpSpPr>
+      <p:sp>
+        <p:nvSpPr>
+          <p:cNvPr id="17410" name="Title 1"/>
+          <p:cNvSpPr>
+            <a:spLocks noGrp="1"/>
+          </p:cNvSpPr>
+          <p:nvPr>
+            <p:ph type="title"/>
+          </p:nvPr>
+        </p:nvSpPr>
+        <p:spPr>
+          <a:xfrm>
+            <a:off x="1141413" y="457745"/>
+            <a:ext cx="9905998" cy="874078"/>
+          </a:xfrm>
+        </p:spPr>
+        <p:txBody>
+          <a:bodyPr/>
+          <a:lstStyle/>
+          <a:p>
+            <a:pPr algn="ctr"/>
+            <a:r>
+              <a:rPr lang="en-US" dirty="0"/>
+              <a:t>Homework: Written</a:t>
+            </a:r>
+          </a:p>
+        </p:txBody>
+      </p:sp>
+      <p:sp>
+        <p:nvSpPr>
+          <p:cNvPr id="17411" name="Content Placeholder 2"/>
+          <p:cNvSpPr>
+            <a:spLocks noGrp="1"/>
+          </p:cNvSpPr>
+          <p:nvPr>
+            <p:ph idx="1"/>
+          </p:nvPr>
+        </p:nvSpPr>
+        <p:spPr>
+          <a:xfrm>
+            <a:off x="1621861" y="1644997"/>
+            <a:ext cx="9274739" cy="4755803"/>
+          </a:xfrm>
+        </p:spPr>
+        <p:txBody>
+          <a:bodyPr/>
+          <a:lstStyle/>
+          <a:p>
+            <a:r>
+              <a:rPr lang="en-US" dirty="0"/>
+              <a:t>These assignments must be typeset in </a:t>
+            </a:r>
+            <a:r>
+              <a:rPr lang="en-US" dirty="0" err="1"/>
+              <a:t>LaTeX</a:t>
+            </a:r>
+            <a:endParaRPr lang="en-US" dirty="0"/>
+          </a:p>
+          <a:p>
+            <a:endParaRPr lang="en-US" dirty="0"/>
+          </a:p>
+          <a:p>
+            <a:r>
+              <a:rPr lang="en-US" dirty="0"/>
+              <a:t>I will provide a couple tutorials, guides, and templates when the first assignment is given out</a:t>
+            </a:r>
+          </a:p>
+          <a:p>
+            <a:endParaRPr lang="en-US" dirty="0"/>
+          </a:p>
+          <a:p>
+            <a:r>
+              <a:rPr lang="en-US" b="1" i="1" u="sng" dirty="0"/>
+              <a:t>You may not embed images of text or formulas</a:t>
+            </a:r>
+            <a:r>
+              <a:rPr lang="en-US" dirty="0"/>
+              <a:t>!</a:t>
+            </a:r>
+          </a:p>
+          <a:p>
+            <a:endParaRPr lang="en-US" dirty="0"/>
+          </a:p>
+        </p:txBody>
+      </p:sp>
+    </p:spTree>
+    <p:extLst>
+      <p:ext uri="{BB962C8B-B14F-4D97-AF65-F5344CB8AC3E}">
+        <p14:creationId xmlns:p14="http://schemas.microsoft.com/office/powerpoint/2010/main" val="4248825475"/>
+      </p:ext>
+    </p:extLst>
+  </p:cSld>
+  <p:clrMapOvr>
+    <a:masterClrMapping/>
+  </p:clrMapOvr>
+</p:sld>
+</file>
+
+<file path=ppt/slides/slide31.xml><?xml version="1.0" encoding="utf-8"?>
+<p:sld xmlns:a="http://schemas.openxmlformats.org/drawingml/2006/main" xmlns:r="http://schemas.openxmlformats.org/officeDocument/2006/relationships" xmlns:p="http://schemas.openxmlformats.org/presentationml/2006/main">
+  <p:cSld>
+    <p:spTree>
+      <p:nvGrpSpPr>
+        <p:cNvPr id="1" name=""/>
+        <p:cNvGrpSpPr/>
+        <p:nvPr/>
+      </p:nvGrpSpPr>
+      <p:grpSpPr>
+        <a:xfrm>
+          <a:off x="0" y="0"/>
+          <a:ext cx="0" cy="0"/>
+          <a:chOff x="0" y="0"/>
+          <a:chExt cx="0" cy="0"/>
+        </a:xfrm>
+      </p:grpSpPr>
+      <p:sp>
+        <p:nvSpPr>
+          <p:cNvPr id="2" name="Title 1">
+            <a:extLst>
+              <a:ext uri="{FF2B5EF4-FFF2-40B4-BE49-F238E27FC236}">
+                <a16:creationId xmlns:a16="http://schemas.microsoft.com/office/drawing/2014/main" id="{8E5DC06E-652D-CD40-8782-E878E11BC092}"/>
+              </a:ext>
+            </a:extLst>
+          </p:cNvPr>
+          <p:cNvSpPr>
+            <a:spLocks noGrp="1"/>
+          </p:cNvSpPr>
+          <p:nvPr>
+            <p:ph type="title"/>
+          </p:nvPr>
+        </p:nvSpPr>
+        <p:spPr>
+          <a:xfrm>
+            <a:off x="1141413" y="538132"/>
+            <a:ext cx="9905998" cy="799137"/>
+          </a:xfrm>
+        </p:spPr>
+        <p:txBody>
+          <a:bodyPr/>
+          <a:lstStyle/>
+          <a:p>
+            <a:pPr algn="ctr"/>
+            <a:r>
+              <a:rPr lang="en-US" dirty="0"/>
+              <a:t>Use of Online Code Etc.</a:t>
+            </a:r>
+          </a:p>
+        </p:txBody>
+      </p:sp>
+      <p:sp>
+        <p:nvSpPr>
+          <p:cNvPr id="4" name="Content Placeholder 3">
+            <a:extLst>
+              <a:ext uri="{FF2B5EF4-FFF2-40B4-BE49-F238E27FC236}">
+                <a16:creationId xmlns:a16="http://schemas.microsoft.com/office/drawing/2014/main" id="{8C2A69A9-9079-244C-BEAE-11CF7ACAB26E}"/>
+              </a:ext>
+            </a:extLst>
+          </p:cNvPr>
+          <p:cNvSpPr>
+            <a:spLocks noGrp="1"/>
+          </p:cNvSpPr>
+          <p:nvPr>
+            <p:ph idx="1"/>
+          </p:nvPr>
+        </p:nvSpPr>
+        <p:spPr>
+          <a:xfrm>
+            <a:off x="1447800" y="1722456"/>
+            <a:ext cx="9420888" cy="4830744"/>
+          </a:xfrm>
+        </p:spPr>
+        <p:txBody>
+          <a:bodyPr>
+            <a:normAutofit fontScale="92500"/>
+          </a:bodyPr>
+          <a:lstStyle/>
+          <a:p>
+            <a:r>
+              <a:rPr lang="en-US" u="sng" dirty="0"/>
+              <a:t>Studying</a:t>
+            </a:r>
+            <a:r>
+              <a:rPr lang="en-US" dirty="0"/>
+              <a:t> code or proofs online is permitted </a:t>
+            </a:r>
+            <a:r>
+              <a:rPr lang="en-US" u="sng" dirty="0"/>
+              <a:t>but only</a:t>
+            </a:r>
+            <a:r>
+              <a:rPr lang="en-US" dirty="0"/>
+              <a:t> for getting ideas</a:t>
+            </a:r>
+          </a:p>
+          <a:p>
+            <a:r>
+              <a:rPr lang="en-US" dirty="0"/>
+              <a:t>Copying or reusing code or proofs from an online source violates the pledge</a:t>
+            </a:r>
+          </a:p>
+          <a:p>
+            <a:pPr lvl="1"/>
+            <a:r>
+              <a:rPr lang="en-US" dirty="0"/>
+              <a:t>You must cite sources of any online code you use in this way in a comment in your source file(s)</a:t>
+            </a:r>
+          </a:p>
+          <a:p>
+            <a:pPr lvl="1"/>
+            <a:endParaRPr lang="en-US" dirty="0"/>
+          </a:p>
+          <a:p>
+            <a:r>
+              <a:rPr lang="en-US" dirty="0"/>
+              <a:t>Remember:  the purpose of the homework is</a:t>
+            </a:r>
+          </a:p>
+          <a:p>
+            <a:pPr lvl="1"/>
+            <a:r>
+              <a:rPr lang="en-US" dirty="0"/>
+              <a:t>To </a:t>
+            </a:r>
+            <a:r>
+              <a:rPr lang="en-US" b="1" i="1" u="sng" dirty="0"/>
+              <a:t>practice</a:t>
+            </a:r>
+            <a:r>
+              <a:rPr lang="en-US" dirty="0"/>
+              <a:t> in an environment that is lower-stress</a:t>
+            </a:r>
+          </a:p>
+          <a:p>
+            <a:pPr lvl="1"/>
+            <a:r>
+              <a:rPr lang="en-US" dirty="0"/>
+              <a:t>To </a:t>
+            </a:r>
+            <a:r>
+              <a:rPr lang="en-US" b="1" i="1" u="sng" dirty="0"/>
+              <a:t>push yourself </a:t>
+            </a:r>
+            <a:r>
+              <a:rPr lang="en-US" dirty="0"/>
+              <a:t>to solve think about the theory of computation and to prepare you for the quizzes, NOT just to get a grade.</a:t>
+            </a:r>
+          </a:p>
+          <a:p>
+            <a:pPr lvl="1"/>
+            <a:r>
+              <a:rPr lang="en-US" dirty="0"/>
+              <a:t>To </a:t>
+            </a:r>
+            <a:r>
+              <a:rPr lang="en-US" b="1" i="1" u="sng" dirty="0"/>
+              <a:t>work out the logical part </a:t>
+            </a:r>
+            <a:r>
+              <a:rPr lang="en-US" dirty="0"/>
+              <a:t>of your brain </a:t>
+            </a:r>
+            <a:r>
+              <a:rPr lang="en-US" dirty="0">
+                <a:sym typeface="Wingdings" pitchFamily="2" charset="2"/>
+              </a:rPr>
+              <a:t></a:t>
+            </a:r>
+            <a:endParaRPr lang="en-US" dirty="0"/>
+          </a:p>
+          <a:p>
+            <a:pPr lvl="1"/>
+            <a:r>
+              <a:rPr lang="en-US" dirty="0"/>
+              <a:t>To focus on </a:t>
+            </a:r>
+            <a:r>
+              <a:rPr lang="en-US" b="1" i="1" u="sng" dirty="0"/>
+              <a:t>attempting to solve problems yourself </a:t>
+            </a:r>
+            <a:r>
+              <a:rPr lang="en-US" dirty="0"/>
+              <a:t>before asking others for assistance.</a:t>
+            </a:r>
+          </a:p>
+          <a:p>
+            <a:endParaRPr lang="en-US" dirty="0"/>
+          </a:p>
+        </p:txBody>
+      </p:sp>
+    </p:spTree>
+    <p:extLst>
+      <p:ext uri="{BB962C8B-B14F-4D97-AF65-F5344CB8AC3E}">
+        <p14:creationId xmlns:p14="http://schemas.microsoft.com/office/powerpoint/2010/main" val="3316639139"/>
+      </p:ext>
+    </p:extLst>
+  </p:cSld>
+  <p:clrMapOvr>
+    <a:masterClrMapping/>
+  </p:clrMapOvr>
+</p:sld>
+</file>
+
+<file path=ppt/slides/slide32.xml><?xml version="1.0" encoding="utf-8"?>
+<p:sld xmlns:a="http://schemas.openxmlformats.org/drawingml/2006/main" xmlns:r="http://schemas.openxmlformats.org/officeDocument/2006/relationships" xmlns:p="http://schemas.openxmlformats.org/presentationml/2006/main">
+  <p:cSld>
+    <p:spTree>
+      <p:nvGrpSpPr>
+        <p:cNvPr id="1" name=""/>
+        <p:cNvGrpSpPr/>
+        <p:nvPr/>
+      </p:nvGrpSpPr>
+      <p:grpSpPr>
+        <a:xfrm>
+          <a:off x="0" y="0"/>
+          <a:ext cx="0" cy="0"/>
+          <a:chOff x="0" y="0"/>
+          <a:chExt cx="0" cy="0"/>
+        </a:xfrm>
+      </p:grpSpPr>
+      <p:sp>
+        <p:nvSpPr>
+          <p:cNvPr id="18434" name="Title 1"/>
+          <p:cNvSpPr>
+            <a:spLocks noGrp="1"/>
+          </p:cNvSpPr>
+          <p:nvPr>
+            <p:ph type="title"/>
+          </p:nvPr>
+        </p:nvSpPr>
+        <p:spPr>
+          <a:xfrm>
+            <a:off x="1141413" y="427600"/>
+            <a:ext cx="9905998" cy="823212"/>
+          </a:xfrm>
+        </p:spPr>
+        <p:txBody>
+          <a:bodyPr/>
+          <a:lstStyle/>
+          <a:p>
+            <a:pPr algn="ctr"/>
+            <a:r>
+              <a:rPr lang="en-US" dirty="0"/>
+              <a:t>Working in groups</a:t>
+            </a:r>
+          </a:p>
+        </p:txBody>
+      </p:sp>
+      <p:sp>
+        <p:nvSpPr>
+          <p:cNvPr id="18435" name="Content Placeholder 2"/>
+          <p:cNvSpPr>
+            <a:spLocks noGrp="1"/>
+          </p:cNvSpPr>
+          <p:nvPr>
+            <p:ph idx="1"/>
+          </p:nvPr>
+        </p:nvSpPr>
+        <p:spPr>
+          <a:xfrm>
+            <a:off x="1305446" y="1441730"/>
+            <a:ext cx="9819754" cy="5035270"/>
+          </a:xfrm>
+        </p:spPr>
+        <p:txBody>
+          <a:bodyPr>
+            <a:normAutofit/>
+          </a:bodyPr>
+          <a:lstStyle/>
+          <a:p>
+            <a:r>
+              <a:rPr lang="en-US" dirty="0"/>
+              <a:t>For the homework, you may work together in groups of 3 or less (written assignments)</a:t>
+            </a:r>
+          </a:p>
+          <a:p>
+            <a:pPr lvl="1"/>
+            <a:r>
+              <a:rPr lang="en-US" dirty="0"/>
+              <a:t>Submit one homework per group (I believe </a:t>
+            </a:r>
+            <a:r>
+              <a:rPr lang="en-US" dirty="0" err="1"/>
+              <a:t>Gradescope</a:t>
+            </a:r>
+            <a:r>
+              <a:rPr lang="en-US" dirty="0"/>
+              <a:t> supports this)</a:t>
+            </a:r>
+          </a:p>
+          <a:p>
+            <a:endParaRPr lang="en-US" dirty="0"/>
+          </a:p>
+          <a:p>
+            <a:r>
+              <a:rPr lang="en-US" dirty="0"/>
+              <a:t>For the programming homework, you may discuss the problems with your group of 3 or less, but you must:</a:t>
+            </a:r>
+          </a:p>
+          <a:p>
+            <a:pPr lvl="1"/>
+            <a:r>
+              <a:rPr lang="en-US" dirty="0"/>
+              <a:t>State who you worked with</a:t>
+            </a:r>
+          </a:p>
+          <a:p>
+            <a:pPr lvl="1"/>
+            <a:r>
+              <a:rPr lang="en-US" dirty="0"/>
+              <a:t>Type up your own implementation!</a:t>
+            </a:r>
+          </a:p>
+        </p:txBody>
+      </p:sp>
+    </p:spTree>
+    <p:extLst>
+      <p:ext uri="{BB962C8B-B14F-4D97-AF65-F5344CB8AC3E}">
+        <p14:creationId xmlns:p14="http://schemas.microsoft.com/office/powerpoint/2010/main" val="1292368053"/>
+      </p:ext>
+    </p:extLst>
+  </p:cSld>
+  <p:clrMapOvr>
+    <a:masterClrMapping/>
+  </p:clrMapOvr>
+</p:sld>
+</file>
+
+<file path=ppt/slides/slide33.xml><?xml version="1.0" encoding="utf-8"?>
+<p:sld xmlns:a="http://schemas.openxmlformats.org/drawingml/2006/main" xmlns:r="http://schemas.openxmlformats.org/officeDocument/2006/relationships" xmlns:p="http://schemas.openxmlformats.org/presentationml/2006/main">
+  <p:cSld>
+    <p:spTree>
+      <p:nvGrpSpPr>
+        <p:cNvPr id="1" name="">
+          <a:extLst>
+            <a:ext uri="{FF2B5EF4-FFF2-40B4-BE49-F238E27FC236}">
+              <a16:creationId xmlns:a16="http://schemas.microsoft.com/office/drawing/2014/main" id="{C57253C7-DA38-58A0-62B1-0D28173D41A1}"/>
+            </a:ext>
+          </a:extLst>
+        </p:cNvPr>
+        <p:cNvGrpSpPr/>
+        <p:nvPr/>
+      </p:nvGrpSpPr>
+      <p:grpSpPr>
+        <a:xfrm>
+          <a:off x="0" y="0"/>
+          <a:ext cx="0" cy="0"/>
+          <a:chOff x="0" y="0"/>
+          <a:chExt cx="0" cy="0"/>
+        </a:xfrm>
+      </p:grpSpPr>
+      <p:sp>
+        <p:nvSpPr>
+          <p:cNvPr id="9218" name="Rectangle 2">
+            <a:extLst>
+              <a:ext uri="{FF2B5EF4-FFF2-40B4-BE49-F238E27FC236}">
+                <a16:creationId xmlns:a16="http://schemas.microsoft.com/office/drawing/2014/main" id="{8D2444A4-E005-9DE7-1639-67494304F7FD}"/>
+              </a:ext>
+            </a:extLst>
+          </p:cNvPr>
+          <p:cNvSpPr>
+            <a:spLocks noGrp="1" noChangeArrowheads="1"/>
+          </p:cNvSpPr>
+          <p:nvPr>
+            <p:ph type="title"/>
+            <p:custDataLst>
+              <p:tags r:id="rId1"/>
+            </p:custDataLst>
+          </p:nvPr>
+        </p:nvSpPr>
+        <p:spPr>
+          <a:xfrm>
+            <a:off x="1141413" y="381849"/>
+            <a:ext cx="9905998" cy="812249"/>
+          </a:xfrm>
+        </p:spPr>
+        <p:txBody>
+          <a:bodyPr/>
+          <a:lstStyle/>
+          <a:p>
+            <a:pPr algn="ctr"/>
+            <a:r>
+              <a:rPr lang="en-US" dirty="0"/>
+              <a:t>On the Subject of Effort</a:t>
+            </a:r>
+          </a:p>
+        </p:txBody>
+      </p:sp>
+      <p:sp>
+        <p:nvSpPr>
+          <p:cNvPr id="307203" name="Rectangle 3">
+            <a:extLst>
+              <a:ext uri="{FF2B5EF4-FFF2-40B4-BE49-F238E27FC236}">
+                <a16:creationId xmlns:a16="http://schemas.microsoft.com/office/drawing/2014/main" id="{941A19F4-0DA1-C94E-272C-CD4C77EEF8F2}"/>
+              </a:ext>
+            </a:extLst>
+          </p:cNvPr>
+          <p:cNvSpPr>
+            <a:spLocks noGrp="1" noChangeArrowheads="1"/>
+          </p:cNvSpPr>
+          <p:nvPr>
+            <p:ph idx="1"/>
+            <p:custDataLst>
+              <p:tags r:id="rId2"/>
+            </p:custDataLst>
+          </p:nvPr>
+        </p:nvSpPr>
+        <p:spPr>
+          <a:xfrm>
+            <a:off x="1752600" y="1473798"/>
+            <a:ext cx="8817539" cy="4800167"/>
+          </a:xfrm>
+        </p:spPr>
+        <p:txBody>
+          <a:bodyPr>
+            <a:normAutofit fontScale="92500" lnSpcReduction="20000"/>
+          </a:bodyPr>
+          <a:lstStyle/>
+          <a:p>
+            <a:pPr>
+              <a:lnSpc>
+                <a:spcPct val="90000"/>
+              </a:lnSpc>
+            </a:pPr>
+            <a:r>
+              <a:rPr lang="en-US" dirty="0"/>
+              <a:t>DMT2 is a difficult course with a lot of abstract conceptual content.</a:t>
+            </a:r>
+          </a:p>
+          <a:p>
+            <a:pPr>
+              <a:lnSpc>
+                <a:spcPct val="90000"/>
+              </a:lnSpc>
+            </a:pPr>
+            <a:endParaRPr lang="en-US" dirty="0"/>
+          </a:p>
+          <a:p>
+            <a:pPr>
+              <a:lnSpc>
+                <a:spcPct val="90000"/>
+              </a:lnSpc>
+            </a:pPr>
+            <a:r>
+              <a:rPr lang="en-US" dirty="0"/>
+              <a:t>To be successful, you should at minimum be prepared to:</a:t>
+            </a:r>
+          </a:p>
+          <a:p>
+            <a:pPr lvl="1">
+              <a:lnSpc>
+                <a:spcPct val="90000"/>
+              </a:lnSpc>
+            </a:pPr>
+            <a:r>
+              <a:rPr lang="en-US" dirty="0"/>
+              <a:t>Attend Lecture Every Single Day</a:t>
+            </a:r>
+          </a:p>
+          <a:p>
+            <a:pPr lvl="1">
+              <a:lnSpc>
+                <a:spcPct val="90000"/>
+              </a:lnSpc>
+            </a:pPr>
+            <a:r>
+              <a:rPr lang="en-US" dirty="0"/>
+              <a:t>Do NOT use your free extensions unless you absolutely need to</a:t>
+            </a:r>
+          </a:p>
+          <a:p>
+            <a:pPr lvl="1">
+              <a:lnSpc>
+                <a:spcPct val="90000"/>
+              </a:lnSpc>
+            </a:pPr>
+            <a:r>
+              <a:rPr lang="en-US" dirty="0"/>
+              <a:t>Spend at least 1 hour per day on the course (7 hours per week)</a:t>
+            </a:r>
+          </a:p>
+          <a:p>
+            <a:pPr lvl="2">
+              <a:lnSpc>
+                <a:spcPct val="90000"/>
+              </a:lnSpc>
+            </a:pPr>
+            <a:r>
+              <a:rPr lang="en-US" dirty="0"/>
+              <a:t>I truly believe smaller 1 hour chunks is better than one big 3-4 hour chunk</a:t>
+            </a:r>
+          </a:p>
+          <a:p>
+            <a:pPr>
+              <a:lnSpc>
+                <a:spcPct val="90000"/>
+              </a:lnSpc>
+            </a:pPr>
+            <a:endParaRPr lang="en-US" dirty="0"/>
+          </a:p>
+          <a:p>
+            <a:pPr>
+              <a:lnSpc>
+                <a:spcPct val="90000"/>
+              </a:lnSpc>
+            </a:pPr>
+            <a:r>
+              <a:rPr lang="en-US" dirty="0"/>
+              <a:t>What to spend your time on:</a:t>
+            </a:r>
+          </a:p>
+          <a:p>
+            <a:pPr lvl="1">
+              <a:lnSpc>
+                <a:spcPct val="90000"/>
+              </a:lnSpc>
+            </a:pPr>
+            <a:r>
+              <a:rPr lang="en-US" dirty="0"/>
+              <a:t>Lecture</a:t>
+            </a:r>
+          </a:p>
+          <a:p>
+            <a:pPr lvl="1">
+              <a:lnSpc>
+                <a:spcPct val="90000"/>
+              </a:lnSpc>
+            </a:pPr>
+            <a:r>
+              <a:rPr lang="en-US" dirty="0"/>
+              <a:t>Working on homework problems</a:t>
+            </a:r>
+          </a:p>
+          <a:p>
+            <a:pPr lvl="1">
+              <a:lnSpc>
+                <a:spcPct val="90000"/>
+              </a:lnSpc>
+            </a:pPr>
+            <a:r>
+              <a:rPr lang="en-US" dirty="0"/>
+              <a:t>Read the textbook (it is better than almost ALL </a:t>
+            </a:r>
+            <a:r>
+              <a:rPr lang="en-US" dirty="0" err="1"/>
+              <a:t>youtube</a:t>
+            </a:r>
+            <a:r>
+              <a:rPr lang="en-US" dirty="0"/>
+              <a:t> videos in my opinion)</a:t>
+            </a:r>
+          </a:p>
+          <a:p>
+            <a:pPr lvl="1">
+              <a:lnSpc>
+                <a:spcPct val="90000"/>
+              </a:lnSpc>
+            </a:pPr>
+            <a:r>
+              <a:rPr lang="en-US" dirty="0"/>
+              <a:t>Reviewing lecture recordings (this should NOT be the first time you see the lecture)</a:t>
+            </a:r>
+          </a:p>
+          <a:p>
+            <a:pPr lvl="1">
+              <a:lnSpc>
+                <a:spcPct val="90000"/>
+              </a:lnSpc>
+            </a:pPr>
+            <a:r>
+              <a:rPr lang="en-US" dirty="0"/>
+              <a:t>Review homework problems AFTER they are submitted</a:t>
+            </a:r>
+          </a:p>
+          <a:p>
+            <a:pPr lvl="1">
+              <a:lnSpc>
+                <a:spcPct val="90000"/>
+              </a:lnSpc>
+            </a:pPr>
+            <a:r>
+              <a:rPr lang="en-US" dirty="0"/>
+              <a:t>Review old quizzes on course website</a:t>
+            </a:r>
+          </a:p>
+          <a:p>
+            <a:pPr lvl="1">
+              <a:lnSpc>
+                <a:spcPct val="90000"/>
+              </a:lnSpc>
+            </a:pPr>
+            <a:r>
+              <a:rPr lang="en-US" dirty="0"/>
+              <a:t>Attend OH and discuss problems with TAs</a:t>
+            </a:r>
+          </a:p>
+        </p:txBody>
+      </p:sp>
+    </p:spTree>
+    <p:extLst>
+      <p:ext uri="{BB962C8B-B14F-4D97-AF65-F5344CB8AC3E}">
+        <p14:creationId xmlns:p14="http://schemas.microsoft.com/office/powerpoint/2010/main" val="447773840"/>
+      </p:ext>
+    </p:extLst>
+  </p:cSld>
+  <p:clrMapOvr>
+    <a:masterClrMapping/>
+  </p:clrMapOvr>
+</p:sld>
+</file>
+
+<file path=ppt/slides/slide34.xml><?xml version="1.0" encoding="utf-8"?>
+<p:sld xmlns:a="http://schemas.openxmlformats.org/drawingml/2006/main" xmlns:r="http://schemas.openxmlformats.org/officeDocument/2006/relationships" xmlns:p="http://schemas.openxmlformats.org/presentationml/2006/main">
+  <p:cSld>
+    <p:spTree>
+      <p:nvGrpSpPr>
+        <p:cNvPr id="1" name=""/>
+        <p:cNvGrpSpPr/>
+        <p:nvPr/>
+      </p:nvGrpSpPr>
+      <p:grpSpPr>
+        <a:xfrm>
+          <a:off x="0" y="0"/>
+          <a:ext cx="0" cy="0"/>
+          <a:chOff x="0" y="0"/>
+          <a:chExt cx="0" cy="0"/>
+        </a:xfrm>
+      </p:grpSpPr>
+      <p:sp>
+        <p:nvSpPr>
+          <p:cNvPr id="18434" name="Title 1"/>
+          <p:cNvSpPr>
+            <a:spLocks noGrp="1"/>
+          </p:cNvSpPr>
+          <p:nvPr>
+            <p:ph type="title"/>
+          </p:nvPr>
+        </p:nvSpPr>
+        <p:spPr>
+          <a:xfrm>
+            <a:off x="1141413" y="427600"/>
+            <a:ext cx="9905998" cy="823212"/>
+          </a:xfrm>
+        </p:spPr>
+        <p:txBody>
+          <a:bodyPr/>
+          <a:lstStyle/>
+          <a:p>
+            <a:pPr algn="ctr"/>
+            <a:r>
+              <a:rPr lang="en-US" dirty="0"/>
+              <a:t>I think that is all…</a:t>
+            </a:r>
+          </a:p>
+        </p:txBody>
+      </p:sp>
+      <p:sp>
+        <p:nvSpPr>
+          <p:cNvPr id="18435" name="Content Placeholder 2"/>
+          <p:cNvSpPr>
+            <a:spLocks noGrp="1"/>
+          </p:cNvSpPr>
+          <p:nvPr>
+            <p:ph idx="1"/>
+          </p:nvPr>
+        </p:nvSpPr>
+        <p:spPr>
+          <a:xfrm>
+            <a:off x="1305446" y="1441730"/>
+            <a:ext cx="9819754" cy="5035270"/>
+          </a:xfrm>
+        </p:spPr>
+        <p:txBody>
+          <a:bodyPr>
+            <a:normAutofit/>
+          </a:bodyPr>
+          <a:lstStyle/>
+          <a:p>
+            <a:r>
+              <a:rPr lang="en-US" dirty="0"/>
+              <a:t>Any questions…</a:t>
+            </a:r>
+          </a:p>
+        </p:txBody>
+      </p:sp>
+    </p:spTree>
+    <p:extLst>
+      <p:ext uri="{BB962C8B-B14F-4D97-AF65-F5344CB8AC3E}">
+        <p14:creationId xmlns:p14="http://schemas.microsoft.com/office/powerpoint/2010/main" val="755208883"/>
       </p:ext>
     </p:extLst>
   </p:cSld>
@@ -17123,22 +18421,14 @@
             <a:pPr lvl="2"/>
             <a:r>
               <a:rPr lang="en-US" dirty="0"/>
-              <a:t>Chase </a:t>
-            </a:r>
-            <a:r>
-              <a:rPr lang="en-US" dirty="0" err="1"/>
-              <a:t>Fickles</a:t>
-            </a:r>
-            <a:r>
-              <a:rPr lang="en-US" dirty="0"/>
-              <a:t> (See course website for contact info)</a:t>
+              <a:t>Gustavo Moreira(See course website for contact info)</a:t>
             </a:r>
           </a:p>
           <a:p>
             <a:pPr lvl="1"/>
             <a:r>
               <a:rPr lang="en-US" dirty="0"/>
-              <a:t>Undergraduates (~17)</a:t>
+              <a:t>Undergraduates (~15)</a:t>
             </a:r>
           </a:p>
           <a:p>
@@ -17533,7 +18823,55 @@
 </p:tagLst>
 </file>
 
+<file path=ppt/tags/tag15.xml><?xml version="1.0" encoding="utf-8"?>
+<p:tagLst xmlns:a="http://schemas.openxmlformats.org/drawingml/2006/main" xmlns:r="http://schemas.openxmlformats.org/officeDocument/2006/relationships" xmlns:p="http://schemas.openxmlformats.org/presentationml/2006/main">
+  <p:tag name="_INSTRUCTOR VIEW19C14C36-AC8E-43BC-9DB6-C2AAF774C7DC|PANE__TAG" val="_"/>
+</p:tagLst>
+</file>
+
+<file path=ppt/tags/tag16.xml><?xml version="1.0" encoding="utf-8"?>
+<p:tagLst xmlns:a="http://schemas.openxmlformats.org/drawingml/2006/main" xmlns:r="http://schemas.openxmlformats.org/officeDocument/2006/relationships" xmlns:p="http://schemas.openxmlformats.org/presentationml/2006/main">
+  <p:tag name="_INSTRUCTOR VIEW19C14C36-AC8E-43BC-9DB6-C2AAF774C7DC|PANE__TAG" val="_"/>
+</p:tagLst>
+</file>
+
+<file path=ppt/tags/tag17.xml><?xml version="1.0" encoding="utf-8"?>
+<p:tagLst xmlns:a="http://schemas.openxmlformats.org/drawingml/2006/main" xmlns:r="http://schemas.openxmlformats.org/officeDocument/2006/relationships" xmlns:p="http://schemas.openxmlformats.org/presentationml/2006/main">
+  <p:tag name="_INSTRUCTOR VIEW19C14C36-AC8E-43BC-9DB6-C2AAF774C7DC|PANE__TAG" val="_"/>
+</p:tagLst>
+</file>
+
+<file path=ppt/tags/tag18.xml><?xml version="1.0" encoding="utf-8"?>
+<p:tagLst xmlns:a="http://schemas.openxmlformats.org/drawingml/2006/main" xmlns:r="http://schemas.openxmlformats.org/officeDocument/2006/relationships" xmlns:p="http://schemas.openxmlformats.org/presentationml/2006/main">
+  <p:tag name="_INSTRUCTOR VIEW19C14C36-AC8E-43BC-9DB6-C2AAF774C7DC|PANE__TAG" val="_"/>
+</p:tagLst>
+</file>
+
+<file path=ppt/tags/tag19.xml><?xml version="1.0" encoding="utf-8"?>
+<p:tagLst xmlns:a="http://schemas.openxmlformats.org/drawingml/2006/main" xmlns:r="http://schemas.openxmlformats.org/officeDocument/2006/relationships" xmlns:p="http://schemas.openxmlformats.org/presentationml/2006/main">
+  <p:tag name="_INSTRUCTOR VIEW19C14C36-AC8E-43BC-9DB6-C2AAF774C7DC|PANE__TAG" val="_"/>
+</p:tagLst>
+</file>
+
 <file path=ppt/tags/tag2.xml><?xml version="1.0" encoding="utf-8"?>
+<p:tagLst xmlns:a="http://schemas.openxmlformats.org/drawingml/2006/main" xmlns:r="http://schemas.openxmlformats.org/officeDocument/2006/relationships" xmlns:p="http://schemas.openxmlformats.org/presentationml/2006/main">
+  <p:tag name="_INSTRUCTOR VIEW19C14C36-AC8E-43BC-9DB6-C2AAF774C7DC|PANE__TAG" val="_"/>
+</p:tagLst>
+</file>
+
+<file path=ppt/tags/tag20.xml><?xml version="1.0" encoding="utf-8"?>
+<p:tagLst xmlns:a="http://schemas.openxmlformats.org/drawingml/2006/main" xmlns:r="http://schemas.openxmlformats.org/officeDocument/2006/relationships" xmlns:p="http://schemas.openxmlformats.org/presentationml/2006/main">
+  <p:tag name="_INSTRUCTOR VIEW19C14C36-AC8E-43BC-9DB6-C2AAF774C7DC|PANE__TAG" val="_"/>
+</p:tagLst>
+</file>
+
+<file path=ppt/tags/tag21.xml><?xml version="1.0" encoding="utf-8"?>
+<p:tagLst xmlns:a="http://schemas.openxmlformats.org/drawingml/2006/main" xmlns:r="http://schemas.openxmlformats.org/officeDocument/2006/relationships" xmlns:p="http://schemas.openxmlformats.org/presentationml/2006/main">
+  <p:tag name="_INSTRUCTOR VIEW19C14C36-AC8E-43BC-9DB6-C2AAF774C7DC|PANE__TAG" val="_"/>
+</p:tagLst>
+</file>
+
+<file path=ppt/tags/tag22.xml><?xml version="1.0" encoding="utf-8"?>
 <p:tagLst xmlns:a="http://schemas.openxmlformats.org/drawingml/2006/main" xmlns:r="http://schemas.openxmlformats.org/officeDocument/2006/relationships" xmlns:p="http://schemas.openxmlformats.org/presentationml/2006/main">
   <p:tag name="_INSTRUCTOR VIEW19C14C36-AC8E-43BC-9DB6-C2AAF774C7DC|PANE__TAG" val="_"/>
 </p:tagLst>

--- a/slides/00-CourseIntroduction.pptx
+++ b/slides/00-CourseIntroduction.pptx
@@ -230,7 +230,7 @@
           <a:p>
             <a:fld id="{C5B45307-6ED4-B142-BD64-10F739779302}" type="datetimeFigureOut">
               <a:rPr lang="en-US" smtClean="0"/>
-              <a:t>8/18/26</a:t>
+              <a:t>8/25/26</a:t>
             </a:fld>
             <a:endParaRPr lang="en-US"/>
           </a:p>
@@ -733,7 +733,7 @@
           <a:noFill/>
           <a:extLst>
             <a:ext uri="{909E8E84-426E-40dd-AFC4-6F175D3DCCD1}">
-              <a14:hiddenFill xmlns:a14="http://schemas.microsoft.com/office/drawing/2010/main" xmlns="">
+              <a14:hiddenFill xmlns="" xmlns:a14="http://schemas.microsoft.com/office/drawing/2010/main">
                 <a:solidFill>
                   <a:srgbClr val="FFFFFF"/>
                 </a:solidFill>
@@ -792,7 +792,7 @@
             </a:ln>
             <a:extLst>
               <a:ext uri="{91240B29-F687-4f45-9708-019B960494DF}">
-                <a14:hiddenLine xmlns:a14="http://schemas.microsoft.com/office/drawing/2010/main" xmlns="" w="9525">
+                <a14:hiddenLine xmlns="" xmlns:a14="http://schemas.microsoft.com/office/drawing/2010/main" w="9525">
                   <a:solidFill>
                     <a:srgbClr val="000000"/>
                   </a:solidFill>
@@ -882,7 +882,7 @@
             </a:ln>
             <a:extLst>
               <a:ext uri="{91240B29-F687-4f45-9708-019B960494DF}">
-                <a14:hiddenLine xmlns:a14="http://schemas.microsoft.com/office/drawing/2010/main" xmlns="" w="9525">
+                <a14:hiddenLine xmlns="" xmlns:a14="http://schemas.microsoft.com/office/drawing/2010/main" w="9525">
                   <a:solidFill>
                     <a:srgbClr val="000000"/>
                   </a:solidFill>
@@ -972,7 +972,7 @@
             </a:ln>
             <a:extLst>
               <a:ext uri="{91240B29-F687-4f45-9708-019B960494DF}">
-                <a14:hiddenLine xmlns:a14="http://schemas.microsoft.com/office/drawing/2010/main" xmlns="" w="9525">
+                <a14:hiddenLine xmlns="" xmlns:a14="http://schemas.microsoft.com/office/drawing/2010/main" w="9525">
                   <a:solidFill>
                     <a:srgbClr val="000000"/>
                   </a:solidFill>
@@ -1006,7 +1006,7 @@
             </a:ln>
             <a:extLst>
               <a:ext uri="{91240B29-F687-4f45-9708-019B960494DF}">
-                <a14:hiddenLine xmlns:a14="http://schemas.microsoft.com/office/drawing/2010/main" xmlns="" w="9525">
+                <a14:hiddenLine xmlns="" xmlns:a14="http://schemas.microsoft.com/office/drawing/2010/main" w="9525">
                   <a:solidFill>
                     <a:srgbClr val="000000"/>
                   </a:solidFill>
@@ -1096,7 +1096,7 @@
             </a:ln>
             <a:extLst>
               <a:ext uri="{91240B29-F687-4f45-9708-019B960494DF}">
-                <a14:hiddenLine xmlns:a14="http://schemas.microsoft.com/office/drawing/2010/main" xmlns="" w="9525">
+                <a14:hiddenLine xmlns="" xmlns:a14="http://schemas.microsoft.com/office/drawing/2010/main" w="9525">
                   <a:solidFill>
                     <a:srgbClr val="000000"/>
                   </a:solidFill>
@@ -1158,7 +1158,7 @@
             </a:ln>
             <a:extLst>
               <a:ext uri="{91240B29-F687-4f45-9708-019B960494DF}">
-                <a14:hiddenLine xmlns:a14="http://schemas.microsoft.com/office/drawing/2010/main" xmlns="" w="9525">
+                <a14:hiddenLine xmlns="" xmlns:a14="http://schemas.microsoft.com/office/drawing/2010/main" w="9525">
                   <a:solidFill>
                     <a:srgbClr val="000000"/>
                   </a:solidFill>
@@ -1220,7 +1220,7 @@
             </a:ln>
             <a:extLst>
               <a:ext uri="{91240B29-F687-4f45-9708-019B960494DF}">
-                <a14:hiddenLine xmlns:a14="http://schemas.microsoft.com/office/drawing/2010/main" xmlns="" w="9525">
+                <a14:hiddenLine xmlns="" xmlns:a14="http://schemas.microsoft.com/office/drawing/2010/main" w="9525">
                   <a:solidFill>
                     <a:srgbClr val="000000"/>
                   </a:solidFill>
@@ -1310,7 +1310,7 @@
             </a:ln>
             <a:extLst>
               <a:ext uri="{91240B29-F687-4f45-9708-019B960494DF}">
-                <a14:hiddenLine xmlns:a14="http://schemas.microsoft.com/office/drawing/2010/main" xmlns="" w="9525">
+                <a14:hiddenLine xmlns="" xmlns:a14="http://schemas.microsoft.com/office/drawing/2010/main" w="9525">
                   <a:solidFill>
                     <a:srgbClr val="000000"/>
                   </a:solidFill>
@@ -1372,7 +1372,7 @@
             </a:ln>
             <a:extLst>
               <a:ext uri="{91240B29-F687-4f45-9708-019B960494DF}">
-                <a14:hiddenLine xmlns:a14="http://schemas.microsoft.com/office/drawing/2010/main" xmlns="" w="9525">
+                <a14:hiddenLine xmlns="" xmlns:a14="http://schemas.microsoft.com/office/drawing/2010/main" w="9525">
                   <a:solidFill>
                     <a:srgbClr val="000000"/>
                   </a:solidFill>
@@ -1434,7 +1434,7 @@
             </a:ln>
             <a:extLst>
               <a:ext uri="{91240B29-F687-4f45-9708-019B960494DF}">
-                <a14:hiddenLine xmlns:a14="http://schemas.microsoft.com/office/drawing/2010/main" xmlns="" w="9525">
+                <a14:hiddenLine xmlns="" xmlns:a14="http://schemas.microsoft.com/office/drawing/2010/main" w="9525">
                   <a:solidFill>
                     <a:srgbClr val="000000"/>
                   </a:solidFill>
@@ -1524,7 +1524,7 @@
             </a:ln>
             <a:extLst>
               <a:ext uri="{91240B29-F687-4f45-9708-019B960494DF}">
-                <a14:hiddenLine xmlns:a14="http://schemas.microsoft.com/office/drawing/2010/main" xmlns="" w="9525">
+                <a14:hiddenLine xmlns="" xmlns:a14="http://schemas.microsoft.com/office/drawing/2010/main" w="9525">
                   <a:solidFill>
                     <a:srgbClr val="000000"/>
                   </a:solidFill>
@@ -1614,7 +1614,7 @@
             </a:ln>
             <a:extLst>
               <a:ext uri="{91240B29-F687-4f45-9708-019B960494DF}">
-                <a14:hiddenLine xmlns:a14="http://schemas.microsoft.com/office/drawing/2010/main" xmlns="" w="9525">
+                <a14:hiddenLine xmlns="" xmlns:a14="http://schemas.microsoft.com/office/drawing/2010/main" w="9525">
                   <a:solidFill>
                     <a:srgbClr val="000000"/>
                   </a:solidFill>
@@ -1676,7 +1676,7 @@
             </a:ln>
             <a:extLst>
               <a:ext uri="{91240B29-F687-4f45-9708-019B960494DF}">
-                <a14:hiddenLine xmlns:a14="http://schemas.microsoft.com/office/drawing/2010/main" xmlns="" w="9525">
+                <a14:hiddenLine xmlns="" xmlns:a14="http://schemas.microsoft.com/office/drawing/2010/main" w="9525">
                   <a:solidFill>
                     <a:srgbClr val="000000"/>
                   </a:solidFill>
@@ -1786,7 +1786,7 @@
             </a:ln>
             <a:extLst>
               <a:ext uri="{91240B29-F687-4f45-9708-019B960494DF}">
-                <a14:hiddenLine xmlns:a14="http://schemas.microsoft.com/office/drawing/2010/main" xmlns="" w="9525">
+                <a14:hiddenLine xmlns="" xmlns:a14="http://schemas.microsoft.com/office/drawing/2010/main" w="9525">
                   <a:solidFill>
                     <a:srgbClr val="000000"/>
                   </a:solidFill>
@@ -1848,7 +1848,7 @@
             </a:ln>
             <a:extLst>
               <a:ext uri="{91240B29-F687-4f45-9708-019B960494DF}">
-                <a14:hiddenLine xmlns:a14="http://schemas.microsoft.com/office/drawing/2010/main" xmlns="" w="9525">
+                <a14:hiddenLine xmlns="" xmlns:a14="http://schemas.microsoft.com/office/drawing/2010/main" w="9525">
                   <a:solidFill>
                     <a:srgbClr val="000000"/>
                   </a:solidFill>
@@ -1938,7 +1938,7 @@
             </a:ln>
             <a:extLst>
               <a:ext uri="{91240B29-F687-4f45-9708-019B960494DF}">
-                <a14:hiddenLine xmlns:a14="http://schemas.microsoft.com/office/drawing/2010/main" xmlns="" w="9525">
+                <a14:hiddenLine xmlns="" xmlns:a14="http://schemas.microsoft.com/office/drawing/2010/main" w="9525">
                   <a:solidFill>
                     <a:srgbClr val="000000"/>
                   </a:solidFill>
@@ -2028,7 +2028,7 @@
             </a:ln>
             <a:extLst>
               <a:ext uri="{91240B29-F687-4f45-9708-019B960494DF}">
-                <a14:hiddenLine xmlns:a14="http://schemas.microsoft.com/office/drawing/2010/main" xmlns="" w="9525">
+                <a14:hiddenLine xmlns="" xmlns:a14="http://schemas.microsoft.com/office/drawing/2010/main" w="9525">
                   <a:solidFill>
                     <a:srgbClr val="000000"/>
                   </a:solidFill>
@@ -2090,7 +2090,7 @@
             </a:ln>
             <a:extLst>
               <a:ext uri="{91240B29-F687-4f45-9708-019B960494DF}">
-                <a14:hiddenLine xmlns:a14="http://schemas.microsoft.com/office/drawing/2010/main" xmlns="" w="9525">
+                <a14:hiddenLine xmlns="" xmlns:a14="http://schemas.microsoft.com/office/drawing/2010/main" w="9525">
                   <a:solidFill>
                     <a:srgbClr val="000000"/>
                   </a:solidFill>
@@ -2180,7 +2180,7 @@
             </a:ln>
             <a:extLst>
               <a:ext uri="{91240B29-F687-4f45-9708-019B960494DF}">
-                <a14:hiddenLine xmlns:a14="http://schemas.microsoft.com/office/drawing/2010/main" xmlns="" w="9525">
+                <a14:hiddenLine xmlns="" xmlns:a14="http://schemas.microsoft.com/office/drawing/2010/main" w="9525">
                   <a:solidFill>
                     <a:srgbClr val="000000"/>
                   </a:solidFill>
@@ -2270,7 +2270,7 @@
             </a:ln>
             <a:extLst>
               <a:ext uri="{91240B29-F687-4f45-9708-019B960494DF}">
-                <a14:hiddenLine xmlns:a14="http://schemas.microsoft.com/office/drawing/2010/main" xmlns="" w="9525">
+                <a14:hiddenLine xmlns="" xmlns:a14="http://schemas.microsoft.com/office/drawing/2010/main" w="9525">
                   <a:solidFill>
                     <a:srgbClr val="000000"/>
                   </a:solidFill>
@@ -2326,7 +2326,7 @@
             </a:ln>
             <a:extLst>
               <a:ext uri="{91240B29-F687-4f45-9708-019B960494DF}">
-                <a14:hiddenLine xmlns:a14="http://schemas.microsoft.com/office/drawing/2010/main" xmlns="" w="9525">
+                <a14:hiddenLine xmlns="" xmlns:a14="http://schemas.microsoft.com/office/drawing/2010/main" w="9525">
                   <a:solidFill>
                     <a:srgbClr val="000000"/>
                   </a:solidFill>
@@ -2416,7 +2416,7 @@
             </a:ln>
             <a:extLst>
               <a:ext uri="{91240B29-F687-4f45-9708-019B960494DF}">
-                <a14:hiddenLine xmlns:a14="http://schemas.microsoft.com/office/drawing/2010/main" xmlns="" w="9525">
+                <a14:hiddenLine xmlns="" xmlns:a14="http://schemas.microsoft.com/office/drawing/2010/main" w="9525">
                   <a:solidFill>
                     <a:srgbClr val="000000"/>
                   </a:solidFill>
@@ -2472,7 +2472,7 @@
             </a:ln>
             <a:extLst>
               <a:ext uri="{91240B29-F687-4f45-9708-019B960494DF}">
-                <a14:hiddenLine xmlns:a14="http://schemas.microsoft.com/office/drawing/2010/main" xmlns="" w="9525">
+                <a14:hiddenLine xmlns="" xmlns:a14="http://schemas.microsoft.com/office/drawing/2010/main" w="9525">
                   <a:solidFill>
                     <a:srgbClr val="000000"/>
                   </a:solidFill>
@@ -2562,7 +2562,7 @@
             </a:ln>
             <a:extLst>
               <a:ext uri="{91240B29-F687-4f45-9708-019B960494DF}">
-                <a14:hiddenLine xmlns:a14="http://schemas.microsoft.com/office/drawing/2010/main" xmlns="" w="9525">
+                <a14:hiddenLine xmlns="" xmlns:a14="http://schemas.microsoft.com/office/drawing/2010/main" w="9525">
                   <a:solidFill>
                     <a:srgbClr val="000000"/>
                   </a:solidFill>
@@ -2630,7 +2630,7 @@
             </a:ln>
             <a:extLst>
               <a:ext uri="{91240B29-F687-4f45-9708-019B960494DF}">
-                <a14:hiddenLine xmlns:a14="http://schemas.microsoft.com/office/drawing/2010/main" xmlns="" w="9525">
+                <a14:hiddenLine xmlns="" xmlns:a14="http://schemas.microsoft.com/office/drawing/2010/main" w="9525">
                   <a:solidFill>
                     <a:srgbClr val="000000"/>
                   </a:solidFill>
@@ -2720,7 +2720,7 @@
             </a:ln>
             <a:extLst>
               <a:ext uri="{91240B29-F687-4f45-9708-019B960494DF}">
-                <a14:hiddenLine xmlns:a14="http://schemas.microsoft.com/office/drawing/2010/main" xmlns="" w="9525">
+                <a14:hiddenLine xmlns="" xmlns:a14="http://schemas.microsoft.com/office/drawing/2010/main" w="9525">
                   <a:solidFill>
                     <a:srgbClr val="000000"/>
                   </a:solidFill>
@@ -2788,7 +2788,7 @@
             </a:ln>
             <a:extLst>
               <a:ext uri="{91240B29-F687-4f45-9708-019B960494DF}">
-                <a14:hiddenLine xmlns:a14="http://schemas.microsoft.com/office/drawing/2010/main" xmlns="" w="9525">
+                <a14:hiddenLine xmlns="" xmlns:a14="http://schemas.microsoft.com/office/drawing/2010/main" w="9525">
                   <a:solidFill>
                     <a:srgbClr val="000000"/>
                   </a:solidFill>
@@ -2878,7 +2878,7 @@
             </a:ln>
             <a:extLst>
               <a:ext uri="{91240B29-F687-4f45-9708-019B960494DF}">
-                <a14:hiddenLine xmlns:a14="http://schemas.microsoft.com/office/drawing/2010/main" xmlns="" w="9525">
+                <a14:hiddenLine xmlns="" xmlns:a14="http://schemas.microsoft.com/office/drawing/2010/main" w="9525">
                   <a:solidFill>
                     <a:srgbClr val="000000"/>
                   </a:solidFill>
@@ -2912,7 +2912,7 @@
             </a:ln>
             <a:extLst>
               <a:ext uri="{91240B29-F687-4f45-9708-019B960494DF}">
-                <a14:hiddenLine xmlns:a14="http://schemas.microsoft.com/office/drawing/2010/main" xmlns="" w="9525">
+                <a14:hiddenLine xmlns="" xmlns:a14="http://schemas.microsoft.com/office/drawing/2010/main" w="9525">
                   <a:solidFill>
                     <a:srgbClr val="000000"/>
                   </a:solidFill>
@@ -3002,7 +3002,7 @@
             </a:ln>
             <a:extLst>
               <a:ext uri="{91240B29-F687-4f45-9708-019B960494DF}">
-                <a14:hiddenLine xmlns:a14="http://schemas.microsoft.com/office/drawing/2010/main" xmlns="" w="9525">
+                <a14:hiddenLine xmlns="" xmlns:a14="http://schemas.microsoft.com/office/drawing/2010/main" w="9525">
                   <a:solidFill>
                     <a:srgbClr val="000000"/>
                   </a:solidFill>
@@ -3064,7 +3064,7 @@
             </a:ln>
             <a:extLst>
               <a:ext uri="{91240B29-F687-4f45-9708-019B960494DF}">
-                <a14:hiddenLine xmlns:a14="http://schemas.microsoft.com/office/drawing/2010/main" xmlns="" w="9525">
+                <a14:hiddenLine xmlns="" xmlns:a14="http://schemas.microsoft.com/office/drawing/2010/main" w="9525">
                   <a:solidFill>
                     <a:srgbClr val="000000"/>
                   </a:solidFill>
@@ -3126,7 +3126,7 @@
             </a:ln>
             <a:extLst>
               <a:ext uri="{91240B29-F687-4f45-9708-019B960494DF}">
-                <a14:hiddenLine xmlns:a14="http://schemas.microsoft.com/office/drawing/2010/main" xmlns="" w="9525">
+                <a14:hiddenLine xmlns="" xmlns:a14="http://schemas.microsoft.com/office/drawing/2010/main" w="9525">
                   <a:solidFill>
                     <a:srgbClr val="000000"/>
                   </a:solidFill>
@@ -3216,7 +3216,7 @@
             </a:ln>
             <a:extLst>
               <a:ext uri="{91240B29-F687-4f45-9708-019B960494DF}">
-                <a14:hiddenLine xmlns:a14="http://schemas.microsoft.com/office/drawing/2010/main" xmlns="" w="9525">
+                <a14:hiddenLine xmlns="" xmlns:a14="http://schemas.microsoft.com/office/drawing/2010/main" w="9525">
                   <a:solidFill>
                     <a:srgbClr val="000000"/>
                   </a:solidFill>
@@ -3284,7 +3284,7 @@
             </a:ln>
             <a:extLst>
               <a:ext uri="{91240B29-F687-4f45-9708-019B960494DF}">
-                <a14:hiddenLine xmlns:a14="http://schemas.microsoft.com/office/drawing/2010/main" xmlns="" w="9525">
+                <a14:hiddenLine xmlns="" xmlns:a14="http://schemas.microsoft.com/office/drawing/2010/main" w="9525">
                   <a:solidFill>
                     <a:srgbClr val="000000"/>
                   </a:solidFill>
@@ -3346,7 +3346,7 @@
             </a:ln>
             <a:extLst>
               <a:ext uri="{91240B29-F687-4f45-9708-019B960494DF}">
-                <a14:hiddenLine xmlns:a14="http://schemas.microsoft.com/office/drawing/2010/main" xmlns="" w="9525">
+                <a14:hiddenLine xmlns="" xmlns:a14="http://schemas.microsoft.com/office/drawing/2010/main" w="9525">
                   <a:solidFill>
                     <a:srgbClr val="000000"/>
                   </a:solidFill>
@@ -3436,7 +3436,7 @@
             </a:ln>
             <a:extLst>
               <a:ext uri="{91240B29-F687-4f45-9708-019B960494DF}">
-                <a14:hiddenLine xmlns:a14="http://schemas.microsoft.com/office/drawing/2010/main" xmlns="" w="9525">
+                <a14:hiddenLine xmlns="" xmlns:a14="http://schemas.microsoft.com/office/drawing/2010/main" w="9525">
                   <a:solidFill>
                     <a:srgbClr val="000000"/>
                   </a:solidFill>
@@ -3498,7 +3498,7 @@
             </a:ln>
             <a:extLst>
               <a:ext uri="{91240B29-F687-4f45-9708-019B960494DF}">
-                <a14:hiddenLine xmlns:a14="http://schemas.microsoft.com/office/drawing/2010/main" xmlns="" w="9525">
+                <a14:hiddenLine xmlns="" xmlns:a14="http://schemas.microsoft.com/office/drawing/2010/main" w="9525">
                   <a:solidFill>
                     <a:srgbClr val="000000"/>
                   </a:solidFill>
@@ -3588,7 +3588,7 @@
             </a:ln>
             <a:extLst>
               <a:ext uri="{91240B29-F687-4f45-9708-019B960494DF}">
-                <a14:hiddenLine xmlns:a14="http://schemas.microsoft.com/office/drawing/2010/main" xmlns="" w="9525">
+                <a14:hiddenLine xmlns="" xmlns:a14="http://schemas.microsoft.com/office/drawing/2010/main" w="9525">
                   <a:solidFill>
                     <a:srgbClr val="000000"/>
                   </a:solidFill>
@@ -3650,7 +3650,7 @@
             </a:ln>
             <a:extLst>
               <a:ext uri="{91240B29-F687-4f45-9708-019B960494DF}">
-                <a14:hiddenLine xmlns:a14="http://schemas.microsoft.com/office/drawing/2010/main" xmlns="" w="9525">
+                <a14:hiddenLine xmlns="" xmlns:a14="http://schemas.microsoft.com/office/drawing/2010/main" w="9525">
                   <a:solidFill>
                     <a:srgbClr val="000000"/>
                   </a:solidFill>
@@ -3740,7 +3740,7 @@
             </a:ln>
             <a:extLst>
               <a:ext uri="{91240B29-F687-4f45-9708-019B960494DF}">
-                <a14:hiddenLine xmlns:a14="http://schemas.microsoft.com/office/drawing/2010/main" xmlns="" w="9525">
+                <a14:hiddenLine xmlns="" xmlns:a14="http://schemas.microsoft.com/office/drawing/2010/main" w="9525">
                   <a:solidFill>
                     <a:srgbClr val="000000"/>
                   </a:solidFill>
@@ -3774,7 +3774,7 @@
             </a:ln>
             <a:extLst>
               <a:ext uri="{91240B29-F687-4f45-9708-019B960494DF}">
-                <a14:hiddenLine xmlns:a14="http://schemas.microsoft.com/office/drawing/2010/main" xmlns="" w="9525">
+                <a14:hiddenLine xmlns="" xmlns:a14="http://schemas.microsoft.com/office/drawing/2010/main" w="9525">
                   <a:solidFill>
                     <a:srgbClr val="000000"/>
                   </a:solidFill>
@@ -3839,7 +3839,7 @@
             </a:ln>
             <a:extLst>
               <a:ext uri="{91240B29-F687-4f45-9708-019B960494DF}">
-                <a14:hiddenLine xmlns:a14="http://schemas.microsoft.com/office/drawing/2010/main" xmlns="" w="9525">
+                <a14:hiddenLine xmlns="" xmlns:a14="http://schemas.microsoft.com/office/drawing/2010/main" w="9525">
                   <a:solidFill>
                     <a:srgbClr val="000000"/>
                   </a:solidFill>
@@ -3929,7 +3929,7 @@
             </a:ln>
             <a:extLst>
               <a:ext uri="{91240B29-F687-4f45-9708-019B960494DF}">
-                <a14:hiddenLine xmlns:a14="http://schemas.microsoft.com/office/drawing/2010/main" xmlns="" w="9525">
+                <a14:hiddenLine xmlns="" xmlns:a14="http://schemas.microsoft.com/office/drawing/2010/main" w="9525">
                   <a:solidFill>
                     <a:srgbClr val="000000"/>
                   </a:solidFill>
@@ -3991,7 +3991,7 @@
             </a:ln>
             <a:extLst>
               <a:ext uri="{91240B29-F687-4f45-9708-019B960494DF}">
-                <a14:hiddenLine xmlns:a14="http://schemas.microsoft.com/office/drawing/2010/main" xmlns="" w="9525">
+                <a14:hiddenLine xmlns="" xmlns:a14="http://schemas.microsoft.com/office/drawing/2010/main" w="9525">
                   <a:solidFill>
                     <a:srgbClr val="000000"/>
                   </a:solidFill>
@@ -4081,7 +4081,7 @@
             </a:ln>
             <a:extLst>
               <a:ext uri="{91240B29-F687-4f45-9708-019B960494DF}">
-                <a14:hiddenLine xmlns:a14="http://schemas.microsoft.com/office/drawing/2010/main" xmlns="" w="9525">
+                <a14:hiddenLine xmlns="" xmlns:a14="http://schemas.microsoft.com/office/drawing/2010/main" w="9525">
                   <a:solidFill>
                     <a:srgbClr val="000000"/>
                   </a:solidFill>
@@ -4171,7 +4171,7 @@
             </a:ln>
             <a:extLst>
               <a:ext uri="{91240B29-F687-4f45-9708-019B960494DF}">
-                <a14:hiddenLine xmlns:a14="http://schemas.microsoft.com/office/drawing/2010/main" xmlns="" w="9525">
+                <a14:hiddenLine xmlns="" xmlns:a14="http://schemas.microsoft.com/office/drawing/2010/main" w="9525">
                   <a:solidFill>
                     <a:srgbClr val="000000"/>
                   </a:solidFill>
@@ -4236,7 +4236,7 @@
             </a:ln>
             <a:extLst>
               <a:ext uri="{91240B29-F687-4f45-9708-019B960494DF}">
-                <a14:hiddenLine xmlns:a14="http://schemas.microsoft.com/office/drawing/2010/main" xmlns="" w="9525">
+                <a14:hiddenLine xmlns="" xmlns:a14="http://schemas.microsoft.com/office/drawing/2010/main" w="9525">
                   <a:solidFill>
                     <a:srgbClr val="000000"/>
                   </a:solidFill>
@@ -4298,7 +4298,7 @@
             </a:ln>
             <a:extLst>
               <a:ext uri="{91240B29-F687-4f45-9708-019B960494DF}">
-                <a14:hiddenLine xmlns:a14="http://schemas.microsoft.com/office/drawing/2010/main" xmlns="" w="9525">
+                <a14:hiddenLine xmlns="" xmlns:a14="http://schemas.microsoft.com/office/drawing/2010/main" w="9525">
                   <a:solidFill>
                     <a:srgbClr val="000000"/>
                   </a:solidFill>
@@ -4388,7 +4388,7 @@
             </a:ln>
             <a:extLst>
               <a:ext uri="{91240B29-F687-4f45-9708-019B960494DF}">
-                <a14:hiddenLine xmlns:a14="http://schemas.microsoft.com/office/drawing/2010/main" xmlns="" w="9525">
+                <a14:hiddenLine xmlns="" xmlns:a14="http://schemas.microsoft.com/office/drawing/2010/main" w="9525">
                   <a:solidFill>
                     <a:srgbClr val="000000"/>
                   </a:solidFill>
@@ -4478,7 +4478,7 @@
             </a:ln>
             <a:extLst>
               <a:ext uri="{91240B29-F687-4f45-9708-019B960494DF}">
-                <a14:hiddenLine xmlns:a14="http://schemas.microsoft.com/office/drawing/2010/main" xmlns="" w="9525">
+                <a14:hiddenLine xmlns="" xmlns:a14="http://schemas.microsoft.com/office/drawing/2010/main" w="9525">
                   <a:solidFill>
                     <a:srgbClr val="000000"/>
                   </a:solidFill>
@@ -4540,7 +4540,7 @@
             </a:ln>
             <a:extLst>
               <a:ext uri="{91240B29-F687-4f45-9708-019B960494DF}">
-                <a14:hiddenLine xmlns:a14="http://schemas.microsoft.com/office/drawing/2010/main" xmlns="" w="9525">
+                <a14:hiddenLine xmlns="" xmlns:a14="http://schemas.microsoft.com/office/drawing/2010/main" w="9525">
                   <a:solidFill>
                     <a:srgbClr val="000000"/>
                   </a:solidFill>
@@ -4660,7 +4660,7 @@
             </a:ln>
             <a:extLst>
               <a:ext uri="{91240B29-F687-4f45-9708-019B960494DF}">
-                <a14:hiddenLine xmlns:a14="http://schemas.microsoft.com/office/drawing/2010/main" xmlns="" w="9525">
+                <a14:hiddenLine xmlns="" xmlns:a14="http://schemas.microsoft.com/office/drawing/2010/main" w="9525">
                   <a:solidFill>
                     <a:srgbClr val="000000"/>
                   </a:solidFill>
@@ -4728,7 +4728,7 @@
             </a:ln>
             <a:extLst>
               <a:ext uri="{91240B29-F687-4f45-9708-019B960494DF}">
-                <a14:hiddenLine xmlns:a14="http://schemas.microsoft.com/office/drawing/2010/main" xmlns="" w="9525">
+                <a14:hiddenLine xmlns="" xmlns:a14="http://schemas.microsoft.com/office/drawing/2010/main" w="9525">
                   <a:solidFill>
                     <a:srgbClr val="000000"/>
                   </a:solidFill>
@@ -4818,7 +4818,7 @@
             </a:ln>
             <a:extLst>
               <a:ext uri="{91240B29-F687-4f45-9708-019B960494DF}">
-                <a14:hiddenLine xmlns:a14="http://schemas.microsoft.com/office/drawing/2010/main" xmlns="" w="9525">
+                <a14:hiddenLine xmlns="" xmlns:a14="http://schemas.microsoft.com/office/drawing/2010/main" w="9525">
                   <a:solidFill>
                     <a:srgbClr val="000000"/>
                   </a:solidFill>
@@ -4958,7 +4958,7 @@
           <a:p>
             <a:fld id="{402D7A8C-E8C9-C044-B17F-4F3BDC02CA13}" type="datetime1">
               <a:rPr lang="en-US" smtClean="0"/>
-              <a:t>8/18/26</a:t>
+              <a:t>8/25/26</a:t>
             </a:fld>
             <a:endParaRPr lang="en-US"/>
           </a:p>
@@ -5225,7 +5225,7 @@
           <a:p>
             <a:fld id="{37F8A4E9-907E-024F-942D-1027DBDB6B95}" type="datetime1">
               <a:rPr lang="en-US" smtClean="0"/>
-              <a:t>8/18/26</a:t>
+              <a:t>8/25/26</a:t>
             </a:fld>
             <a:endParaRPr lang="en-US"/>
           </a:p>
@@ -5421,7 +5421,7 @@
           <a:p>
             <a:fld id="{0FE75626-F07C-1141-9EC1-D81C02E85261}" type="datetime1">
               <a:rPr lang="en-US" smtClean="0"/>
-              <a:t>8/18/26</a:t>
+              <a:t>8/25/26</a:t>
             </a:fld>
             <a:endParaRPr lang="en-US"/>
           </a:p>
@@ -5684,7 +5684,7 @@
           <a:p>
             <a:fld id="{A542032B-A565-A745-AD03-A3A1AE898D44}" type="datetime1">
               <a:rPr lang="en-US" smtClean="0"/>
-              <a:t>8/18/26</a:t>
+              <a:t>8/25/26</a:t>
             </a:fld>
             <a:endParaRPr lang="en-US"/>
           </a:p>
@@ -6118,7 +6118,7 @@
           <a:p>
             <a:fld id="{D07DFA05-D8BC-F743-AAC8-830078F9EC2E}" type="datetime1">
               <a:rPr lang="en-US" smtClean="0"/>
-              <a:t>8/18/26</a:t>
+              <a:t>8/25/26</a:t>
             </a:fld>
             <a:endParaRPr lang="en-US"/>
           </a:p>
@@ -6664,7 +6664,7 @@
           <a:p>
             <a:fld id="{A30ACE03-F6AA-B648-AEDA-6D288BF5F57D}" type="datetime1">
               <a:rPr lang="en-US" smtClean="0"/>
-              <a:t>8/18/26</a:t>
+              <a:t>8/25/26</a:t>
             </a:fld>
             <a:endParaRPr lang="en-US"/>
           </a:p>
@@ -7384,7 +7384,7 @@
           <a:p>
             <a:fld id="{00CC296A-FFCD-5143-BB88-7498A31860D8}" type="datetime1">
               <a:rPr lang="en-US" smtClean="0"/>
-              <a:t>8/18/26</a:t>
+              <a:t>8/25/26</a:t>
             </a:fld>
             <a:endParaRPr lang="en-US"/>
           </a:p>
@@ -7554,7 +7554,7 @@
           <a:p>
             <a:fld id="{C6A5FF73-2E33-5542-B000-2DC2E7840EBF}" type="datetime1">
               <a:rPr lang="en-US" smtClean="0"/>
-              <a:t>8/18/26</a:t>
+              <a:t>8/25/26</a:t>
             </a:fld>
             <a:endParaRPr lang="en-US"/>
           </a:p>
@@ -7734,7 +7734,7 @@
           <a:p>
             <a:fld id="{02F42606-263B-9C4F-8747-C46201865648}" type="datetime1">
               <a:rPr lang="en-US" smtClean="0"/>
-              <a:t>8/18/26</a:t>
+              <a:t>8/25/26</a:t>
             </a:fld>
             <a:endParaRPr lang="en-US"/>
           </a:p>
@@ -7904,7 +7904,7 @@
           <a:p>
             <a:fld id="{5F8D537B-242B-6E4B-B3AA-5700AD130DAB}" type="datetime1">
               <a:rPr lang="en-US" smtClean="0"/>
-              <a:t>8/18/26</a:t>
+              <a:t>8/25/26</a:t>
             </a:fld>
             <a:endParaRPr lang="en-US"/>
           </a:p>
@@ -8154,7 +8154,7 @@
           <a:p>
             <a:fld id="{7BE0DB53-1439-2E4C-8FEF-8A4982596F3C}" type="datetime1">
               <a:rPr lang="en-US" smtClean="0"/>
-              <a:t>8/18/26</a:t>
+              <a:t>8/25/26</a:t>
             </a:fld>
             <a:endParaRPr lang="en-US"/>
           </a:p>
@@ -8386,7 +8386,7 @@
           <a:p>
             <a:fld id="{DC68B4C4-E214-B54E-A5C2-DF036DC63B34}" type="datetime1">
               <a:rPr lang="en-US" smtClean="0"/>
-              <a:t>8/18/26</a:t>
+              <a:t>8/25/26</a:t>
             </a:fld>
             <a:endParaRPr lang="en-US"/>
           </a:p>
@@ -8772,7 +8772,7 @@
           <a:p>
             <a:fld id="{7FAC456D-E6B2-0642-9BEB-83D0B9BAC47F}" type="datetime1">
               <a:rPr lang="en-US" smtClean="0"/>
-              <a:t>8/18/26</a:t>
+              <a:t>8/25/26</a:t>
             </a:fld>
             <a:endParaRPr lang="en-US"/>
           </a:p>
@@ -8895,7 +8895,7 @@
           <a:p>
             <a:fld id="{16AA1968-45EA-A240-A17F-44B2A8A0BB1D}" type="datetime1">
               <a:rPr lang="en-US" smtClean="0"/>
-              <a:t>8/18/26</a:t>
+              <a:t>8/25/26</a:t>
             </a:fld>
             <a:endParaRPr lang="en-US"/>
           </a:p>
@@ -8990,7 +8990,7 @@
           <a:p>
             <a:fld id="{26CFB313-9C91-AB4A-9BD3-BE60645D454E}" type="datetime1">
               <a:rPr lang="en-US" smtClean="0"/>
-              <a:t>8/18/26</a:t>
+              <a:t>8/25/26</a:t>
             </a:fld>
             <a:endParaRPr lang="en-US"/>
           </a:p>
@@ -9239,7 +9239,7 @@
           <a:p>
             <a:fld id="{400DE57A-C1B2-FD48-B4C3-5BEA75776498}" type="datetime1">
               <a:rPr lang="en-US" smtClean="0"/>
-              <a:t>8/18/26</a:t>
+              <a:t>8/25/26</a:t>
             </a:fld>
             <a:endParaRPr lang="en-US"/>
           </a:p>
@@ -9524,7 +9524,7 @@
           <a:p>
             <a:fld id="{A982DE63-F783-CF4C-A886-D3D65D6D3AA3}" type="datetime1">
               <a:rPr lang="en-US" smtClean="0"/>
-              <a:t>8/18/26</a:t>
+              <a:t>8/25/26</a:t>
             </a:fld>
             <a:endParaRPr lang="en-US"/>
           </a:p>
@@ -9647,7 +9647,7 @@
           <a:noFill/>
           <a:extLst>
             <a:ext uri="{909E8E84-426E-40dd-AFC4-6F175D3DCCD1}">
-              <a14:hiddenFill xmlns:a14="http://schemas.microsoft.com/office/drawing/2010/main" xmlns="">
+              <a14:hiddenFill xmlns="" xmlns:a14="http://schemas.microsoft.com/office/drawing/2010/main">
                 <a:solidFill>
                   <a:srgbClr val="FFFFFF"/>
                 </a:solidFill>
@@ -9721,7 +9721,7 @@
               </a:ln>
               <a:extLst>
                 <a:ext uri="{91240B29-F687-4f45-9708-019B960494DF}">
-                  <a14:hiddenLine xmlns:a14="http://schemas.microsoft.com/office/drawing/2010/main" xmlns="" w="9525">
+                  <a14:hiddenLine xmlns="" xmlns:a14="http://schemas.microsoft.com/office/drawing/2010/main" w="9525">
                     <a:solidFill>
                       <a:srgbClr val="000000"/>
                     </a:solidFill>
@@ -9811,7 +9811,7 @@
               </a:ln>
               <a:extLst>
                 <a:ext uri="{91240B29-F687-4f45-9708-019B960494DF}">
-                  <a14:hiddenLine xmlns:a14="http://schemas.microsoft.com/office/drawing/2010/main" xmlns="" w="9525">
+                  <a14:hiddenLine xmlns="" xmlns:a14="http://schemas.microsoft.com/office/drawing/2010/main" w="9525">
                     <a:solidFill>
                       <a:srgbClr val="000000"/>
                     </a:solidFill>
@@ -9901,7 +9901,7 @@
               </a:ln>
               <a:extLst>
                 <a:ext uri="{91240B29-F687-4f45-9708-019B960494DF}">
-                  <a14:hiddenLine xmlns:a14="http://schemas.microsoft.com/office/drawing/2010/main" xmlns="" w="9525">
+                  <a14:hiddenLine xmlns="" xmlns:a14="http://schemas.microsoft.com/office/drawing/2010/main" w="9525">
                     <a:solidFill>
                       <a:srgbClr val="000000"/>
                     </a:solidFill>
@@ -9963,7 +9963,7 @@
               </a:ln>
               <a:extLst>
                 <a:ext uri="{91240B29-F687-4f45-9708-019B960494DF}">
-                  <a14:hiddenLine xmlns:a14="http://schemas.microsoft.com/office/drawing/2010/main" xmlns="" w="9525">
+                  <a14:hiddenLine xmlns="" xmlns:a14="http://schemas.microsoft.com/office/drawing/2010/main" w="9525">
                     <a:solidFill>
                       <a:srgbClr val="000000"/>
                     </a:solidFill>
@@ -10053,7 +10053,7 @@
               </a:ln>
               <a:extLst>
                 <a:ext uri="{91240B29-F687-4f45-9708-019B960494DF}">
-                  <a14:hiddenLine xmlns:a14="http://schemas.microsoft.com/office/drawing/2010/main" xmlns="" w="9525">
+                  <a14:hiddenLine xmlns="" xmlns:a14="http://schemas.microsoft.com/office/drawing/2010/main" w="9525">
                     <a:solidFill>
                       <a:srgbClr val="000000"/>
                     </a:solidFill>
@@ -10115,7 +10115,7 @@
               </a:ln>
               <a:extLst>
                 <a:ext uri="{91240B29-F687-4f45-9708-019B960494DF}">
-                  <a14:hiddenLine xmlns:a14="http://schemas.microsoft.com/office/drawing/2010/main" xmlns="" w="9525">
+                  <a14:hiddenLine xmlns="" xmlns:a14="http://schemas.microsoft.com/office/drawing/2010/main" w="9525">
                     <a:solidFill>
                       <a:srgbClr val="000000"/>
                     </a:solidFill>
@@ -10177,7 +10177,7 @@
               </a:ln>
               <a:extLst>
                 <a:ext uri="{91240B29-F687-4f45-9708-019B960494DF}">
-                  <a14:hiddenLine xmlns:a14="http://schemas.microsoft.com/office/drawing/2010/main" xmlns="" w="9525">
+                  <a14:hiddenLine xmlns="" xmlns:a14="http://schemas.microsoft.com/office/drawing/2010/main" w="9525">
                     <a:solidFill>
                       <a:srgbClr val="000000"/>
                     </a:solidFill>
@@ -10267,7 +10267,7 @@
               </a:ln>
               <a:extLst>
                 <a:ext uri="{91240B29-F687-4f45-9708-019B960494DF}">
-                  <a14:hiddenLine xmlns:a14="http://schemas.microsoft.com/office/drawing/2010/main" xmlns="" w="9525">
+                  <a14:hiddenLine xmlns="" xmlns:a14="http://schemas.microsoft.com/office/drawing/2010/main" w="9525">
                     <a:solidFill>
                       <a:srgbClr val="000000"/>
                     </a:solidFill>
@@ -10357,7 +10357,7 @@
               </a:ln>
               <a:extLst>
                 <a:ext uri="{91240B29-F687-4f45-9708-019B960494DF}">
-                  <a14:hiddenLine xmlns:a14="http://schemas.microsoft.com/office/drawing/2010/main" xmlns="" w="9525">
+                  <a14:hiddenLine xmlns="" xmlns:a14="http://schemas.microsoft.com/office/drawing/2010/main" w="9525">
                     <a:solidFill>
                       <a:srgbClr val="000000"/>
                     </a:solidFill>
@@ -10419,7 +10419,7 @@
               </a:ln>
               <a:extLst>
                 <a:ext uri="{91240B29-F687-4f45-9708-019B960494DF}">
-                  <a14:hiddenLine xmlns:a14="http://schemas.microsoft.com/office/drawing/2010/main" xmlns="" w="9525">
+                  <a14:hiddenLine xmlns="" xmlns:a14="http://schemas.microsoft.com/office/drawing/2010/main" w="9525">
                     <a:solidFill>
                       <a:srgbClr val="000000"/>
                     </a:solidFill>
@@ -10529,7 +10529,7 @@
               </a:ln>
               <a:extLst>
                 <a:ext uri="{91240B29-F687-4f45-9708-019B960494DF}">
-                  <a14:hiddenLine xmlns:a14="http://schemas.microsoft.com/office/drawing/2010/main" xmlns="" w="9525">
+                  <a14:hiddenLine xmlns="" xmlns:a14="http://schemas.microsoft.com/office/drawing/2010/main" w="9525">
                     <a:solidFill>
                       <a:srgbClr val="000000"/>
                     </a:solidFill>
@@ -10613,7 +10613,7 @@
               </a:ln>
               <a:extLst>
                 <a:ext uri="{91240B29-F687-4f45-9708-019B960494DF}">
-                  <a14:hiddenLine xmlns:a14="http://schemas.microsoft.com/office/drawing/2010/main" xmlns="" w="9525">
+                  <a14:hiddenLine xmlns="" xmlns:a14="http://schemas.microsoft.com/office/drawing/2010/main" w="9525">
                     <a:solidFill>
                       <a:srgbClr val="000000"/>
                     </a:solidFill>
@@ -10675,7 +10675,7 @@
               </a:ln>
               <a:extLst>
                 <a:ext uri="{91240B29-F687-4f45-9708-019B960494DF}">
-                  <a14:hiddenLine xmlns:a14="http://schemas.microsoft.com/office/drawing/2010/main" xmlns="" w="9525">
+                  <a14:hiddenLine xmlns="" xmlns:a14="http://schemas.microsoft.com/office/drawing/2010/main" w="9525">
                     <a:solidFill>
                       <a:srgbClr val="000000"/>
                     </a:solidFill>
@@ -10737,7 +10737,7 @@
               </a:ln>
               <a:extLst>
                 <a:ext uri="{91240B29-F687-4f45-9708-019B960494DF}">
-                  <a14:hiddenLine xmlns:a14="http://schemas.microsoft.com/office/drawing/2010/main" xmlns="" w="9525">
+                  <a14:hiddenLine xmlns="" xmlns:a14="http://schemas.microsoft.com/office/drawing/2010/main" w="9525">
                     <a:solidFill>
                       <a:srgbClr val="000000"/>
                     </a:solidFill>
@@ -10827,7 +10827,7 @@
               </a:ln>
               <a:extLst>
                 <a:ext uri="{91240B29-F687-4f45-9708-019B960494DF}">
-                  <a14:hiddenLine xmlns:a14="http://schemas.microsoft.com/office/drawing/2010/main" xmlns="" w="9525">
+                  <a14:hiddenLine xmlns="" xmlns:a14="http://schemas.microsoft.com/office/drawing/2010/main" w="9525">
                     <a:solidFill>
                       <a:srgbClr val="000000"/>
                     </a:solidFill>
@@ -10861,7 +10861,7 @@
               </a:ln>
               <a:extLst>
                 <a:ext uri="{91240B29-F687-4f45-9708-019B960494DF}">
-                  <a14:hiddenLine xmlns:a14="http://schemas.microsoft.com/office/drawing/2010/main" xmlns="" w="9525">
+                  <a14:hiddenLine xmlns="" xmlns:a14="http://schemas.microsoft.com/office/drawing/2010/main" w="9525">
                     <a:solidFill>
                       <a:srgbClr val="000000"/>
                     </a:solidFill>
@@ -10926,7 +10926,7 @@
               </a:ln>
               <a:extLst>
                 <a:ext uri="{91240B29-F687-4f45-9708-019B960494DF}">
-                  <a14:hiddenLine xmlns:a14="http://schemas.microsoft.com/office/drawing/2010/main" xmlns="" w="9525">
+                  <a14:hiddenLine xmlns="" xmlns:a14="http://schemas.microsoft.com/office/drawing/2010/main" w="9525">
                     <a:solidFill>
                       <a:srgbClr val="000000"/>
                     </a:solidFill>
@@ -11016,7 +11016,7 @@
               </a:ln>
               <a:extLst>
                 <a:ext uri="{91240B29-F687-4f45-9708-019B960494DF}">
-                  <a14:hiddenLine xmlns:a14="http://schemas.microsoft.com/office/drawing/2010/main" xmlns="" w="9525">
+                  <a14:hiddenLine xmlns="" xmlns:a14="http://schemas.microsoft.com/office/drawing/2010/main" w="9525">
                     <a:solidFill>
                       <a:srgbClr val="000000"/>
                     </a:solidFill>
@@ -11078,7 +11078,7 @@
               </a:ln>
               <a:extLst>
                 <a:ext uri="{91240B29-F687-4f45-9708-019B960494DF}">
-                  <a14:hiddenLine xmlns:a14="http://schemas.microsoft.com/office/drawing/2010/main" xmlns="" w="9525">
+                  <a14:hiddenLine xmlns="" xmlns:a14="http://schemas.microsoft.com/office/drawing/2010/main" w="9525">
                     <a:solidFill>
                       <a:srgbClr val="000000"/>
                     </a:solidFill>
@@ -11168,7 +11168,7 @@
               </a:ln>
               <a:extLst>
                 <a:ext uri="{91240B29-F687-4f45-9708-019B960494DF}">
-                  <a14:hiddenLine xmlns:a14="http://schemas.microsoft.com/office/drawing/2010/main" xmlns="" w="9525">
+                  <a14:hiddenLine xmlns="" xmlns:a14="http://schemas.microsoft.com/office/drawing/2010/main" w="9525">
                     <a:solidFill>
                       <a:srgbClr val="000000"/>
                     </a:solidFill>
@@ -11233,7 +11233,7 @@
               </a:ln>
               <a:extLst>
                 <a:ext uri="{91240B29-F687-4f45-9708-019B960494DF}">
-                  <a14:hiddenLine xmlns:a14="http://schemas.microsoft.com/office/drawing/2010/main" xmlns="" w="9525">
+                  <a14:hiddenLine xmlns="" xmlns:a14="http://schemas.microsoft.com/office/drawing/2010/main" w="9525">
                     <a:solidFill>
                       <a:srgbClr val="000000"/>
                     </a:solidFill>
@@ -11295,7 +11295,7 @@
               </a:ln>
               <a:extLst>
                 <a:ext uri="{91240B29-F687-4f45-9708-019B960494DF}">
-                  <a14:hiddenLine xmlns:a14="http://schemas.microsoft.com/office/drawing/2010/main" xmlns="" w="9525">
+                  <a14:hiddenLine xmlns="" xmlns:a14="http://schemas.microsoft.com/office/drawing/2010/main" w="9525">
                     <a:solidFill>
                       <a:srgbClr val="000000"/>
                     </a:solidFill>
@@ -11385,7 +11385,7 @@
               </a:ln>
               <a:extLst>
                 <a:ext uri="{91240B29-F687-4f45-9708-019B960494DF}">
-                  <a14:hiddenLine xmlns:a14="http://schemas.microsoft.com/office/drawing/2010/main" xmlns="" w="9525">
+                  <a14:hiddenLine xmlns="" xmlns:a14="http://schemas.microsoft.com/office/drawing/2010/main" w="9525">
                     <a:solidFill>
                       <a:srgbClr val="000000"/>
                     </a:solidFill>
@@ -11475,7 +11475,7 @@
               </a:ln>
               <a:extLst>
                 <a:ext uri="{91240B29-F687-4f45-9708-019B960494DF}">
-                  <a14:hiddenLine xmlns:a14="http://schemas.microsoft.com/office/drawing/2010/main" xmlns="" w="9525">
+                  <a14:hiddenLine xmlns="" xmlns:a14="http://schemas.microsoft.com/office/drawing/2010/main" w="9525">
                     <a:solidFill>
                       <a:srgbClr val="000000"/>
                     </a:solidFill>
@@ -11540,7 +11540,7 @@
               </a:ln>
               <a:extLst>
                 <a:ext uri="{91240B29-F687-4f45-9708-019B960494DF}">
-                  <a14:hiddenLine xmlns:a14="http://schemas.microsoft.com/office/drawing/2010/main" xmlns="" w="9525">
+                  <a14:hiddenLine xmlns="" xmlns:a14="http://schemas.microsoft.com/office/drawing/2010/main" w="9525">
                     <a:solidFill>
                       <a:srgbClr val="000000"/>
                     </a:solidFill>
@@ -11660,7 +11660,7 @@
               </a:ln>
               <a:extLst>
                 <a:ext uri="{91240B29-F687-4f45-9708-019B960494DF}">
-                  <a14:hiddenLine xmlns:a14="http://schemas.microsoft.com/office/drawing/2010/main" xmlns="" w="9525">
+                  <a14:hiddenLine xmlns="" xmlns:a14="http://schemas.microsoft.com/office/drawing/2010/main" w="9525">
                     <a:solidFill>
                       <a:srgbClr val="000000"/>
                     </a:solidFill>
@@ -11741,7 +11741,7 @@
               </a:ln>
               <a:extLst>
                 <a:ext uri="{91240B29-F687-4f45-9708-019B960494DF}">
-                  <a14:hiddenLine xmlns:a14="http://schemas.microsoft.com/office/drawing/2010/main" xmlns="" w="9525">
+                  <a14:hiddenLine xmlns="" xmlns:a14="http://schemas.microsoft.com/office/drawing/2010/main" w="9525">
                     <a:solidFill>
                       <a:srgbClr val="000000"/>
                     </a:solidFill>
@@ -11856,7 +11856,7 @@
               </a:ln>
               <a:extLst>
                 <a:ext uri="{91240B29-F687-4f45-9708-019B960494DF}">
-                  <a14:hiddenLine xmlns:a14="http://schemas.microsoft.com/office/drawing/2010/main" xmlns="" w="9525">
+                  <a14:hiddenLine xmlns="" xmlns:a14="http://schemas.microsoft.com/office/drawing/2010/main" w="9525">
                     <a:solidFill>
                       <a:srgbClr val="000000"/>
                     </a:solidFill>
@@ -11946,7 +11946,7 @@
               </a:ln>
               <a:extLst>
                 <a:ext uri="{91240B29-F687-4f45-9708-019B960494DF}">
-                  <a14:hiddenLine xmlns:a14="http://schemas.microsoft.com/office/drawing/2010/main" xmlns="" w="9525">
+                  <a14:hiddenLine xmlns="" xmlns:a14="http://schemas.microsoft.com/office/drawing/2010/main" w="9525">
                     <a:solidFill>
                       <a:srgbClr val="000000"/>
                     </a:solidFill>
@@ -12011,7 +12011,7 @@
               </a:ln>
               <a:extLst>
                 <a:ext uri="{91240B29-F687-4f45-9708-019B960494DF}">
-                  <a14:hiddenLine xmlns:a14="http://schemas.microsoft.com/office/drawing/2010/main" xmlns="" w="9525">
+                  <a14:hiddenLine xmlns="" xmlns:a14="http://schemas.microsoft.com/office/drawing/2010/main" w="9525">
                     <a:solidFill>
                       <a:srgbClr val="000000"/>
                     </a:solidFill>
@@ -12101,7 +12101,7 @@
               </a:ln>
               <a:extLst>
                 <a:ext uri="{91240B29-F687-4f45-9708-019B960494DF}">
-                  <a14:hiddenLine xmlns:a14="http://schemas.microsoft.com/office/drawing/2010/main" xmlns="" w="9525">
+                  <a14:hiddenLine xmlns="" xmlns:a14="http://schemas.microsoft.com/office/drawing/2010/main" w="9525">
                     <a:solidFill>
                       <a:srgbClr val="000000"/>
                     </a:solidFill>
@@ -12169,7 +12169,7 @@
               </a:ln>
               <a:extLst>
                 <a:ext uri="{91240B29-F687-4f45-9708-019B960494DF}">
-                  <a14:hiddenLine xmlns:a14="http://schemas.microsoft.com/office/drawing/2010/main" xmlns="" w="9525">
+                  <a14:hiddenLine xmlns="" xmlns:a14="http://schemas.microsoft.com/office/drawing/2010/main" w="9525">
                     <a:solidFill>
                       <a:srgbClr val="000000"/>
                     </a:solidFill>
@@ -12259,7 +12259,7 @@
               </a:ln>
               <a:extLst>
                 <a:ext uri="{91240B29-F687-4f45-9708-019B960494DF}">
-                  <a14:hiddenLine xmlns:a14="http://schemas.microsoft.com/office/drawing/2010/main" xmlns="" w="9525">
+                  <a14:hiddenLine xmlns="" xmlns:a14="http://schemas.microsoft.com/office/drawing/2010/main" w="9525">
                     <a:solidFill>
                       <a:srgbClr val="000000"/>
                     </a:solidFill>
@@ -12327,7 +12327,7 @@
               </a:ln>
               <a:extLst>
                 <a:ext uri="{91240B29-F687-4f45-9708-019B960494DF}">
-                  <a14:hiddenLine xmlns:a14="http://schemas.microsoft.com/office/drawing/2010/main" xmlns="" w="9525">
+                  <a14:hiddenLine xmlns="" xmlns:a14="http://schemas.microsoft.com/office/drawing/2010/main" w="9525">
                     <a:solidFill>
                       <a:srgbClr val="000000"/>
                     </a:solidFill>
@@ -12417,7 +12417,7 @@
               </a:ln>
               <a:extLst>
                 <a:ext uri="{91240B29-F687-4f45-9708-019B960494DF}">
-                  <a14:hiddenLine xmlns:a14="http://schemas.microsoft.com/office/drawing/2010/main" xmlns="" w="9525">
+                  <a14:hiddenLine xmlns="" xmlns:a14="http://schemas.microsoft.com/office/drawing/2010/main" w="9525">
                     <a:solidFill>
                       <a:srgbClr val="000000"/>
                     </a:solidFill>
@@ -12451,7 +12451,7 @@
               </a:ln>
               <a:extLst>
                 <a:ext uri="{91240B29-F687-4f45-9708-019B960494DF}">
-                  <a14:hiddenLine xmlns:a14="http://schemas.microsoft.com/office/drawing/2010/main" xmlns="" w="9525">
+                  <a14:hiddenLine xmlns="" xmlns:a14="http://schemas.microsoft.com/office/drawing/2010/main" w="9525">
                     <a:solidFill>
                       <a:srgbClr val="000000"/>
                     </a:solidFill>
@@ -12591,7 +12591,7 @@
           <a:p>
             <a:fld id="{59173DD1-A275-4445-AB1E-9DFF752BE39B}" type="datetime1">
               <a:rPr lang="en-US" smtClean="0"/>
-              <a:t>8/18/26</a:t>
+              <a:t>8/25/26</a:t>
             </a:fld>
             <a:endParaRPr lang="en-US"/>
           </a:p>
@@ -14107,8 +14107,8 @@
           </a:p>
         </p:txBody>
       </p:sp>
-      <mc:AlternateContent xmlns:mc="http://schemas.openxmlformats.org/markup-compatibility/2006">
-        <mc:Choice xmlns:a14="http://schemas.microsoft.com/office/drawing/2010/main" Requires="a14">
+      <mc:AlternateContent xmlns:mc="http://schemas.openxmlformats.org/markup-compatibility/2006" xmlns:a14="http://schemas.microsoft.com/office/drawing/2010/main">
+        <mc:Choice Requires="a14">
           <p:sp>
             <p:nvSpPr>
               <p:cNvPr id="307203" name="Rectangle 3">
@@ -14301,7 +14301,7 @@
             </p:txBody>
           </p:sp>
         </mc:Choice>
-        <mc:Fallback>
+        <mc:Fallback xmlns="">
           <p:sp>
             <p:nvSpPr>
               <p:cNvPr id="307203" name="Rectangle 3">
@@ -14317,7 +14317,7 @@
               <p:nvPr>
                 <p:ph idx="1"/>
                 <p:custDataLst>
-                  <p:tags r:id="rId2"/>
+                  <p:tags r:id="rId4"/>
                 </p:custDataLst>
               </p:nvPr>
             </p:nvSpPr>
@@ -14327,7 +14327,7 @@
                 <a:ext cx="9905998" cy="5499979"/>
               </a:xfrm>
               <a:blipFill>
-                <a:blip r:embed="rId4"/>
+                <a:blip r:embed="rId5"/>
                 <a:stretch>
                   <a:fillRect l="-1280" t="-3002"/>
                 </a:stretch>
